--- a/minesweeper_projekt.pptx
+++ b/minesweeper_projekt.pptx
@@ -13,25 +13,18 @@
     <p:sldId id="258" r:id="rId4"/>
     <p:sldId id="259" r:id="rId5"/>
     <p:sldId id="260" r:id="rId6"/>
-    <p:sldId id="261" r:id="rId7"/>
+    <p:sldId id="262" r:id="rId7"/>
   </p:sldIdLst>
-  <p:sldSz cx="14630400" cy="8229600"/>
-  <p:notesSz cx="8229600" cy="14630400"/>
+  <p:sldSz cx="12192000" cy="6858000"/>
+  <p:notesSz cx="6858000" cy="12192000"/>
   <p:embeddedFontLst>
     <p:embeddedFont>
-      <p:font typeface="Consolas" panose="020B0609020204030204" pitchFamily="49" charset="0"/>
+      <p:font typeface="Roboto" panose="02000000000000000000" pitchFamily="2" charset="0"/>
       <p:regular r:id="rId9"/>
-      <p:bold r:id="rId10"/>
-      <p:italic r:id="rId11"/>
-      <p:boldItalic r:id="rId12"/>
     </p:embeddedFont>
     <p:embeddedFont>
-      <p:font typeface="DM Sans" pitchFamily="2" charset="-18"/>
-      <p:regular r:id="rId13"/>
-    </p:embeddedFont>
-    <p:embeddedFont>
-      <p:font typeface="PT Serif" panose="020A0603040505020204" pitchFamily="18" charset="-18"/>
-      <p:regular r:id="rId14"/>
+      <p:font typeface="Roboto Mono Medium" panose="00000009000000000000" pitchFamily="49" charset="0"/>
+      <p:regular r:id="rId10"/>
     </p:embeddedFont>
   </p:embeddedFontLst>
   <p:defaultTextStyle>
@@ -162,7 +155,7 @@
     </p:spTree>
     <p:extLst>
       <p:ext uri="{BB962C8B-B14F-4D97-AF65-F5344CB8AC3E}">
-        <p14:creationId xmlns:p14="http://schemas.microsoft.com/office/powerpoint/2010/main" val="1277846794"/>
+        <p14:creationId xmlns:p14="http://schemas.microsoft.com/office/powerpoint/2010/main" val="3113559500"/>
       </p:ext>
     </p:extLst>
   </p:cSld>
@@ -799,6 +792,14 @@
 <file path=ppt/slideLayouts/slideLayout2.xml><?xml version="1.0" encoding="utf-8"?>
 <p:sldLayout xmlns:a="http://schemas.openxmlformats.org/drawingml/2006/main" xmlns:r="http://schemas.openxmlformats.org/officeDocument/2006/relationships" xmlns:p="http://schemas.openxmlformats.org/presentationml/2006/main" preserve="1">
   <p:cSld name="Slide 1 master">
+    <p:bg>
+      <p:bgPr>
+        <a:solidFill>
+          <a:srgbClr val="000000"/>
+        </a:solidFill>
+        <a:effectLst/>
+      </p:bgPr>
+    </p:bg>
     <p:spTree>
       <p:nvGrpSpPr>
         <p:cNvPr id="1" name=""/>
@@ -822,13 +823,13 @@
         <p:spPr>
           <a:xfrm>
             <a:off x="0" y="0"/>
-            <a:ext cx="14630400" cy="8229600"/>
+            <a:ext cx="12191695" cy="6858000"/>
           </a:xfrm>
           <a:prstGeom prst="rect">
             <a:avLst/>
           </a:prstGeom>
           <a:solidFill>
-            <a:srgbClr val="FAFAFA"/>
+            <a:srgbClr val="010303"/>
           </a:solidFill>
           <a:ln/>
         </p:spPr>
@@ -842,13 +843,13 @@
         <p:spPr>
           <a:xfrm>
             <a:off x="0" y="0"/>
-            <a:ext cx="14630400" cy="8229600"/>
+            <a:ext cx="12191695" cy="6858000"/>
           </a:xfrm>
           <a:prstGeom prst="rect">
             <a:avLst/>
           </a:prstGeom>
           <a:solidFill>
-            <a:srgbClr val="FFFFFF"/>
+            <a:srgbClr val="212121"/>
           </a:solidFill>
           <a:ln/>
         </p:spPr>
@@ -871,8 +872,8 @@
         </p:blipFill>
         <p:spPr>
           <a:xfrm>
-            <a:off x="12839215" y="7749540"/>
-            <a:ext cx="1722605" cy="411480"/>
+            <a:off x="11076875" y="6558991"/>
+            <a:ext cx="1071843" cy="256032"/>
           </a:xfrm>
           <a:prstGeom prst="rect">
             <a:avLst/>
@@ -890,6 +891,14 @@
 <file path=ppt/slideLayouts/slideLayout3.xml><?xml version="1.0" encoding="utf-8"?>
 <p:sldLayout xmlns:a="http://schemas.openxmlformats.org/drawingml/2006/main" xmlns:r="http://schemas.openxmlformats.org/officeDocument/2006/relationships" xmlns:p="http://schemas.openxmlformats.org/presentationml/2006/main" preserve="1">
   <p:cSld name="Slide 2 master">
+    <p:bg>
+      <p:bgPr>
+        <a:solidFill>
+          <a:srgbClr val="000000"/>
+        </a:solidFill>
+        <a:effectLst/>
+      </p:bgPr>
+    </p:bg>
     <p:spTree>
       <p:nvGrpSpPr>
         <p:cNvPr id="1" name=""/>
@@ -913,13 +922,13 @@
         <p:spPr>
           <a:xfrm>
             <a:off x="0" y="0"/>
-            <a:ext cx="14630400" cy="8229600"/>
+            <a:ext cx="12191695" cy="6858000"/>
           </a:xfrm>
           <a:prstGeom prst="rect">
             <a:avLst/>
           </a:prstGeom>
           <a:solidFill>
-            <a:srgbClr val="FAFAFA"/>
+            <a:srgbClr val="010303"/>
           </a:solidFill>
           <a:ln/>
         </p:spPr>
@@ -933,13 +942,13 @@
         <p:spPr>
           <a:xfrm>
             <a:off x="0" y="0"/>
-            <a:ext cx="14630400" cy="8229600"/>
+            <a:ext cx="12191695" cy="6858000"/>
           </a:xfrm>
           <a:prstGeom prst="rect">
             <a:avLst/>
           </a:prstGeom>
           <a:solidFill>
-            <a:srgbClr val="FFFFFF"/>
+            <a:srgbClr val="212121"/>
           </a:solidFill>
           <a:ln/>
         </p:spPr>
@@ -962,8 +971,8 @@
         </p:blipFill>
         <p:spPr>
           <a:xfrm>
-            <a:off x="12839215" y="7749540"/>
-            <a:ext cx="1722605" cy="411480"/>
+            <a:off x="11076875" y="6558991"/>
+            <a:ext cx="1071843" cy="256032"/>
           </a:xfrm>
           <a:prstGeom prst="rect">
             <a:avLst/>
@@ -981,6 +990,14 @@
 <file path=ppt/slideLayouts/slideLayout4.xml><?xml version="1.0" encoding="utf-8"?>
 <p:sldLayout xmlns:a="http://schemas.openxmlformats.org/drawingml/2006/main" xmlns:r="http://schemas.openxmlformats.org/officeDocument/2006/relationships" xmlns:p="http://schemas.openxmlformats.org/presentationml/2006/main" preserve="1">
   <p:cSld name="Slide 3 master">
+    <p:bg>
+      <p:bgPr>
+        <a:solidFill>
+          <a:srgbClr val="000000"/>
+        </a:solidFill>
+        <a:effectLst/>
+      </p:bgPr>
+    </p:bg>
     <p:spTree>
       <p:nvGrpSpPr>
         <p:cNvPr id="1" name=""/>
@@ -1004,13 +1021,13 @@
         <p:spPr>
           <a:xfrm>
             <a:off x="0" y="0"/>
-            <a:ext cx="14630400" cy="8229600"/>
+            <a:ext cx="12191695" cy="6858000"/>
           </a:xfrm>
           <a:prstGeom prst="rect">
             <a:avLst/>
           </a:prstGeom>
           <a:solidFill>
-            <a:srgbClr val="FAFAFA"/>
+            <a:srgbClr val="010303"/>
           </a:solidFill>
           <a:ln/>
         </p:spPr>
@@ -1024,13 +1041,13 @@
         <p:spPr>
           <a:xfrm>
             <a:off x="0" y="0"/>
-            <a:ext cx="14630400" cy="8229600"/>
+            <a:ext cx="12191695" cy="6858000"/>
           </a:xfrm>
           <a:prstGeom prst="rect">
             <a:avLst/>
           </a:prstGeom>
           <a:solidFill>
-            <a:srgbClr val="FFFFFF"/>
+            <a:srgbClr val="212121"/>
           </a:solidFill>
           <a:ln/>
         </p:spPr>
@@ -1053,8 +1070,8 @@
         </p:blipFill>
         <p:spPr>
           <a:xfrm>
-            <a:off x="12839215" y="7749540"/>
-            <a:ext cx="1722605" cy="411480"/>
+            <a:off x="11076875" y="6558991"/>
+            <a:ext cx="1071843" cy="256032"/>
           </a:xfrm>
           <a:prstGeom prst="rect">
             <a:avLst/>
@@ -1072,6 +1089,14 @@
 <file path=ppt/slideLayouts/slideLayout5.xml><?xml version="1.0" encoding="utf-8"?>
 <p:sldLayout xmlns:a="http://schemas.openxmlformats.org/drawingml/2006/main" xmlns:r="http://schemas.openxmlformats.org/officeDocument/2006/relationships" xmlns:p="http://schemas.openxmlformats.org/presentationml/2006/main" preserve="1">
   <p:cSld name="Slide 4 master">
+    <p:bg>
+      <p:bgPr>
+        <a:solidFill>
+          <a:srgbClr val="000000"/>
+        </a:solidFill>
+        <a:effectLst/>
+      </p:bgPr>
+    </p:bg>
     <p:spTree>
       <p:nvGrpSpPr>
         <p:cNvPr id="1" name=""/>
@@ -1095,13 +1120,13 @@
         <p:spPr>
           <a:xfrm>
             <a:off x="0" y="0"/>
-            <a:ext cx="14630400" cy="8229600"/>
+            <a:ext cx="12191695" cy="6858000"/>
           </a:xfrm>
           <a:prstGeom prst="rect">
             <a:avLst/>
           </a:prstGeom>
           <a:solidFill>
-            <a:srgbClr val="FAFAFA"/>
+            <a:srgbClr val="010303"/>
           </a:solidFill>
           <a:ln/>
         </p:spPr>
@@ -1115,13 +1140,13 @@
         <p:spPr>
           <a:xfrm>
             <a:off x="0" y="0"/>
-            <a:ext cx="14630400" cy="8229600"/>
+            <a:ext cx="12191695" cy="6858000"/>
           </a:xfrm>
           <a:prstGeom prst="rect">
             <a:avLst/>
           </a:prstGeom>
           <a:solidFill>
-            <a:srgbClr val="FFFFFF"/>
+            <a:srgbClr val="212121"/>
           </a:solidFill>
           <a:ln/>
         </p:spPr>
@@ -1144,8 +1169,8 @@
         </p:blipFill>
         <p:spPr>
           <a:xfrm>
-            <a:off x="12839215" y="7749540"/>
-            <a:ext cx="1722605" cy="411480"/>
+            <a:off x="11076875" y="6558991"/>
+            <a:ext cx="1071843" cy="256032"/>
           </a:xfrm>
           <a:prstGeom prst="rect">
             <a:avLst/>
@@ -1163,6 +1188,14 @@
 <file path=ppt/slideLayouts/slideLayout6.xml><?xml version="1.0" encoding="utf-8"?>
 <p:sldLayout xmlns:a="http://schemas.openxmlformats.org/drawingml/2006/main" xmlns:r="http://schemas.openxmlformats.org/officeDocument/2006/relationships" xmlns:p="http://schemas.openxmlformats.org/presentationml/2006/main" preserve="1">
   <p:cSld name="Slide 5 master">
+    <p:bg>
+      <p:bgPr>
+        <a:solidFill>
+          <a:srgbClr val="000000"/>
+        </a:solidFill>
+        <a:effectLst/>
+      </p:bgPr>
+    </p:bg>
     <p:spTree>
       <p:nvGrpSpPr>
         <p:cNvPr id="1" name=""/>
@@ -1186,13 +1219,13 @@
         <p:spPr>
           <a:xfrm>
             <a:off x="0" y="0"/>
-            <a:ext cx="14630400" cy="8229600"/>
+            <a:ext cx="12191695" cy="6858000"/>
           </a:xfrm>
           <a:prstGeom prst="rect">
             <a:avLst/>
           </a:prstGeom>
           <a:solidFill>
-            <a:srgbClr val="FAFAFA"/>
+            <a:srgbClr val="010303"/>
           </a:solidFill>
           <a:ln/>
         </p:spPr>
@@ -1206,13 +1239,13 @@
         <p:spPr>
           <a:xfrm>
             <a:off x="0" y="0"/>
-            <a:ext cx="14630400" cy="8229600"/>
+            <a:ext cx="12191695" cy="6858000"/>
           </a:xfrm>
           <a:prstGeom prst="rect">
             <a:avLst/>
           </a:prstGeom>
           <a:solidFill>
-            <a:srgbClr val="FFFFFF"/>
+            <a:srgbClr val="212121"/>
           </a:solidFill>
           <a:ln/>
         </p:spPr>
@@ -1235,8 +1268,8 @@
         </p:blipFill>
         <p:spPr>
           <a:xfrm>
-            <a:off x="12839215" y="7749540"/>
-            <a:ext cx="1722605" cy="411480"/>
+            <a:off x="11076875" y="6558991"/>
+            <a:ext cx="1071843" cy="256032"/>
           </a:xfrm>
           <a:prstGeom prst="rect">
             <a:avLst/>
@@ -1254,6 +1287,14 @@
 <file path=ppt/slideLayouts/slideLayout7.xml><?xml version="1.0" encoding="utf-8"?>
 <p:sldLayout xmlns:a="http://schemas.openxmlformats.org/drawingml/2006/main" xmlns:r="http://schemas.openxmlformats.org/officeDocument/2006/relationships" xmlns:p="http://schemas.openxmlformats.org/presentationml/2006/main" preserve="1">
   <p:cSld name="Slide 6 master">
+    <p:bg>
+      <p:bgPr>
+        <a:solidFill>
+          <a:srgbClr val="000000"/>
+        </a:solidFill>
+        <a:effectLst/>
+      </p:bgPr>
+    </p:bg>
     <p:spTree>
       <p:nvGrpSpPr>
         <p:cNvPr id="1" name=""/>
@@ -1277,13 +1318,13 @@
         <p:spPr>
           <a:xfrm>
             <a:off x="0" y="0"/>
-            <a:ext cx="14630400" cy="8229600"/>
+            <a:ext cx="12191695" cy="6858000"/>
           </a:xfrm>
           <a:prstGeom prst="rect">
             <a:avLst/>
           </a:prstGeom>
           <a:solidFill>
-            <a:srgbClr val="FAFAFA"/>
+            <a:srgbClr val="010303"/>
           </a:solidFill>
           <a:ln/>
         </p:spPr>
@@ -1297,13 +1338,13 @@
         <p:spPr>
           <a:xfrm>
             <a:off x="0" y="0"/>
-            <a:ext cx="14630400" cy="8229600"/>
+            <a:ext cx="12191695" cy="6858000"/>
           </a:xfrm>
           <a:prstGeom prst="rect">
             <a:avLst/>
           </a:prstGeom>
           <a:solidFill>
-            <a:srgbClr val="FFFFFF"/>
+            <a:srgbClr val="212121"/>
           </a:solidFill>
           <a:ln/>
         </p:spPr>
@@ -1326,8 +1367,107 @@
         </p:blipFill>
         <p:spPr>
           <a:xfrm>
-            <a:off x="12839215" y="7749540"/>
-            <a:ext cx="1722605" cy="411480"/>
+            <a:off x="11076875" y="6558991"/>
+            <a:ext cx="1071843" cy="256032"/>
+          </a:xfrm>
+          <a:prstGeom prst="rect">
+            <a:avLst/>
+          </a:prstGeom>
+        </p:spPr>
+      </p:pic>
+    </p:spTree>
+  </p:cSld>
+  <p:clrMapOvr>
+    <a:masterClrMapping/>
+  </p:clrMapOvr>
+</p:sldLayout>
+</file>
+
+<file path=ppt/slideLayouts/slideLayout8.xml><?xml version="1.0" encoding="utf-8"?>
+<p:sldLayout xmlns:a="http://schemas.openxmlformats.org/drawingml/2006/main" xmlns:r="http://schemas.openxmlformats.org/officeDocument/2006/relationships" xmlns:p="http://schemas.openxmlformats.org/presentationml/2006/main" preserve="1">
+  <p:cSld name="Slide 7 master">
+    <p:bg>
+      <p:bgPr>
+        <a:solidFill>
+          <a:srgbClr val="000000"/>
+        </a:solidFill>
+        <a:effectLst/>
+      </p:bgPr>
+    </p:bg>
+    <p:spTree>
+      <p:nvGrpSpPr>
+        <p:cNvPr id="1" name=""/>
+        <p:cNvGrpSpPr/>
+        <p:nvPr/>
+      </p:nvGrpSpPr>
+      <p:grpSpPr>
+        <a:xfrm>
+          <a:off x="0" y="0"/>
+          <a:ext cx="0" cy="0"/>
+          <a:chOff x="0" y="0"/>
+          <a:chExt cx="0" cy="0"/>
+        </a:xfrm>
+      </p:grpSpPr>
+      <p:sp>
+        <p:nvSpPr>
+          <p:cNvPr id="2" name="Shape 0"/>
+          <p:cNvSpPr/>
+          <p:nvPr/>
+        </p:nvSpPr>
+        <p:spPr>
+          <a:xfrm>
+            <a:off x="0" y="0"/>
+            <a:ext cx="12191695" cy="6858000"/>
+          </a:xfrm>
+          <a:prstGeom prst="rect">
+            <a:avLst/>
+          </a:prstGeom>
+          <a:solidFill>
+            <a:srgbClr val="010303"/>
+          </a:solidFill>
+          <a:ln/>
+        </p:spPr>
+      </p:sp>
+      <p:sp>
+        <p:nvSpPr>
+          <p:cNvPr id="3" name="Shape 1"/>
+          <p:cNvSpPr/>
+          <p:nvPr/>
+        </p:nvSpPr>
+        <p:spPr>
+          <a:xfrm>
+            <a:off x="0" y="0"/>
+            <a:ext cx="12191695" cy="6858000"/>
+          </a:xfrm>
+          <a:prstGeom prst="rect">
+            <a:avLst/>
+          </a:prstGeom>
+          <a:solidFill>
+            <a:srgbClr val="212121"/>
+          </a:solidFill>
+          <a:ln/>
+        </p:spPr>
+      </p:sp>
+      <p:pic>
+        <p:nvPicPr>
+          <p:cNvPr id="4" name="Image 0" descr="preencoded.png">
+            <a:hlinkClick r:id="rId2"/>
+          </p:cNvPr>
+          <p:cNvPicPr>
+            <a:picLocks noChangeAspect="1"/>
+          </p:cNvPicPr>
+          <p:nvPr/>
+        </p:nvPicPr>
+        <p:blipFill>
+          <a:blip r:embed="rId3"/>
+          <a:stretch>
+            <a:fillRect/>
+          </a:stretch>
+        </p:blipFill>
+        <p:spPr>
+          <a:xfrm>
+            <a:off x="11076875" y="6558991"/>
+            <a:ext cx="1071843" cy="256032"/>
           </a:xfrm>
           <a:prstGeom prst="rect">
             <a:avLst/>
@@ -1375,6 +1515,7 @@
     <p:sldLayoutId id="2147483653" r:id="rId5"/>
     <p:sldLayoutId id="2147483654" r:id="rId6"/>
     <p:sldLayoutId id="2147483655" r:id="rId7"/>
+    <p:sldLayoutId id="2147483656" r:id="rId8"/>
   </p:sldLayoutIdLst>
   <p:hf sldNum="0" hdr="0" ftr="0" dt="0"/>
   <p:txStyles>
@@ -1655,8 +1796,8 @@
         </p:nvSpPr>
         <p:spPr>
           <a:xfrm>
-            <a:off x="6280190" y="2846784"/>
-            <a:ext cx="6228159" cy="744260"/>
+            <a:off x="661475" y="2242939"/>
+            <a:ext cx="6296860" cy="1181298"/>
           </a:xfrm>
           <a:prstGeom prst="rect">
             <a:avLst/>
@@ -1665,27 +1806,29 @@
           <a:ln/>
         </p:spPr>
         <p:txBody>
-          <a:bodyPr wrap="none" lIns="0" tIns="0" rIns="0" bIns="0" rtlCol="0" anchor="t"/>
+          <a:bodyPr wrap="square" lIns="0" tIns="0" rIns="0" bIns="0" rtlCol="0" anchor="t">
+            <a:normAutofit/>
+          </a:bodyPr>
           <a:lstStyle/>
           <a:p>
             <a:pPr marL="0" indent="0" algn="l">
               <a:lnSpc>
-                <a:spcPts val="5850"/>
+                <a:spcPct val="104000"/>
               </a:lnSpc>
               <a:buNone/>
             </a:pPr>
             <a:r>
-              <a:rPr lang="en-US" sz="4650" dirty="0">
-                <a:solidFill>
-                  <a:srgbClr val="020202"/>
-                </a:solidFill>
-                <a:latin typeface="PT Serif" pitchFamily="34" charset="0"/>
-                <a:ea typeface="PT Serif" pitchFamily="34" charset="-122"/>
-                <a:cs typeface="PT Serif" pitchFamily="34" charset="-120"/>
-              </a:rPr>
-              <a:t>Minesweeper (PyGame)</a:t>
-            </a:r>
-            <a:endParaRPr lang="en-US" sz="4650" dirty="0"/>
+              <a:rPr lang="en-US" sz="3700" dirty="0">
+                <a:solidFill>
+                  <a:srgbClr val="FFFFFF"/>
+                </a:solidFill>
+                <a:latin typeface="Roboto Mono Medium" pitchFamily="34" charset="0"/>
+                <a:ea typeface="Roboto Mono Medium" pitchFamily="34" charset="-122"/>
+                <a:cs typeface="Roboto Mono Medium" pitchFamily="34" charset="-120"/>
+              </a:rPr>
+              <a:t>Minesweeper Multiplayer</a:t>
+            </a:r>
+            <a:endParaRPr lang="en-US" sz="3700" dirty="0"/>
           </a:p>
         </p:txBody>
       </p:sp>
@@ -1697,8 +1840,8 @@
         </p:nvSpPr>
         <p:spPr>
           <a:xfrm>
-            <a:off x="6280190" y="3931206"/>
-            <a:ext cx="7556421" cy="1008784"/>
+            <a:off x="661475" y="3707705"/>
+            <a:ext cx="4870001" cy="907256"/>
           </a:xfrm>
           <a:prstGeom prst="rect">
             <a:avLst/>
@@ -1707,58 +1850,118 @@
           <a:ln/>
         </p:spPr>
         <p:txBody>
-          <a:bodyPr wrap="square" lIns="0" tIns="0" rIns="0" bIns="0" rtlCol="0" anchor="t"/>
+          <a:bodyPr wrap="square" lIns="0" tIns="0" rIns="0" bIns="0" rtlCol="0" anchor="t">
+            <a:normAutofit/>
+          </a:bodyPr>
           <a:lstStyle/>
           <a:p>
             <a:pPr marL="0" indent="0" algn="l">
               <a:lnSpc>
-                <a:spcPts val="2850"/>
+                <a:spcPct val="133000"/>
               </a:lnSpc>
               <a:buNone/>
             </a:pPr>
             <a:r>
-              <a:rPr lang="en-US" sz="1750" dirty="0">
-                <a:solidFill>
-                  <a:srgbClr val="383838"/>
-                </a:solidFill>
-                <a:latin typeface="DM Sans" pitchFamily="34" charset="0"/>
-                <a:ea typeface="DM Sans" pitchFamily="34" charset="-122"/>
-                <a:cs typeface="DM Sans" pitchFamily="34" charset="-120"/>
-              </a:rPr>
-              <a:t>Logická hra vytvorená v jazyku Python s použitím knižnice PyGame. Cieľom je odkryť všetky bezpečné políčka bez kliknutia na </a:t>
-            </a:r>
-            <a:r>
-              <a:rPr lang="en-US" sz="1750" dirty="0" err="1">
-                <a:solidFill>
-                  <a:srgbClr val="383838"/>
-                </a:solidFill>
-                <a:latin typeface="DM Sans" pitchFamily="34" charset="0"/>
-                <a:ea typeface="DM Sans" pitchFamily="34" charset="-122"/>
-                <a:cs typeface="DM Sans" pitchFamily="34" charset="-120"/>
-              </a:rPr>
-              <a:t>mínu</a:t>
-            </a:r>
-            <a:r>
-              <a:rPr lang="en-US" sz="1750" dirty="0">
-                <a:solidFill>
-                  <a:srgbClr val="383838"/>
-                </a:solidFill>
-                <a:latin typeface="DM Sans" pitchFamily="34" charset="0"/>
-                <a:ea typeface="DM Sans" pitchFamily="34" charset="-122"/>
-                <a:cs typeface="DM Sans" pitchFamily="34" charset="-120"/>
-              </a:rPr>
-              <a:t>.</a:t>
-            </a:r>
-            <a:endParaRPr lang="en-US" sz="1750" dirty="0"/>
+              <a:rPr lang="en-US" sz="1450" dirty="0">
+                <a:solidFill>
+                  <a:srgbClr val="E5E0DF"/>
+                </a:solidFill>
+                <a:latin typeface="Roboto" pitchFamily="34" charset="0"/>
+                <a:ea typeface="Roboto" pitchFamily="34" charset="-122"/>
+                <a:cs typeface="Roboto" pitchFamily="34" charset="-120"/>
+              </a:rPr>
+              <a:t>Projekt v jazyku Python s grafickým rozhraním Pygame. Podpora </a:t>
+            </a:r>
+            <a:r>
+              <a:rPr lang="en-US" sz="1450" dirty="0">
+                <a:solidFill>
+                  <a:schemeClr val="bg1"/>
+                </a:solidFill>
+                <a:latin typeface="Roboto" pitchFamily="34" charset="0"/>
+                <a:ea typeface="Roboto" pitchFamily="34" charset="-122"/>
+                <a:cs typeface="Roboto" pitchFamily="34" charset="-120"/>
+              </a:rPr>
+              <a:t>Singleplayer</a:t>
+            </a:r>
+            <a:r>
+              <a:rPr lang="en-US" sz="1450" dirty="0">
+                <a:solidFill>
+                  <a:srgbClr val="E5E0DF"/>
+                </a:solidFill>
+                <a:latin typeface="Roboto" pitchFamily="34" charset="0"/>
+                <a:ea typeface="Roboto" pitchFamily="34" charset="-122"/>
+                <a:cs typeface="Roboto" pitchFamily="34" charset="-120"/>
+              </a:rPr>
+              <a:t> a Multiplayer režimu — cieľom je odkryť všetky bezpečné políčka bez kliknutia na mínu.</a:t>
+            </a:r>
+            <a:endParaRPr lang="en-US" sz="1450" dirty="0"/>
+          </a:p>
+        </p:txBody>
+      </p:sp>
+      <p:sp>
+        <p:nvSpPr>
+          <p:cNvPr id="5" name="BlokTextu 4">
+            <a:extLst>
+              <a:ext uri="{FF2B5EF4-FFF2-40B4-BE49-F238E27FC236}">
+                <a16:creationId xmlns:a16="http://schemas.microsoft.com/office/drawing/2014/main" id="{AD9584A3-1D30-E4C8-A5CB-7D7BFDA90EB8}"/>
+              </a:ext>
+            </a:extLst>
+          </p:cNvPr>
+          <p:cNvSpPr txBox="1"/>
+          <p:nvPr/>
+        </p:nvSpPr>
+        <p:spPr>
+          <a:xfrm>
+            <a:off x="661475" y="4962985"/>
+            <a:ext cx="2857388" cy="315471"/>
+          </a:xfrm>
+          <a:prstGeom prst="rect">
+            <a:avLst/>
+          </a:prstGeom>
+          <a:noFill/>
+        </p:spPr>
+        <p:txBody>
+          <a:bodyPr wrap="square" rtlCol="0">
+            <a:spAutoFit/>
+          </a:bodyPr>
+          <a:lstStyle/>
+          <a:p>
+            <a:r>
+              <a:rPr lang="sk-SK" sz="1450" dirty="0">
+                <a:solidFill>
+                  <a:schemeClr val="bg1"/>
+                </a:solidFill>
+                <a:latin typeface="Roboto" panose="02000000000000000000" pitchFamily="2" charset="0"/>
+                <a:ea typeface="Roboto" panose="02000000000000000000" pitchFamily="2" charset="0"/>
+              </a:rPr>
+              <a:t>Stašenko, Poráč, </a:t>
+            </a:r>
+            <a:r>
+              <a:rPr lang="sk-SK" sz="1450" dirty="0" err="1">
+                <a:solidFill>
+                  <a:schemeClr val="bg1"/>
+                </a:solidFill>
+                <a:latin typeface="Roboto" panose="02000000000000000000" pitchFamily="2" charset="0"/>
+                <a:ea typeface="Roboto" panose="02000000000000000000" pitchFamily="2" charset="0"/>
+              </a:rPr>
+              <a:t>Kožuško</a:t>
+            </a:r>
+            <a:endParaRPr lang="sk-SK" sz="1450" dirty="0">
+              <a:solidFill>
+                <a:schemeClr val="bg1"/>
+              </a:solidFill>
+              <a:latin typeface="Roboto" panose="02000000000000000000" pitchFamily="2" charset="0"/>
+              <a:ea typeface="Roboto" panose="02000000000000000000" pitchFamily="2" charset="0"/>
+            </a:endParaRPr>
           </a:p>
         </p:txBody>
       </p:sp>
       <p:pic>
         <p:nvPicPr>
-          <p:cNvPr id="6" name="Obrázok 5">
+          <p:cNvPr id="9" name="Obrázok 8" descr="Obrázok, na ktorom je text, snímka obrazovky, softvér, multimediálny softvér&#10;&#10;Automaticky generovaný popis">
             <a:extLst>
               <a:ext uri="{FF2B5EF4-FFF2-40B4-BE49-F238E27FC236}">
-                <a16:creationId xmlns:a16="http://schemas.microsoft.com/office/drawing/2014/main" id="{BF4597E4-EB96-9AE7-6A2C-29DC0A6AD4FA}"/>
+                <a16:creationId xmlns:a16="http://schemas.microsoft.com/office/drawing/2014/main" id="{F002E150-81B2-6999-488E-2EFCA32F76B7}"/>
               </a:ext>
             </a:extLst>
           </p:cNvPr>
@@ -1775,8 +1978,8 @@
         </p:blipFill>
         <p:spPr>
           <a:xfrm>
-            <a:off x="12857356" y="7728464"/>
-            <a:ext cx="1703256" cy="400106"/>
+            <a:off x="5761104" y="1081825"/>
+            <a:ext cx="6096045" cy="4848260"/>
           </a:xfrm>
           <a:prstGeom prst="rect">
             <a:avLst/>
@@ -1785,10 +1988,10 @@
       </p:pic>
       <p:pic>
         <p:nvPicPr>
-          <p:cNvPr id="9" name="Obrázok 8">
+          <p:cNvPr id="11" name="Obrázok 10">
             <a:extLst>
               <a:ext uri="{FF2B5EF4-FFF2-40B4-BE49-F238E27FC236}">
-                <a16:creationId xmlns:a16="http://schemas.microsoft.com/office/drawing/2014/main" id="{2A25B1D5-978D-C465-BD6E-0883366ABB22}"/>
+                <a16:creationId xmlns:a16="http://schemas.microsoft.com/office/drawing/2014/main" id="{DC67471E-3BF8-7DCD-8A32-513CAE4C6839}"/>
               </a:ext>
             </a:extLst>
           </p:cNvPr>
@@ -1805,60 +2008,14 @@
         </p:blipFill>
         <p:spPr>
           <a:xfrm>
-            <a:off x="0" y="0"/>
-            <a:ext cx="4629150" cy="8229600"/>
+            <a:off x="11048475" y="6512742"/>
+            <a:ext cx="1143526" cy="279799"/>
           </a:xfrm>
           <a:prstGeom prst="rect">
             <a:avLst/>
           </a:prstGeom>
         </p:spPr>
       </p:pic>
-      <p:sp>
-        <p:nvSpPr>
-          <p:cNvPr id="10" name="BlokTextu 9">
-            <a:extLst>
-              <a:ext uri="{FF2B5EF4-FFF2-40B4-BE49-F238E27FC236}">
-                <a16:creationId xmlns:a16="http://schemas.microsoft.com/office/drawing/2014/main" id="{0960AC17-B629-7B10-28FD-FDCE6AA264E5}"/>
-              </a:ext>
-            </a:extLst>
-          </p:cNvPr>
-          <p:cNvSpPr txBox="1"/>
-          <p:nvPr/>
-        </p:nvSpPr>
-        <p:spPr>
-          <a:xfrm>
-            <a:off x="6280190" y="6243625"/>
-            <a:ext cx="5887844" cy="646331"/>
-          </a:xfrm>
-          <a:prstGeom prst="rect">
-            <a:avLst/>
-          </a:prstGeom>
-          <a:noFill/>
-        </p:spPr>
-        <p:txBody>
-          <a:bodyPr wrap="square" rtlCol="0">
-            <a:spAutoFit/>
-          </a:bodyPr>
-          <a:lstStyle/>
-          <a:p>
-            <a:r>
-              <a:rPr lang="sk-SK" dirty="0"/>
-              <a:t>René Stašenko, Ján Poráč, Ján </a:t>
-            </a:r>
-            <a:r>
-              <a:rPr lang="sk-SK" dirty="0" err="1"/>
-              <a:t>Kožuško</a:t>
-            </a:r>
-            <a:endParaRPr lang="sk-SK" dirty="0"/>
-          </a:p>
-          <a:p>
-            <a:r>
-              <a:rPr lang="sk-SK" dirty="0"/>
-              <a:t>3.SB</a:t>
-            </a:r>
-          </a:p>
-        </p:txBody>
-      </p:sp>
     </p:spTree>
   </p:cSld>
   <p:clrMapOvr>
@@ -1892,8 +2049,8 @@
         </p:nvSpPr>
         <p:spPr>
           <a:xfrm>
-            <a:off x="793790" y="989052"/>
-            <a:ext cx="5954197" cy="744260"/>
+            <a:off x="661475" y="668834"/>
+            <a:ext cx="6506107" cy="472480"/>
           </a:xfrm>
           <a:prstGeom prst="rect">
             <a:avLst/>
@@ -1907,43 +2064,85 @@
           <a:p>
             <a:pPr marL="0" indent="0" algn="l">
               <a:lnSpc>
-                <a:spcPts val="5850"/>
+                <a:spcPct val="104000"/>
               </a:lnSpc>
               <a:buNone/>
             </a:pPr>
             <a:r>
-              <a:rPr lang="en-US" sz="4650" dirty="0">
-                <a:solidFill>
-                  <a:srgbClr val="020202"/>
-                </a:solidFill>
-                <a:latin typeface="PT Serif" pitchFamily="34" charset="0"/>
-                <a:ea typeface="PT Serif" pitchFamily="34" charset="-122"/>
-                <a:cs typeface="PT Serif" pitchFamily="34" charset="-120"/>
-              </a:rPr>
-              <a:t>Základné funkcie hry</a:t>
-            </a:r>
-            <a:endParaRPr lang="en-US" sz="4650" dirty="0"/>
-          </a:p>
-        </p:txBody>
-      </p:sp>
-      <p:sp>
-        <p:nvSpPr>
-          <p:cNvPr id="3" name="Shape 1"/>
-          <p:cNvSpPr/>
-          <p:nvPr/>
-        </p:nvSpPr>
-        <p:spPr>
-          <a:xfrm>
-            <a:off x="793790" y="2186940"/>
-            <a:ext cx="4196358" cy="2594848"/>
+              <a:rPr lang="en-US" sz="2950" dirty="0">
+                <a:solidFill>
+                  <a:srgbClr val="FFFFFF"/>
+                </a:solidFill>
+                <a:latin typeface="Roboto Mono Medium" pitchFamily="34" charset="0"/>
+                <a:ea typeface="Roboto Mono Medium" pitchFamily="34" charset="-122"/>
+                <a:cs typeface="Roboto Mono Medium" pitchFamily="34" charset="-120"/>
+              </a:rPr>
+              <a:t>Hlavné vlastnosti programu</a:t>
+            </a:r>
+            <a:endParaRPr lang="en-US" sz="2950" dirty="0"/>
+          </a:p>
+        </p:txBody>
+      </p:sp>
+      <p:sp>
+        <p:nvSpPr>
+          <p:cNvPr id="3" name="Text 1"/>
+          <p:cNvSpPr/>
+          <p:nvPr/>
+        </p:nvSpPr>
+        <p:spPr>
+          <a:xfrm>
+            <a:off x="661475" y="1383209"/>
+            <a:ext cx="11478330" cy="217686"/>
+          </a:xfrm>
+          <a:prstGeom prst="rect">
+            <a:avLst/>
+          </a:prstGeom>
+          <a:noFill/>
+          <a:ln/>
+        </p:spPr>
+        <p:txBody>
+          <a:bodyPr wrap="none" lIns="0" tIns="0" rIns="0" bIns="0" rtlCol="0" anchor="t"/>
+          <a:lstStyle/>
+          <a:p>
+            <a:pPr marL="0" indent="0" algn="l">
+              <a:lnSpc>
+                <a:spcPct val="120000"/>
+              </a:lnSpc>
+              <a:buNone/>
+            </a:pPr>
+            <a:r>
+              <a:rPr lang="en-US" sz="1150" dirty="0">
+                <a:solidFill>
+                  <a:srgbClr val="E5E0DF"/>
+                </a:solidFill>
+                <a:latin typeface="Roboto" pitchFamily="34" charset="0"/>
+                <a:ea typeface="Roboto" pitchFamily="34" charset="-122"/>
+                <a:cs typeface="Roboto" pitchFamily="34" charset="-120"/>
+              </a:rPr>
+              <a:t>Program rozširuje klasický Minesweeper o online prvky a komunikáciu medzi hráčmi.</a:t>
+            </a:r>
+            <a:endParaRPr lang="en-US" sz="1150" dirty="0"/>
+          </a:p>
+        </p:txBody>
+      </p:sp>
+      <p:sp>
+        <p:nvSpPr>
+          <p:cNvPr id="4" name="Shape 2"/>
+          <p:cNvSpPr/>
+          <p:nvPr/>
+        </p:nvSpPr>
+        <p:spPr>
+          <a:xfrm>
+            <a:off x="661475" y="1736923"/>
+            <a:ext cx="5373851" cy="1403449"/>
           </a:xfrm>
           <a:prstGeom prst="roundRect">
             <a:avLst>
-              <a:gd name="adj" fmla="val 1311"/>
+              <a:gd name="adj" fmla="val 1616"/>
             </a:avLst>
           </a:prstGeom>
           <a:solidFill>
-            <a:srgbClr val="F2EEEE"/>
+            <a:srgbClr val="404040"/>
           </a:solidFill>
           <a:ln/>
         </p:spPr>
@@ -1957,22 +2156,22 @@
       </p:sp>
       <p:sp>
         <p:nvSpPr>
-          <p:cNvPr id="4" name="Shape 2"/>
-          <p:cNvSpPr/>
-          <p:nvPr/>
-        </p:nvSpPr>
-        <p:spPr>
-          <a:xfrm>
-            <a:off x="1020604" y="2413754"/>
-            <a:ext cx="680442" cy="680442"/>
+          <p:cNvPr id="5" name="Shape 3"/>
+          <p:cNvSpPr/>
+          <p:nvPr/>
+        </p:nvSpPr>
+        <p:spPr>
+          <a:xfrm>
+            <a:off x="812680" y="1888133"/>
+            <a:ext cx="453617" cy="453628"/>
           </a:xfrm>
           <a:prstGeom prst="roundRect">
             <a:avLst>
-              <a:gd name="adj" fmla="val 13436980"/>
+              <a:gd name="adj" fmla="val 16796212"/>
             </a:avLst>
           </a:prstGeom>
           <a:solidFill>
-            <a:srgbClr val="E04F00"/>
+            <a:srgbClr val="DCFF50"/>
           </a:solidFill>
           <a:ln/>
         </p:spPr>
@@ -1986,7 +2185,7 @@
       </p:sp>
       <p:pic>
         <p:nvPicPr>
-          <p:cNvPr id="5" name="Image 0" descr="preencoded.png"/>
+          <p:cNvPr id="6" name="Image 0" descr="preencoded.png"/>
           <p:cNvPicPr>
             <a:picLocks noChangeAspect="1"/>
           </p:cNvPicPr>
@@ -2006,8 +2205,8 @@
         </p:blipFill>
         <p:spPr>
           <a:xfrm>
-            <a:off x="1207770" y="2600801"/>
-            <a:ext cx="306110" cy="306110"/>
+            <a:off x="937395" y="2012851"/>
+            <a:ext cx="204088" cy="204093"/>
           </a:xfrm>
           <a:prstGeom prst="rect">
             <a:avLst/>
@@ -2016,14 +2215,14 @@
       </p:pic>
       <p:sp>
         <p:nvSpPr>
-          <p:cNvPr id="6" name="Text 3"/>
-          <p:cNvSpPr/>
-          <p:nvPr/>
-        </p:nvSpPr>
-        <p:spPr>
-          <a:xfrm>
-            <a:off x="1020604" y="3321010"/>
-            <a:ext cx="2977039" cy="372070"/>
+          <p:cNvPr id="7" name="Text 4"/>
+          <p:cNvSpPr/>
+          <p:nvPr/>
+        </p:nvSpPr>
+        <p:spPr>
+          <a:xfrm>
+            <a:off x="812680" y="2462709"/>
+            <a:ext cx="1890169" cy="236240"/>
           </a:xfrm>
           <a:prstGeom prst="rect">
             <a:avLst/>
@@ -2037,35 +2236,35 @@
           <a:p>
             <a:pPr marL="0" indent="0" algn="l">
               <a:lnSpc>
-                <a:spcPts val="2900"/>
+                <a:spcPct val="104000"/>
               </a:lnSpc>
               <a:buNone/>
             </a:pPr>
             <a:r>
-              <a:rPr lang="en-US" sz="2300" dirty="0">
-                <a:solidFill>
-                  <a:srgbClr val="383838"/>
-                </a:solidFill>
-                <a:latin typeface="PT Serif" pitchFamily="34" charset="0"/>
-                <a:ea typeface="PT Serif" pitchFamily="34" charset="-122"/>
-                <a:cs typeface="PT Serif" pitchFamily="34" charset="-120"/>
-              </a:rPr>
-              <a:t>3 úrovne obtiažnosti</a:t>
-            </a:r>
-            <a:endParaRPr lang="en-US" sz="2300" dirty="0"/>
-          </a:p>
-        </p:txBody>
-      </p:sp>
-      <p:sp>
-        <p:nvSpPr>
-          <p:cNvPr id="7" name="Text 4"/>
-          <p:cNvSpPr/>
-          <p:nvPr/>
-        </p:nvSpPr>
-        <p:spPr>
-          <a:xfrm>
-            <a:off x="1020604" y="3829169"/>
-            <a:ext cx="3742730" cy="725805"/>
+              <a:rPr lang="en-US" sz="1450" dirty="0">
+                <a:solidFill>
+                  <a:srgbClr val="E5E0DF"/>
+                </a:solidFill>
+                <a:latin typeface="Roboto Mono Medium" pitchFamily="34" charset="0"/>
+                <a:ea typeface="Roboto Mono Medium" pitchFamily="34" charset="-122"/>
+                <a:cs typeface="Roboto Mono Medium" pitchFamily="34" charset="-120"/>
+              </a:rPr>
+              <a:t>Singleplayer</a:t>
+            </a:r>
+            <a:endParaRPr lang="en-US" sz="1450" dirty="0"/>
+          </a:p>
+        </p:txBody>
+      </p:sp>
+      <p:sp>
+        <p:nvSpPr>
+          <p:cNvPr id="8" name="Text 5"/>
+          <p:cNvSpPr/>
+          <p:nvPr/>
+        </p:nvSpPr>
+        <p:spPr>
+          <a:xfrm>
+            <a:off x="812680" y="2771477"/>
+            <a:ext cx="5071440" cy="217686"/>
           </a:xfrm>
           <a:prstGeom prst="rect">
             <a:avLst/>
@@ -2074,48 +2273,48 @@
           <a:ln/>
         </p:spPr>
         <p:txBody>
-          <a:bodyPr wrap="square" lIns="0" tIns="0" rIns="0" bIns="0" rtlCol="0" anchor="t"/>
+          <a:bodyPr wrap="none" lIns="0" tIns="0" rIns="0" bIns="0" rtlCol="0" anchor="t"/>
           <a:lstStyle/>
           <a:p>
             <a:pPr marL="0" indent="0" algn="l">
               <a:lnSpc>
-                <a:spcPts val="2850"/>
+                <a:spcPct val="120000"/>
               </a:lnSpc>
               <a:buNone/>
             </a:pPr>
             <a:r>
-              <a:rPr lang="en-US" sz="1750" dirty="0">
-                <a:solidFill>
-                  <a:srgbClr val="383838"/>
-                </a:solidFill>
-                <a:latin typeface="DM Sans" pitchFamily="34" charset="0"/>
-                <a:ea typeface="DM Sans" pitchFamily="34" charset="-122"/>
-                <a:cs typeface="DM Sans" pitchFamily="34" charset="-120"/>
-              </a:rPr>
-              <a:t>Easy, Medium a Hard – pre rôzne úrovne výzvy</a:t>
-            </a:r>
-            <a:endParaRPr lang="en-US" sz="1750" dirty="0"/>
-          </a:p>
-        </p:txBody>
-      </p:sp>
-      <p:sp>
-        <p:nvSpPr>
-          <p:cNvPr id="8" name="Shape 5"/>
-          <p:cNvSpPr/>
-          <p:nvPr/>
-        </p:nvSpPr>
-        <p:spPr>
-          <a:xfrm>
-            <a:off x="5216962" y="2186940"/>
-            <a:ext cx="4196358" cy="2594848"/>
+              <a:rPr lang="en-US" sz="1150" dirty="0">
+                <a:solidFill>
+                  <a:srgbClr val="E5E0DF"/>
+                </a:solidFill>
+                <a:latin typeface="Roboto" pitchFamily="34" charset="0"/>
+                <a:ea typeface="Roboto" pitchFamily="34" charset="-122"/>
+                <a:cs typeface="Roboto" pitchFamily="34" charset="-120"/>
+              </a:rPr>
+              <a:t>Klasická hra proti časom</a:t>
+            </a:r>
+            <a:endParaRPr lang="en-US" sz="1150" dirty="0"/>
+          </a:p>
+        </p:txBody>
+      </p:sp>
+      <p:sp>
+        <p:nvSpPr>
+          <p:cNvPr id="9" name="Shape 6"/>
+          <p:cNvSpPr/>
+          <p:nvPr/>
+        </p:nvSpPr>
+        <p:spPr>
+          <a:xfrm>
+            <a:off x="6156270" y="1736923"/>
+            <a:ext cx="5373950" cy="1403449"/>
           </a:xfrm>
           <a:prstGeom prst="roundRect">
             <a:avLst>
-              <a:gd name="adj" fmla="val 1311"/>
+              <a:gd name="adj" fmla="val 1616"/>
             </a:avLst>
           </a:prstGeom>
           <a:solidFill>
-            <a:srgbClr val="F2EEEE"/>
+            <a:srgbClr val="404040"/>
           </a:solidFill>
           <a:ln/>
         </p:spPr>
@@ -2129,22 +2328,22 @@
       </p:sp>
       <p:sp>
         <p:nvSpPr>
-          <p:cNvPr id="9" name="Shape 6"/>
-          <p:cNvSpPr/>
-          <p:nvPr/>
-        </p:nvSpPr>
-        <p:spPr>
-          <a:xfrm>
-            <a:off x="5443776" y="2413754"/>
-            <a:ext cx="680442" cy="680442"/>
+          <p:cNvPr id="10" name="Shape 7"/>
+          <p:cNvSpPr/>
+          <p:nvPr/>
+        </p:nvSpPr>
+        <p:spPr>
+          <a:xfrm>
+            <a:off x="6307476" y="1888133"/>
+            <a:ext cx="453617" cy="453628"/>
           </a:xfrm>
           <a:prstGeom prst="roundRect">
             <a:avLst>
-              <a:gd name="adj" fmla="val 13436980"/>
+              <a:gd name="adj" fmla="val 16796212"/>
             </a:avLst>
           </a:prstGeom>
           <a:solidFill>
-            <a:srgbClr val="E04F00"/>
+            <a:srgbClr val="DCFF50"/>
           </a:solidFill>
           <a:ln/>
         </p:spPr>
@@ -2158,7 +2357,7 @@
       </p:sp>
       <p:pic>
         <p:nvPicPr>
-          <p:cNvPr id="10" name="Image 1" descr="preencoded.png"/>
+          <p:cNvPr id="11" name="Image 1" descr="preencoded.png"/>
           <p:cNvPicPr>
             <a:picLocks noChangeAspect="1"/>
           </p:cNvPicPr>
@@ -2178,8 +2377,8 @@
         </p:blipFill>
         <p:spPr>
           <a:xfrm>
-            <a:off x="5630942" y="2600801"/>
-            <a:ext cx="306110" cy="306110"/>
+            <a:off x="6432191" y="2012851"/>
+            <a:ext cx="204088" cy="204093"/>
           </a:xfrm>
           <a:prstGeom prst="rect">
             <a:avLst/>
@@ -2188,14 +2387,14 @@
       </p:pic>
       <p:sp>
         <p:nvSpPr>
-          <p:cNvPr id="11" name="Text 7"/>
-          <p:cNvSpPr/>
-          <p:nvPr/>
-        </p:nvSpPr>
-        <p:spPr>
-          <a:xfrm>
-            <a:off x="5443776" y="3321010"/>
-            <a:ext cx="2977039" cy="372070"/>
+          <p:cNvPr id="12" name="Text 8"/>
+          <p:cNvSpPr/>
+          <p:nvPr/>
+        </p:nvSpPr>
+        <p:spPr>
+          <a:xfrm>
+            <a:off x="6307476" y="2462709"/>
+            <a:ext cx="1890169" cy="236240"/>
           </a:xfrm>
           <a:prstGeom prst="rect">
             <a:avLst/>
@@ -2209,35 +2408,35 @@
           <a:p>
             <a:pPr marL="0" indent="0" algn="l">
               <a:lnSpc>
-                <a:spcPts val="2900"/>
+                <a:spcPct val="104000"/>
               </a:lnSpc>
               <a:buNone/>
             </a:pPr>
             <a:r>
-              <a:rPr lang="en-US" sz="2300" dirty="0">
-                <a:solidFill>
-                  <a:srgbClr val="383838"/>
-                </a:solidFill>
-                <a:latin typeface="PT Serif" pitchFamily="34" charset="0"/>
-                <a:ea typeface="PT Serif" pitchFamily="34" charset="-122"/>
-                <a:cs typeface="PT Serif" pitchFamily="34" charset="-120"/>
-              </a:rPr>
-              <a:t>Grafické rozhranie</a:t>
-            </a:r>
-            <a:endParaRPr lang="en-US" sz="2300" dirty="0"/>
-          </a:p>
-        </p:txBody>
-      </p:sp>
-      <p:sp>
-        <p:nvSpPr>
-          <p:cNvPr id="12" name="Text 8"/>
-          <p:cNvSpPr/>
-          <p:nvPr/>
-        </p:nvSpPr>
-        <p:spPr>
-          <a:xfrm>
-            <a:off x="5443776" y="3829169"/>
-            <a:ext cx="3742730" cy="725805"/>
+              <a:rPr lang="en-US" sz="1450" dirty="0">
+                <a:solidFill>
+                  <a:srgbClr val="E5E0DF"/>
+                </a:solidFill>
+                <a:latin typeface="Roboto Mono Medium" pitchFamily="34" charset="0"/>
+                <a:ea typeface="Roboto Mono Medium" pitchFamily="34" charset="-122"/>
+                <a:cs typeface="Roboto Mono Medium" pitchFamily="34" charset="-120"/>
+              </a:rPr>
+              <a:t>Multiplayer LAN</a:t>
+            </a:r>
+            <a:endParaRPr lang="en-US" sz="1450" dirty="0"/>
+          </a:p>
+        </p:txBody>
+      </p:sp>
+      <p:sp>
+        <p:nvSpPr>
+          <p:cNvPr id="13" name="Text 9"/>
+          <p:cNvSpPr/>
+          <p:nvPr/>
+        </p:nvSpPr>
+        <p:spPr>
+          <a:xfrm>
+            <a:off x="6307476" y="2771477"/>
+            <a:ext cx="5071539" cy="217686"/>
           </a:xfrm>
           <a:prstGeom prst="rect">
             <a:avLst/>
@@ -2246,48 +2445,48 @@
           <a:ln/>
         </p:spPr>
         <p:txBody>
-          <a:bodyPr wrap="square" lIns="0" tIns="0" rIns="0" bIns="0" rtlCol="0" anchor="t"/>
+          <a:bodyPr wrap="none" lIns="0" tIns="0" rIns="0" bIns="0" rtlCol="0" anchor="t"/>
           <a:lstStyle/>
           <a:p>
             <a:pPr marL="0" indent="0" algn="l">
               <a:lnSpc>
-                <a:spcPts val="2850"/>
+                <a:spcPct val="120000"/>
               </a:lnSpc>
               <a:buNone/>
             </a:pPr>
             <a:r>
-              <a:rPr lang="en-US" sz="1750" dirty="0">
-                <a:solidFill>
-                  <a:srgbClr val="383838"/>
-                </a:solidFill>
-                <a:latin typeface="DM Sans" pitchFamily="34" charset="0"/>
-                <a:ea typeface="DM Sans" pitchFamily="34" charset="-122"/>
-                <a:cs typeface="DM Sans" pitchFamily="34" charset="-120"/>
-              </a:rPr>
-              <a:t>Intuitívne a prehľadné UI s číslami a ikonami</a:t>
-            </a:r>
-            <a:endParaRPr lang="en-US" sz="1750" dirty="0"/>
-          </a:p>
-        </p:txBody>
-      </p:sp>
-      <p:sp>
-        <p:nvSpPr>
-          <p:cNvPr id="13" name="Shape 9"/>
-          <p:cNvSpPr/>
-          <p:nvPr/>
-        </p:nvSpPr>
-        <p:spPr>
-          <a:xfrm>
-            <a:off x="9640133" y="2186940"/>
-            <a:ext cx="4196358" cy="2594848"/>
+              <a:rPr lang="en-US" sz="1150" dirty="0">
+                <a:solidFill>
+                  <a:srgbClr val="E5E0DF"/>
+                </a:solidFill>
+                <a:latin typeface="Roboto" pitchFamily="34" charset="0"/>
+                <a:ea typeface="Roboto" pitchFamily="34" charset="-122"/>
+                <a:cs typeface="Roboto" pitchFamily="34" charset="-120"/>
+              </a:rPr>
+              <a:t>Hra cez lokálnu sieť</a:t>
+            </a:r>
+            <a:endParaRPr lang="en-US" sz="1150" dirty="0"/>
+          </a:p>
+        </p:txBody>
+      </p:sp>
+      <p:sp>
+        <p:nvSpPr>
+          <p:cNvPr id="14" name="Shape 10"/>
+          <p:cNvSpPr/>
+          <p:nvPr/>
+        </p:nvSpPr>
+        <p:spPr>
+          <a:xfrm>
+            <a:off x="661475" y="3261320"/>
+            <a:ext cx="5373851" cy="1403449"/>
           </a:xfrm>
           <a:prstGeom prst="roundRect">
             <a:avLst>
-              <a:gd name="adj" fmla="val 1311"/>
+              <a:gd name="adj" fmla="val 1616"/>
             </a:avLst>
           </a:prstGeom>
           <a:solidFill>
-            <a:srgbClr val="F2EEEE"/>
+            <a:srgbClr val="404040"/>
           </a:solidFill>
           <a:ln/>
         </p:spPr>
@@ -2301,22 +2500,22 @@
       </p:sp>
       <p:sp>
         <p:nvSpPr>
-          <p:cNvPr id="14" name="Shape 10"/>
-          <p:cNvSpPr/>
-          <p:nvPr/>
-        </p:nvSpPr>
-        <p:spPr>
-          <a:xfrm>
-            <a:off x="9866948" y="2413754"/>
-            <a:ext cx="680442" cy="680442"/>
+          <p:cNvPr id="15" name="Shape 11"/>
+          <p:cNvSpPr/>
+          <p:nvPr/>
+        </p:nvSpPr>
+        <p:spPr>
+          <a:xfrm>
+            <a:off x="812680" y="3412530"/>
+            <a:ext cx="453617" cy="453628"/>
           </a:xfrm>
           <a:prstGeom prst="roundRect">
             <a:avLst>
-              <a:gd name="adj" fmla="val 13436980"/>
+              <a:gd name="adj" fmla="val 16796212"/>
             </a:avLst>
           </a:prstGeom>
           <a:solidFill>
-            <a:srgbClr val="E04F00"/>
+            <a:srgbClr val="DCFF50"/>
           </a:solidFill>
           <a:ln/>
         </p:spPr>
@@ -2330,7 +2529,7 @@
       </p:sp>
       <p:pic>
         <p:nvPicPr>
-          <p:cNvPr id="15" name="Image 2" descr="preencoded.png"/>
+          <p:cNvPr id="16" name="Image 2" descr="preencoded.png"/>
           <p:cNvPicPr>
             <a:picLocks noChangeAspect="1"/>
           </p:cNvPicPr>
@@ -2350,8 +2549,8 @@
         </p:blipFill>
         <p:spPr>
           <a:xfrm>
-            <a:off x="10054114" y="2600801"/>
-            <a:ext cx="306110" cy="306110"/>
+            <a:off x="937395" y="3537248"/>
+            <a:ext cx="204088" cy="204093"/>
           </a:xfrm>
           <a:prstGeom prst="rect">
             <a:avLst/>
@@ -2360,14 +2559,14 @@
       </p:pic>
       <p:sp>
         <p:nvSpPr>
-          <p:cNvPr id="16" name="Text 11"/>
-          <p:cNvSpPr/>
-          <p:nvPr/>
-        </p:nvSpPr>
-        <p:spPr>
-          <a:xfrm>
-            <a:off x="9866948" y="3321010"/>
-            <a:ext cx="2977039" cy="372070"/>
+          <p:cNvPr id="17" name="Text 12"/>
+          <p:cNvSpPr/>
+          <p:nvPr/>
+        </p:nvSpPr>
+        <p:spPr>
+          <a:xfrm>
+            <a:off x="812680" y="3987105"/>
+            <a:ext cx="1890169" cy="236240"/>
           </a:xfrm>
           <a:prstGeom prst="rect">
             <a:avLst/>
@@ -2381,35 +2580,35 @@
           <a:p>
             <a:pPr marL="0" indent="0" algn="l">
               <a:lnSpc>
-                <a:spcPts val="2900"/>
+                <a:spcPct val="104000"/>
               </a:lnSpc>
               <a:buNone/>
             </a:pPr>
             <a:r>
-              <a:rPr lang="en-US" sz="2300" dirty="0">
-                <a:solidFill>
-                  <a:srgbClr val="383838"/>
-                </a:solidFill>
-                <a:latin typeface="PT Serif" pitchFamily="34" charset="0"/>
-                <a:ea typeface="PT Serif" pitchFamily="34" charset="-122"/>
-                <a:cs typeface="PT Serif" pitchFamily="34" charset="-120"/>
-              </a:rPr>
-              <a:t>Meranie času</a:t>
-            </a:r>
-            <a:endParaRPr lang="en-US" sz="2300" dirty="0"/>
-          </a:p>
-        </p:txBody>
-      </p:sp>
-      <p:sp>
-        <p:nvSpPr>
-          <p:cNvPr id="17" name="Text 12"/>
-          <p:cNvSpPr/>
-          <p:nvPr/>
-        </p:nvSpPr>
-        <p:spPr>
-          <a:xfrm>
-            <a:off x="9866948" y="3829169"/>
-            <a:ext cx="3742730" cy="725805"/>
+              <a:rPr lang="en-US" sz="1450" dirty="0">
+                <a:solidFill>
+                  <a:srgbClr val="E5E0DF"/>
+                </a:solidFill>
+                <a:latin typeface="Roboto Mono Medium" pitchFamily="34" charset="0"/>
+                <a:ea typeface="Roboto Mono Medium" pitchFamily="34" charset="-122"/>
+                <a:cs typeface="Roboto Mono Medium" pitchFamily="34" charset="-120"/>
+              </a:rPr>
+              <a:t>Integrovaný chat</a:t>
+            </a:r>
+            <a:endParaRPr lang="en-US" sz="1450" dirty="0"/>
+          </a:p>
+        </p:txBody>
+      </p:sp>
+      <p:sp>
+        <p:nvSpPr>
+          <p:cNvPr id="18" name="Text 13"/>
+          <p:cNvSpPr/>
+          <p:nvPr/>
+        </p:nvSpPr>
+        <p:spPr>
+          <a:xfrm>
+            <a:off x="812680" y="4295874"/>
+            <a:ext cx="5071440" cy="217686"/>
           </a:xfrm>
           <a:prstGeom prst="rect">
             <a:avLst/>
@@ -2418,48 +2617,48 @@
           <a:ln/>
         </p:spPr>
         <p:txBody>
-          <a:bodyPr wrap="square" lIns="0" tIns="0" rIns="0" bIns="0" rtlCol="0" anchor="t"/>
+          <a:bodyPr wrap="none" lIns="0" tIns="0" rIns="0" bIns="0" rtlCol="0" anchor="t"/>
           <a:lstStyle/>
           <a:p>
             <a:pPr marL="0" indent="0" algn="l">
               <a:lnSpc>
-                <a:spcPts val="2850"/>
+                <a:spcPct val="120000"/>
               </a:lnSpc>
               <a:buNone/>
             </a:pPr>
             <a:r>
-              <a:rPr lang="en-US" sz="1750" dirty="0">
-                <a:solidFill>
-                  <a:srgbClr val="383838"/>
-                </a:solidFill>
-                <a:latin typeface="DM Sans" pitchFamily="34" charset="0"/>
-                <a:ea typeface="DM Sans" pitchFamily="34" charset="-122"/>
-                <a:cs typeface="DM Sans" pitchFamily="34" charset="-120"/>
-              </a:rPr>
-              <a:t>Stopár sleduje váš pokrok v reálnom čase</a:t>
-            </a:r>
-            <a:endParaRPr lang="en-US" sz="1750" dirty="0"/>
-          </a:p>
-        </p:txBody>
-      </p:sp>
-      <p:sp>
-        <p:nvSpPr>
-          <p:cNvPr id="18" name="Shape 13"/>
-          <p:cNvSpPr/>
-          <p:nvPr/>
-        </p:nvSpPr>
-        <p:spPr>
-          <a:xfrm>
-            <a:off x="793790" y="5008602"/>
-            <a:ext cx="6407944" cy="2231946"/>
+              <a:rPr lang="en-US" sz="1150" dirty="0">
+                <a:solidFill>
+                  <a:srgbClr val="E5E0DF"/>
+                </a:solidFill>
+                <a:latin typeface="Roboto" pitchFamily="34" charset="0"/>
+                <a:ea typeface="Roboto" pitchFamily="34" charset="-122"/>
+                <a:cs typeface="Roboto" pitchFamily="34" charset="-120"/>
+              </a:rPr>
+              <a:t>Komunikácia medzi hráčmi</a:t>
+            </a:r>
+            <a:endParaRPr lang="en-US" sz="1150" dirty="0"/>
+          </a:p>
+        </p:txBody>
+      </p:sp>
+      <p:sp>
+        <p:nvSpPr>
+          <p:cNvPr id="19" name="Shape 14"/>
+          <p:cNvSpPr/>
+          <p:nvPr/>
+        </p:nvSpPr>
+        <p:spPr>
+          <a:xfrm>
+            <a:off x="6156270" y="3261320"/>
+            <a:ext cx="5373950" cy="1403449"/>
           </a:xfrm>
           <a:prstGeom prst="roundRect">
             <a:avLst>
-              <a:gd name="adj" fmla="val 1524"/>
+              <a:gd name="adj" fmla="val 1616"/>
             </a:avLst>
           </a:prstGeom>
           <a:solidFill>
-            <a:srgbClr val="F2EEEE"/>
+            <a:srgbClr val="404040"/>
           </a:solidFill>
           <a:ln/>
         </p:spPr>
@@ -2473,22 +2672,22 @@
       </p:sp>
       <p:sp>
         <p:nvSpPr>
-          <p:cNvPr id="19" name="Shape 14"/>
-          <p:cNvSpPr/>
-          <p:nvPr/>
-        </p:nvSpPr>
-        <p:spPr>
-          <a:xfrm>
-            <a:off x="1020604" y="5235416"/>
-            <a:ext cx="680442" cy="680442"/>
+          <p:cNvPr id="20" name="Shape 15"/>
+          <p:cNvSpPr/>
+          <p:nvPr/>
+        </p:nvSpPr>
+        <p:spPr>
+          <a:xfrm>
+            <a:off x="6307476" y="3412530"/>
+            <a:ext cx="453617" cy="453628"/>
           </a:xfrm>
           <a:prstGeom prst="roundRect">
             <a:avLst>
-              <a:gd name="adj" fmla="val 13436980"/>
+              <a:gd name="adj" fmla="val 16796212"/>
             </a:avLst>
           </a:prstGeom>
           <a:solidFill>
-            <a:srgbClr val="E04F00"/>
+            <a:srgbClr val="DCFF50"/>
           </a:solidFill>
           <a:ln/>
         </p:spPr>
@@ -2502,7 +2701,7 @@
       </p:sp>
       <p:pic>
         <p:nvPicPr>
-          <p:cNvPr id="20" name="Image 3" descr="preencoded.png"/>
+          <p:cNvPr id="21" name="Image 3" descr="preencoded.png"/>
           <p:cNvPicPr>
             <a:picLocks noChangeAspect="1"/>
           </p:cNvPicPr>
@@ -2522,8 +2721,8 @@
         </p:blipFill>
         <p:spPr>
           <a:xfrm>
-            <a:off x="1207770" y="5422463"/>
-            <a:ext cx="306110" cy="306110"/>
+            <a:off x="6432191" y="3537248"/>
+            <a:ext cx="204088" cy="204093"/>
           </a:xfrm>
           <a:prstGeom prst="rect">
             <a:avLst/>
@@ -2532,14 +2731,14 @@
       </p:pic>
       <p:sp>
         <p:nvSpPr>
-          <p:cNvPr id="21" name="Text 15"/>
-          <p:cNvSpPr/>
-          <p:nvPr/>
-        </p:nvSpPr>
-        <p:spPr>
-          <a:xfrm>
-            <a:off x="1020604" y="6142673"/>
-            <a:ext cx="2977039" cy="372070"/>
+          <p:cNvPr id="22" name="Text 16"/>
+          <p:cNvSpPr/>
+          <p:nvPr/>
+        </p:nvSpPr>
+        <p:spPr>
+          <a:xfrm>
+            <a:off x="6307476" y="3987105"/>
+            <a:ext cx="1890169" cy="236240"/>
           </a:xfrm>
           <a:prstGeom prst="rect">
             <a:avLst/>
@@ -2553,35 +2752,35 @@
           <a:p>
             <a:pPr marL="0" indent="0" algn="l">
               <a:lnSpc>
-                <a:spcPts val="2900"/>
+                <a:spcPct val="104000"/>
               </a:lnSpc>
               <a:buNone/>
             </a:pPr>
             <a:r>
-              <a:rPr lang="en-US" sz="2300" dirty="0">
-                <a:solidFill>
-                  <a:srgbClr val="383838"/>
-                </a:solidFill>
-                <a:latin typeface="PT Serif" pitchFamily="34" charset="0"/>
-                <a:ea typeface="PT Serif" pitchFamily="34" charset="-122"/>
-                <a:cs typeface="PT Serif" pitchFamily="34" charset="-120"/>
-              </a:rPr>
-              <a:t>Počítanie mín</a:t>
-            </a:r>
-            <a:endParaRPr lang="en-US" sz="2300" dirty="0"/>
-          </a:p>
-        </p:txBody>
-      </p:sp>
-      <p:sp>
-        <p:nvSpPr>
-          <p:cNvPr id="22" name="Text 16"/>
-          <p:cNvSpPr/>
-          <p:nvPr/>
-        </p:nvSpPr>
-        <p:spPr>
-          <a:xfrm>
-            <a:off x="1020604" y="6650831"/>
-            <a:ext cx="5954316" cy="362903"/>
+              <a:rPr lang="en-US" sz="1450" dirty="0">
+                <a:solidFill>
+                  <a:srgbClr val="E5E0DF"/>
+                </a:solidFill>
+                <a:latin typeface="Roboto Mono Medium" pitchFamily="34" charset="0"/>
+                <a:ea typeface="Roboto Mono Medium" pitchFamily="34" charset="-122"/>
+                <a:cs typeface="Roboto Mono Medium" pitchFamily="34" charset="-120"/>
+              </a:rPr>
+              <a:t>Rekordy</a:t>
+            </a:r>
+            <a:endParaRPr lang="en-US" sz="1450" dirty="0"/>
+          </a:p>
+        </p:txBody>
+      </p:sp>
+      <p:sp>
+        <p:nvSpPr>
+          <p:cNvPr id="23" name="Text 17"/>
+          <p:cNvSpPr/>
+          <p:nvPr/>
+        </p:nvSpPr>
+        <p:spPr>
+          <a:xfrm>
+            <a:off x="6307476" y="4295874"/>
+            <a:ext cx="5071539" cy="217686"/>
           </a:xfrm>
           <a:prstGeom prst="rect">
             <a:avLst/>
@@ -2595,43 +2794,43 @@
           <a:p>
             <a:pPr marL="0" indent="0" algn="l">
               <a:lnSpc>
-                <a:spcPts val="2850"/>
+                <a:spcPct val="120000"/>
               </a:lnSpc>
               <a:buNone/>
             </a:pPr>
             <a:r>
-              <a:rPr lang="en-US" sz="1750" dirty="0">
-                <a:solidFill>
-                  <a:srgbClr val="383838"/>
-                </a:solidFill>
-                <a:latin typeface="DM Sans" pitchFamily="34" charset="0"/>
-                <a:ea typeface="DM Sans" pitchFamily="34" charset="-122"/>
-                <a:cs typeface="DM Sans" pitchFamily="34" charset="-120"/>
-              </a:rPr>
-              <a:t>Prehľad o zostávajúcich mínach na hracej ploche</a:t>
-            </a:r>
-            <a:endParaRPr lang="en-US" sz="1750" dirty="0"/>
-          </a:p>
-        </p:txBody>
-      </p:sp>
-      <p:sp>
-        <p:nvSpPr>
-          <p:cNvPr id="23" name="Shape 17"/>
-          <p:cNvSpPr/>
-          <p:nvPr/>
-        </p:nvSpPr>
-        <p:spPr>
-          <a:xfrm>
-            <a:off x="7428548" y="5008602"/>
-            <a:ext cx="6407944" cy="2231946"/>
+              <a:rPr lang="en-US" sz="1150" dirty="0">
+                <a:solidFill>
+                  <a:srgbClr val="E5E0DF"/>
+                </a:solidFill>
+                <a:latin typeface="Roboto" pitchFamily="34" charset="0"/>
+                <a:ea typeface="Roboto" pitchFamily="34" charset="-122"/>
+                <a:cs typeface="Roboto" pitchFamily="34" charset="-120"/>
+              </a:rPr>
+              <a:t>Najlepšie časy a skóre</a:t>
+            </a:r>
+            <a:endParaRPr lang="en-US" sz="1150" dirty="0"/>
+          </a:p>
+        </p:txBody>
+      </p:sp>
+      <p:sp>
+        <p:nvSpPr>
+          <p:cNvPr id="24" name="Shape 18"/>
+          <p:cNvSpPr/>
+          <p:nvPr/>
+        </p:nvSpPr>
+        <p:spPr>
+          <a:xfrm>
+            <a:off x="661475" y="4785717"/>
+            <a:ext cx="5373851" cy="1403449"/>
           </a:xfrm>
           <a:prstGeom prst="roundRect">
             <a:avLst>
-              <a:gd name="adj" fmla="val 1524"/>
+              <a:gd name="adj" fmla="val 1616"/>
             </a:avLst>
           </a:prstGeom>
           <a:solidFill>
-            <a:srgbClr val="F2EEEE"/>
+            <a:srgbClr val="404040"/>
           </a:solidFill>
           <a:ln/>
         </p:spPr>
@@ -2645,22 +2844,22 @@
       </p:sp>
       <p:sp>
         <p:nvSpPr>
-          <p:cNvPr id="24" name="Shape 18"/>
-          <p:cNvSpPr/>
-          <p:nvPr/>
-        </p:nvSpPr>
-        <p:spPr>
-          <a:xfrm>
-            <a:off x="7655362" y="5235416"/>
-            <a:ext cx="680442" cy="680442"/>
+          <p:cNvPr id="25" name="Shape 19"/>
+          <p:cNvSpPr/>
+          <p:nvPr/>
+        </p:nvSpPr>
+        <p:spPr>
+          <a:xfrm>
+            <a:off x="812680" y="4936927"/>
+            <a:ext cx="453617" cy="453628"/>
           </a:xfrm>
           <a:prstGeom prst="roundRect">
             <a:avLst>
-              <a:gd name="adj" fmla="val 13436980"/>
+              <a:gd name="adj" fmla="val 16796212"/>
             </a:avLst>
           </a:prstGeom>
           <a:solidFill>
-            <a:srgbClr val="E04F00"/>
+            <a:srgbClr val="DCFF50"/>
           </a:solidFill>
           <a:ln/>
         </p:spPr>
@@ -2674,7 +2873,7 @@
       </p:sp>
       <p:pic>
         <p:nvPicPr>
-          <p:cNvPr id="25" name="Image 4" descr="preencoded.png"/>
+          <p:cNvPr id="26" name="Image 4" descr="preencoded.png"/>
           <p:cNvPicPr>
             <a:picLocks noChangeAspect="1"/>
           </p:cNvPicPr>
@@ -2694,8 +2893,8 @@
         </p:blipFill>
         <p:spPr>
           <a:xfrm>
-            <a:off x="7842528" y="5422463"/>
-            <a:ext cx="306110" cy="306110"/>
+            <a:off x="937395" y="5061645"/>
+            <a:ext cx="204088" cy="204093"/>
           </a:xfrm>
           <a:prstGeom prst="rect">
             <a:avLst/>
@@ -2704,14 +2903,14 @@
       </p:pic>
       <p:sp>
         <p:nvSpPr>
-          <p:cNvPr id="26" name="Text 19"/>
-          <p:cNvSpPr/>
-          <p:nvPr/>
-        </p:nvSpPr>
-        <p:spPr>
-          <a:xfrm>
-            <a:off x="7655362" y="6142673"/>
-            <a:ext cx="2977039" cy="372070"/>
+          <p:cNvPr id="27" name="Text 20"/>
+          <p:cNvSpPr/>
+          <p:nvPr/>
+        </p:nvSpPr>
+        <p:spPr>
+          <a:xfrm>
+            <a:off x="812680" y="5511502"/>
+            <a:ext cx="1890169" cy="236240"/>
           </a:xfrm>
           <a:prstGeom prst="rect">
             <a:avLst/>
@@ -2725,35 +2924,35 @@
           <a:p>
             <a:pPr marL="0" indent="0" algn="l">
               <a:lnSpc>
-                <a:spcPts val="2900"/>
+                <a:spcPct val="104000"/>
               </a:lnSpc>
               <a:buNone/>
             </a:pPr>
             <a:r>
-              <a:rPr lang="en-US" sz="2300" dirty="0">
-                <a:solidFill>
-                  <a:srgbClr val="383838"/>
-                </a:solidFill>
-                <a:latin typeface="PT Serif" pitchFamily="34" charset="0"/>
-                <a:ea typeface="PT Serif" pitchFamily="34" charset="-122"/>
-                <a:cs typeface="PT Serif" pitchFamily="34" charset="-120"/>
-              </a:rPr>
-              <a:t>Stav hry</a:t>
-            </a:r>
-            <a:endParaRPr lang="en-US" sz="2300" dirty="0"/>
-          </a:p>
-        </p:txBody>
-      </p:sp>
-      <p:sp>
-        <p:nvSpPr>
-          <p:cNvPr id="27" name="Text 20"/>
-          <p:cNvSpPr/>
-          <p:nvPr/>
-        </p:nvSpPr>
-        <p:spPr>
-          <a:xfrm>
-            <a:off x="7655362" y="6650831"/>
-            <a:ext cx="5954316" cy="362903"/>
+              <a:rPr lang="en-US" sz="1450" dirty="0">
+                <a:solidFill>
+                  <a:srgbClr val="E5E0DF"/>
+                </a:solidFill>
+                <a:latin typeface="Roboto Mono Medium" pitchFamily="34" charset="0"/>
+                <a:ea typeface="Roboto Mono Medium" pitchFamily="34" charset="-122"/>
+                <a:cs typeface="Roboto Mono Medium" pitchFamily="34" charset="-120"/>
+              </a:rPr>
+              <a:t>Obtiažnosť</a:t>
+            </a:r>
+            <a:endParaRPr lang="en-US" sz="1450" dirty="0"/>
+          </a:p>
+        </p:txBody>
+      </p:sp>
+      <p:sp>
+        <p:nvSpPr>
+          <p:cNvPr id="28" name="Text 21"/>
+          <p:cNvSpPr/>
+          <p:nvPr/>
+        </p:nvSpPr>
+        <p:spPr>
+          <a:xfrm>
+            <a:off x="812680" y="5820271"/>
+            <a:ext cx="5071440" cy="217686"/>
           </a:xfrm>
           <a:prstGeom prst="rect">
             <a:avLst/>
@@ -2767,31 +2966,203 @@
           <a:p>
             <a:pPr marL="0" indent="0" algn="l">
               <a:lnSpc>
-                <a:spcPts val="2850"/>
+                <a:spcPct val="120000"/>
               </a:lnSpc>
               <a:buNone/>
             </a:pPr>
             <a:r>
-              <a:rPr lang="en-US" sz="1750" dirty="0">
-                <a:solidFill>
-                  <a:srgbClr val="383838"/>
-                </a:solidFill>
-                <a:latin typeface="DM Sans" pitchFamily="34" charset="0"/>
-                <a:ea typeface="DM Sans" pitchFamily="34" charset="-122"/>
-                <a:cs typeface="DM Sans" pitchFamily="34" charset="-120"/>
-              </a:rPr>
-              <a:t>Automatická detekcia výhry alebo prehry</a:t>
-            </a:r>
-            <a:endParaRPr lang="en-US" sz="1750" dirty="0"/>
+              <a:rPr lang="en-US" sz="1150" dirty="0">
+                <a:solidFill>
+                  <a:srgbClr val="E5E0DF"/>
+                </a:solidFill>
+                <a:latin typeface="Roboto" pitchFamily="34" charset="0"/>
+                <a:ea typeface="Roboto" pitchFamily="34" charset="-122"/>
+                <a:cs typeface="Roboto" pitchFamily="34" charset="-120"/>
+              </a:rPr>
+              <a:t>Viac úrovní náročnosti</a:t>
+            </a:r>
+            <a:endParaRPr lang="en-US" sz="1150" dirty="0"/>
+          </a:p>
+        </p:txBody>
+      </p:sp>
+      <p:sp>
+        <p:nvSpPr>
+          <p:cNvPr id="29" name="Shape 22"/>
+          <p:cNvSpPr/>
+          <p:nvPr/>
+        </p:nvSpPr>
+        <p:spPr>
+          <a:xfrm>
+            <a:off x="6156270" y="4785717"/>
+            <a:ext cx="5373950" cy="1403449"/>
+          </a:xfrm>
+          <a:prstGeom prst="roundRect">
+            <a:avLst>
+              <a:gd name="adj" fmla="val 1616"/>
+            </a:avLst>
+          </a:prstGeom>
+          <a:solidFill>
+            <a:srgbClr val="404040"/>
+          </a:solidFill>
+          <a:ln/>
+        </p:spPr>
+        <p:txBody>
+          <a:bodyPr/>
+          <a:lstStyle/>
+          <a:p>
+            <a:endParaRPr lang="sk-SK"/>
+          </a:p>
+        </p:txBody>
+      </p:sp>
+      <p:sp>
+        <p:nvSpPr>
+          <p:cNvPr id="30" name="Shape 23"/>
+          <p:cNvSpPr/>
+          <p:nvPr/>
+        </p:nvSpPr>
+        <p:spPr>
+          <a:xfrm>
+            <a:off x="6307476" y="4936927"/>
+            <a:ext cx="453617" cy="453628"/>
+          </a:xfrm>
+          <a:prstGeom prst="roundRect">
+            <a:avLst>
+              <a:gd name="adj" fmla="val 16796212"/>
+            </a:avLst>
+          </a:prstGeom>
+          <a:solidFill>
+            <a:srgbClr val="DCFF50"/>
+          </a:solidFill>
+          <a:ln/>
+        </p:spPr>
+        <p:txBody>
+          <a:bodyPr/>
+          <a:lstStyle/>
+          <a:p>
+            <a:endParaRPr lang="sk-SK"/>
           </a:p>
         </p:txBody>
       </p:sp>
       <p:pic>
         <p:nvPicPr>
-          <p:cNvPr id="28" name="Obrázok 27">
+          <p:cNvPr id="31" name="Image 5" descr="preencoded.png"/>
+          <p:cNvPicPr>
+            <a:picLocks noChangeAspect="1"/>
+          </p:cNvPicPr>
+          <p:nvPr/>
+        </p:nvPicPr>
+        <p:blipFill>
+          <a:blip r:embed="rId13">
+            <a:extLst>
+              <a:ext uri="{96DAC541-7B7A-43D3-8B79-37D633B846F1}">
+                <asvg:svgBlip xmlns:asvg="http://schemas.microsoft.com/office/drawing/2016/SVG/main" r:embed="rId14"/>
+              </a:ext>
+            </a:extLst>
+          </a:blip>
+          <a:stretch>
+            <a:fillRect/>
+          </a:stretch>
+        </p:blipFill>
+        <p:spPr>
+          <a:xfrm>
+            <a:off x="6432191" y="5061645"/>
+            <a:ext cx="204088" cy="204093"/>
+          </a:xfrm>
+          <a:prstGeom prst="rect">
+            <a:avLst/>
+          </a:prstGeom>
+        </p:spPr>
+      </p:pic>
+      <p:sp>
+        <p:nvSpPr>
+          <p:cNvPr id="32" name="Text 24"/>
+          <p:cNvSpPr/>
+          <p:nvPr/>
+        </p:nvSpPr>
+        <p:spPr>
+          <a:xfrm>
+            <a:off x="6307476" y="5511502"/>
+            <a:ext cx="1890169" cy="236240"/>
+          </a:xfrm>
+          <a:prstGeom prst="rect">
+            <a:avLst/>
+          </a:prstGeom>
+          <a:noFill/>
+          <a:ln/>
+        </p:spPr>
+        <p:txBody>
+          <a:bodyPr wrap="none" lIns="0" tIns="0" rIns="0" bIns="0" rtlCol="0" anchor="t"/>
+          <a:lstStyle/>
+          <a:p>
+            <a:pPr marL="0" indent="0" algn="l">
+              <a:lnSpc>
+                <a:spcPct val="104000"/>
+              </a:lnSpc>
+              <a:buNone/>
+            </a:pPr>
+            <a:r>
+              <a:rPr lang="en-US" sz="1450" dirty="0">
+                <a:solidFill>
+                  <a:srgbClr val="E5E0DF"/>
+                </a:solidFill>
+                <a:latin typeface="Roboto Mono Medium" pitchFamily="34" charset="0"/>
+                <a:ea typeface="Roboto Mono Medium" pitchFamily="34" charset="-122"/>
+                <a:cs typeface="Roboto Mono Medium" pitchFamily="34" charset="-120"/>
+              </a:rPr>
+              <a:t>Lobby systém</a:t>
+            </a:r>
+            <a:endParaRPr lang="en-US" sz="1450" dirty="0"/>
+          </a:p>
+        </p:txBody>
+      </p:sp>
+      <p:sp>
+        <p:nvSpPr>
+          <p:cNvPr id="33" name="Text 25"/>
+          <p:cNvSpPr/>
+          <p:nvPr/>
+        </p:nvSpPr>
+        <p:spPr>
+          <a:xfrm>
+            <a:off x="6307476" y="5820271"/>
+            <a:ext cx="5071539" cy="217686"/>
+          </a:xfrm>
+          <a:prstGeom prst="rect">
+            <a:avLst/>
+          </a:prstGeom>
+          <a:noFill/>
+          <a:ln/>
+        </p:spPr>
+        <p:txBody>
+          <a:bodyPr wrap="none" lIns="0" tIns="0" rIns="0" bIns="0" rtlCol="0" anchor="t"/>
+          <a:lstStyle/>
+          <a:p>
+            <a:pPr marL="0" indent="0" algn="l">
+              <a:lnSpc>
+                <a:spcPct val="120000"/>
+              </a:lnSpc>
+              <a:buNone/>
+            </a:pPr>
+            <a:r>
+              <a:rPr lang="en-US" sz="1150" dirty="0">
+                <a:solidFill>
+                  <a:srgbClr val="E5E0DF"/>
+                </a:solidFill>
+                <a:latin typeface="Roboto" pitchFamily="34" charset="0"/>
+                <a:ea typeface="Roboto" pitchFamily="34" charset="-122"/>
+                <a:cs typeface="Roboto" pitchFamily="34" charset="-120"/>
+              </a:rPr>
+              <a:t>Vytváranie a pripájanie</a:t>
+            </a:r>
+            <a:endParaRPr lang="en-US" sz="1150" dirty="0"/>
+          </a:p>
+        </p:txBody>
+      </p:sp>
+      <p:pic>
+        <p:nvPicPr>
+          <p:cNvPr id="34" name="Obrázok 33">
             <a:extLst>
               <a:ext uri="{FF2B5EF4-FFF2-40B4-BE49-F238E27FC236}">
-                <a16:creationId xmlns:a16="http://schemas.microsoft.com/office/drawing/2014/main" id="{B3022F24-CF73-9CFC-36F8-BE7EC1D0286C}"/>
+                <a16:creationId xmlns:a16="http://schemas.microsoft.com/office/drawing/2014/main" id="{B8F3FB08-BB7D-151F-D092-6830970782B5}"/>
               </a:ext>
             </a:extLst>
           </p:cNvPr>
@@ -2801,15 +3172,15 @@
           <p:nvPr/>
         </p:nvPicPr>
         <p:blipFill>
-          <a:blip r:embed="rId13"/>
+          <a:blip r:embed="rId15"/>
           <a:stretch>
             <a:fillRect/>
           </a:stretch>
         </p:blipFill>
         <p:spPr>
           <a:xfrm>
-            <a:off x="12857356" y="7728464"/>
-            <a:ext cx="1703256" cy="400106"/>
+            <a:off x="11048475" y="6512742"/>
+            <a:ext cx="1143526" cy="279799"/>
           </a:xfrm>
           <a:prstGeom prst="rect">
             <a:avLst/>
@@ -2849,8 +3220,8 @@
         </p:nvSpPr>
         <p:spPr>
           <a:xfrm>
-            <a:off x="1593056" y="1049179"/>
-            <a:ext cx="5647968" cy="544235"/>
+            <a:off x="661475" y="612080"/>
+            <a:ext cx="3926583" cy="383977"/>
           </a:xfrm>
           <a:prstGeom prst="rect">
             <a:avLst/>
@@ -2864,42 +3235,93 @@
           <a:p>
             <a:pPr marL="0" indent="0" algn="l">
               <a:lnSpc>
-                <a:spcPts val="4250"/>
+                <a:spcPct val="104000"/>
               </a:lnSpc>
               <a:buNone/>
             </a:pPr>
             <a:r>
-              <a:rPr lang="en-US" sz="3400" dirty="0">
-                <a:solidFill>
-                  <a:srgbClr val="020202"/>
-                </a:solidFill>
-                <a:latin typeface="PT Serif" pitchFamily="34" charset="0"/>
-                <a:ea typeface="PT Serif" pitchFamily="34" charset="-122"/>
-                <a:cs typeface="PT Serif" pitchFamily="34" charset="-120"/>
-              </a:rPr>
-              <a:t>Rozšírené vlastnosti projektu</a:t>
-            </a:r>
-            <a:endParaRPr lang="en-US" sz="3400" dirty="0"/>
+              <a:rPr lang="en-US" sz="3600" dirty="0">
+                <a:solidFill>
+                  <a:srgbClr val="FFFFFF"/>
+                </a:solidFill>
+                <a:latin typeface="Roboto Mono Medium" pitchFamily="34" charset="0"/>
+                <a:ea typeface="Roboto Mono Medium" pitchFamily="34" charset="-122"/>
+                <a:cs typeface="Roboto Mono Medium" pitchFamily="34" charset="-120"/>
+              </a:rPr>
+              <a:t>Štruktúra projektu</a:t>
+            </a:r>
+            <a:endParaRPr lang="en-US" sz="3600" dirty="0"/>
+          </a:p>
+        </p:txBody>
+      </p:sp>
+      <p:sp>
+        <p:nvSpPr>
+          <p:cNvPr id="3" name="Text 1"/>
+          <p:cNvSpPr/>
+          <p:nvPr/>
+        </p:nvSpPr>
+        <p:spPr>
+          <a:xfrm>
+            <a:off x="661475" y="1747816"/>
+            <a:ext cx="5146542" cy="1520954"/>
+          </a:xfrm>
+          <a:prstGeom prst="rect">
+            <a:avLst/>
+          </a:prstGeom>
+          <a:noFill/>
+          <a:ln/>
+        </p:spPr>
+        <p:txBody>
+          <a:bodyPr wrap="square" lIns="0" tIns="0" rIns="0" bIns="0" rtlCol="0" anchor="t">
+            <a:noAutofit/>
+          </a:bodyPr>
+          <a:lstStyle/>
+          <a:p>
+            <a:pPr marL="0" indent="0" algn="l">
+              <a:lnSpc>
+                <a:spcPct val="110000"/>
+              </a:lnSpc>
+              <a:buNone/>
+            </a:pPr>
+            <a:r>
+              <a:rPr lang="en-US" sz="2000" dirty="0">
+                <a:solidFill>
+                  <a:srgbClr val="E5E0DF"/>
+                </a:solidFill>
+                <a:latin typeface="Roboto" pitchFamily="34" charset="0"/>
+                <a:ea typeface="Roboto" pitchFamily="34" charset="-122"/>
+                <a:cs typeface="Roboto" pitchFamily="34" charset="-120"/>
+              </a:rPr>
+              <a:t>Projekt je rozdelený do piatich modulov, každý zodpovedá za konkrétnu oblasť — od spustenia programu cez grafické rozhranie, hernú logiku až po sieťovú komunikáciu a multiplayer server.</a:t>
+            </a:r>
+            <a:endParaRPr lang="en-US" sz="2000" dirty="0"/>
           </a:p>
         </p:txBody>
       </p:sp>
       <p:pic>
         <p:nvPicPr>
-          <p:cNvPr id="3" name="Image 0"/>
+          <p:cNvPr id="5" name="Image 1" descr="preencoded.png"/>
           <p:cNvPicPr>
             <a:picLocks noChangeAspect="1"/>
           </p:cNvPicPr>
           <p:nvPr/>
         </p:nvPicPr>
         <p:blipFill>
-          <a:blip r:embed="rId3"/>
-          <a:srcRect/>
-          <a:stretch/>
+          <a:blip r:embed="rId3">
+            <a:extLst>
+              <a:ext uri="{96DAC541-7B7A-43D3-8B79-37D633B846F1}">
+                <asvg:svgBlip xmlns:asvg="http://schemas.microsoft.com/office/drawing/2016/SVG/main" r:embed="rId4"/>
+              </a:ext>
+            </a:extLst>
+          </a:blip>
+          <a:stretch>
+            <a:fillRect/>
+          </a:stretch>
         </p:blipFill>
         <p:spPr>
           <a:xfrm>
-            <a:off x="2086262" y="2288619"/>
-            <a:ext cx="6310690" cy="4378166"/>
+            <a:off x="648775" y="4820146"/>
+            <a:ext cx="2670009" cy="673001"/>
           </a:xfrm>
           <a:prstGeom prst="rect">
             <a:avLst/>
@@ -2908,14 +3330,14 @@
       </p:pic>
       <p:sp>
         <p:nvSpPr>
-          <p:cNvPr id="4" name="Text 1"/>
-          <p:cNvSpPr/>
-          <p:nvPr/>
-        </p:nvSpPr>
-        <p:spPr>
-          <a:xfrm>
-            <a:off x="9302353" y="1911548"/>
-            <a:ext cx="165854" cy="207288"/>
+          <p:cNvPr id="6" name="Text 2"/>
+          <p:cNvSpPr/>
+          <p:nvPr/>
+        </p:nvSpPr>
+        <p:spPr>
+          <a:xfrm>
+            <a:off x="835103" y="4955679"/>
+            <a:ext cx="1535769" cy="191988"/>
           </a:xfrm>
           <a:prstGeom prst="rect">
             <a:avLst/>
@@ -2929,62 +3351,35 @@
           <a:p>
             <a:pPr marL="0" indent="0" algn="l">
               <a:lnSpc>
-                <a:spcPts val="1800"/>
+                <a:spcPct val="104000"/>
               </a:lnSpc>
               <a:buNone/>
             </a:pPr>
             <a:r>
-              <a:rPr lang="en-US" sz="1300" dirty="0">
-                <a:solidFill>
-                  <a:srgbClr val="383838"/>
-                </a:solidFill>
-                <a:latin typeface="PT Serif Light" pitchFamily="34" charset="0"/>
-                <a:ea typeface="PT Serif Light" pitchFamily="34" charset="-122"/>
-                <a:cs typeface="PT Serif Light" pitchFamily="34" charset="-120"/>
-              </a:rPr>
-              <a:t>01</a:t>
-            </a:r>
-            <a:endParaRPr lang="en-US" sz="1300" dirty="0"/>
-          </a:p>
-        </p:txBody>
-      </p:sp>
-      <p:sp>
-        <p:nvSpPr>
-          <p:cNvPr id="5" name="Shape 2"/>
-          <p:cNvSpPr/>
-          <p:nvPr/>
-        </p:nvSpPr>
-        <p:spPr>
-          <a:xfrm>
-            <a:off x="9302353" y="2170509"/>
-            <a:ext cx="3742492" cy="22860"/>
-          </a:xfrm>
-          <a:prstGeom prst="rect">
-            <a:avLst/>
-          </a:prstGeom>
-          <a:solidFill>
-            <a:srgbClr val="E04F00"/>
-          </a:solidFill>
-          <a:ln/>
-        </p:spPr>
-        <p:txBody>
-          <a:bodyPr/>
-          <a:lstStyle/>
-          <a:p>
-            <a:endParaRPr lang="sk-SK"/>
-          </a:p>
-        </p:txBody>
-      </p:sp>
-      <p:sp>
-        <p:nvSpPr>
-          <p:cNvPr id="6" name="Text 3"/>
-          <p:cNvSpPr/>
-          <p:nvPr/>
-        </p:nvSpPr>
-        <p:spPr>
-          <a:xfrm>
-            <a:off x="9302353" y="2299097"/>
-            <a:ext cx="2275403" cy="272058"/>
+              <a:rPr lang="en-US" sz="1200" dirty="0">
+                <a:solidFill>
+                  <a:srgbClr val="DCFF50"/>
+                </a:solidFill>
+                <a:latin typeface="Roboto Mono Medium" pitchFamily="34" charset="0"/>
+                <a:ea typeface="Roboto Mono Medium" pitchFamily="34" charset="-122"/>
+                <a:cs typeface="Roboto Mono Medium" pitchFamily="34" charset="-120"/>
+              </a:rPr>
+              <a:t>main.py</a:t>
+            </a:r>
+            <a:endParaRPr lang="en-US" sz="1200" dirty="0"/>
+          </a:p>
+        </p:txBody>
+      </p:sp>
+      <p:sp>
+        <p:nvSpPr>
+          <p:cNvPr id="7" name="Text 3"/>
+          <p:cNvSpPr/>
+          <p:nvPr/>
+        </p:nvSpPr>
+        <p:spPr>
+          <a:xfrm>
+            <a:off x="835103" y="5195491"/>
+            <a:ext cx="2348151" cy="162123"/>
           </a:xfrm>
           <a:prstGeom prst="rect">
             <a:avLst/>
@@ -2998,35 +3393,65 @@
           <a:p>
             <a:pPr marL="0" indent="0" algn="l">
               <a:lnSpc>
-                <a:spcPts val="2100"/>
+                <a:spcPct val="110000"/>
               </a:lnSpc>
               <a:buNone/>
             </a:pPr>
             <a:r>
-              <a:rPr lang="en-US" sz="1700" dirty="0">
-                <a:solidFill>
-                  <a:srgbClr val="383838"/>
-                </a:solidFill>
-                <a:latin typeface="PT Serif" pitchFamily="34" charset="0"/>
-                <a:ea typeface="PT Serif" pitchFamily="34" charset="-122"/>
-                <a:cs typeface="PT Serif" pitchFamily="34" charset="-120"/>
-              </a:rPr>
-              <a:t>Top 15 najlepších časov</a:t>
-            </a:r>
-            <a:endParaRPr lang="en-US" sz="1700" dirty="0"/>
-          </a:p>
-        </p:txBody>
-      </p:sp>
-      <p:sp>
-        <p:nvSpPr>
-          <p:cNvPr id="7" name="Text 4"/>
-          <p:cNvSpPr/>
-          <p:nvPr/>
-        </p:nvSpPr>
-        <p:spPr>
-          <a:xfrm>
-            <a:off x="9302353" y="2692360"/>
-            <a:ext cx="3742492" cy="229672"/>
+              <a:rPr lang="en-US" sz="950" dirty="0">
+                <a:solidFill>
+                  <a:srgbClr val="E5E0DF"/>
+                </a:solidFill>
+                <a:latin typeface="Roboto" pitchFamily="34" charset="0"/>
+                <a:ea typeface="Roboto" pitchFamily="34" charset="-122"/>
+                <a:cs typeface="Roboto" pitchFamily="34" charset="-120"/>
+              </a:rPr>
+              <a:t>Spustenie programu</a:t>
+            </a:r>
+            <a:endParaRPr lang="en-US" sz="950" dirty="0"/>
+          </a:p>
+        </p:txBody>
+      </p:sp>
+      <p:pic>
+        <p:nvPicPr>
+          <p:cNvPr id="8" name="Image 2" descr="preencoded.png"/>
+          <p:cNvPicPr>
+            <a:picLocks noChangeAspect="1"/>
+          </p:cNvPicPr>
+          <p:nvPr/>
+        </p:nvPicPr>
+        <p:blipFill>
+          <a:blip r:embed="rId3">
+            <a:extLst>
+              <a:ext uri="{96DAC541-7B7A-43D3-8B79-37D633B846F1}">
+                <asvg:svgBlip xmlns:asvg="http://schemas.microsoft.com/office/drawing/2016/SVG/main" r:embed="rId4"/>
+              </a:ext>
+            </a:extLst>
+          </a:blip>
+          <a:stretch>
+            <a:fillRect/>
+          </a:stretch>
+        </p:blipFill>
+        <p:spPr>
+          <a:xfrm>
+            <a:off x="3385854" y="4820146"/>
+            <a:ext cx="2670108" cy="673001"/>
+          </a:xfrm>
+          <a:prstGeom prst="rect">
+            <a:avLst/>
+          </a:prstGeom>
+        </p:spPr>
+      </p:pic>
+      <p:sp>
+        <p:nvSpPr>
+          <p:cNvPr id="9" name="Text 4"/>
+          <p:cNvSpPr/>
+          <p:nvPr/>
+        </p:nvSpPr>
+        <p:spPr>
+          <a:xfrm>
+            <a:off x="3572183" y="4955679"/>
+            <a:ext cx="1535769" cy="191988"/>
           </a:xfrm>
           <a:prstGeom prst="rect">
             <a:avLst/>
@@ -3040,35 +3465,35 @@
           <a:p>
             <a:pPr marL="0" indent="0" algn="l">
               <a:lnSpc>
-                <a:spcPts val="1800"/>
+                <a:spcPct val="104000"/>
               </a:lnSpc>
               <a:buNone/>
             </a:pPr>
             <a:r>
-              <a:rPr lang="en-US" sz="1300" dirty="0">
-                <a:solidFill>
-                  <a:srgbClr val="383838"/>
-                </a:solidFill>
-                <a:latin typeface="DM Sans" pitchFamily="34" charset="0"/>
-                <a:ea typeface="DM Sans" pitchFamily="34" charset="-122"/>
-                <a:cs typeface="DM Sans" pitchFamily="34" charset="-120"/>
-              </a:rPr>
-              <a:t>Ukladanie a zobrazovanie rebríčka výkonu</a:t>
-            </a:r>
-            <a:endParaRPr lang="en-US" sz="1300" dirty="0"/>
-          </a:p>
-        </p:txBody>
-      </p:sp>
-      <p:sp>
-        <p:nvSpPr>
-          <p:cNvPr id="8" name="Text 5"/>
-          <p:cNvSpPr/>
-          <p:nvPr/>
-        </p:nvSpPr>
-        <p:spPr>
-          <a:xfrm>
-            <a:off x="9302353" y="3167539"/>
-            <a:ext cx="165854" cy="207288"/>
+              <a:rPr lang="en-US" sz="1200" dirty="0">
+                <a:solidFill>
+                  <a:srgbClr val="DCFF50"/>
+                </a:solidFill>
+                <a:latin typeface="Roboto Mono Medium" pitchFamily="34" charset="0"/>
+                <a:ea typeface="Roboto Mono Medium" pitchFamily="34" charset="-122"/>
+                <a:cs typeface="Roboto Mono Medium" pitchFamily="34" charset="-120"/>
+              </a:rPr>
+              <a:t>ui.py</a:t>
+            </a:r>
+            <a:endParaRPr lang="en-US" sz="1200" dirty="0"/>
+          </a:p>
+        </p:txBody>
+      </p:sp>
+      <p:sp>
+        <p:nvSpPr>
+          <p:cNvPr id="10" name="Text 5"/>
+          <p:cNvSpPr/>
+          <p:nvPr/>
+        </p:nvSpPr>
+        <p:spPr>
+          <a:xfrm>
+            <a:off x="3572183" y="5195491"/>
+            <a:ext cx="2348251" cy="162123"/>
           </a:xfrm>
           <a:prstGeom prst="rect">
             <a:avLst/>
@@ -3082,62 +3507,65 @@
           <a:p>
             <a:pPr marL="0" indent="0" algn="l">
               <a:lnSpc>
-                <a:spcPts val="1800"/>
+                <a:spcPct val="110000"/>
               </a:lnSpc>
               <a:buNone/>
             </a:pPr>
             <a:r>
-              <a:rPr lang="en-US" sz="1300" dirty="0">
-                <a:solidFill>
-                  <a:srgbClr val="383838"/>
-                </a:solidFill>
-                <a:latin typeface="PT Serif Light" pitchFamily="34" charset="0"/>
-                <a:ea typeface="PT Serif Light" pitchFamily="34" charset="-122"/>
-                <a:cs typeface="PT Serif Light" pitchFamily="34" charset="-120"/>
-              </a:rPr>
-              <a:t>02</a:t>
-            </a:r>
-            <a:endParaRPr lang="en-US" sz="1300" dirty="0"/>
-          </a:p>
-        </p:txBody>
-      </p:sp>
-      <p:sp>
-        <p:nvSpPr>
-          <p:cNvPr id="9" name="Shape 6"/>
-          <p:cNvSpPr/>
-          <p:nvPr/>
-        </p:nvSpPr>
-        <p:spPr>
-          <a:xfrm>
-            <a:off x="9302353" y="3426500"/>
-            <a:ext cx="3742492" cy="22860"/>
-          </a:xfrm>
-          <a:prstGeom prst="rect">
-            <a:avLst/>
-          </a:prstGeom>
-          <a:solidFill>
-            <a:srgbClr val="E04F00"/>
-          </a:solidFill>
-          <a:ln/>
-        </p:spPr>
-        <p:txBody>
-          <a:bodyPr/>
-          <a:lstStyle/>
-          <a:p>
-            <a:endParaRPr lang="sk-SK"/>
-          </a:p>
-        </p:txBody>
-      </p:sp>
-      <p:sp>
-        <p:nvSpPr>
-          <p:cNvPr id="10" name="Text 7"/>
-          <p:cNvSpPr/>
-          <p:nvPr/>
-        </p:nvSpPr>
-        <p:spPr>
-          <a:xfrm>
-            <a:off x="9302353" y="3555087"/>
-            <a:ext cx="2176820" cy="272058"/>
+              <a:rPr lang="en-US" sz="950" dirty="0">
+                <a:solidFill>
+                  <a:srgbClr val="E5E0DF"/>
+                </a:solidFill>
+                <a:latin typeface="Roboto" pitchFamily="34" charset="0"/>
+                <a:ea typeface="Roboto" pitchFamily="34" charset="-122"/>
+                <a:cs typeface="Roboto" pitchFamily="34" charset="-120"/>
+              </a:rPr>
+              <a:t>Grafické rozhranie</a:t>
+            </a:r>
+            <a:endParaRPr lang="en-US" sz="950" dirty="0"/>
+          </a:p>
+        </p:txBody>
+      </p:sp>
+      <p:pic>
+        <p:nvPicPr>
+          <p:cNvPr id="11" name="Image 3" descr="preencoded.png"/>
+          <p:cNvPicPr>
+            <a:picLocks noChangeAspect="1"/>
+          </p:cNvPicPr>
+          <p:nvPr/>
+        </p:nvPicPr>
+        <p:blipFill>
+          <a:blip r:embed="rId3">
+            <a:extLst>
+              <a:ext uri="{96DAC541-7B7A-43D3-8B79-37D633B846F1}">
+                <asvg:svgBlip xmlns:asvg="http://schemas.microsoft.com/office/drawing/2016/SVG/main" r:embed="rId4"/>
+              </a:ext>
+            </a:extLst>
+          </a:blip>
+          <a:stretch>
+            <a:fillRect/>
+          </a:stretch>
+        </p:blipFill>
+        <p:spPr>
+          <a:xfrm>
+            <a:off x="6123033" y="4820146"/>
+            <a:ext cx="2670009" cy="673001"/>
+          </a:xfrm>
+          <a:prstGeom prst="rect">
+            <a:avLst/>
+          </a:prstGeom>
+        </p:spPr>
+      </p:pic>
+      <p:sp>
+        <p:nvSpPr>
+          <p:cNvPr id="12" name="Text 6"/>
+          <p:cNvSpPr/>
+          <p:nvPr/>
+        </p:nvSpPr>
+        <p:spPr>
+          <a:xfrm>
+            <a:off x="6309361" y="4955679"/>
+            <a:ext cx="1535769" cy="191988"/>
           </a:xfrm>
           <a:prstGeom prst="rect">
             <a:avLst/>
@@ -3151,35 +3579,35 @@
           <a:p>
             <a:pPr marL="0" indent="0" algn="l">
               <a:lnSpc>
-                <a:spcPts val="2100"/>
+                <a:spcPct val="104000"/>
               </a:lnSpc>
               <a:buNone/>
             </a:pPr>
             <a:r>
-              <a:rPr lang="en-US" sz="1700" dirty="0">
-                <a:solidFill>
-                  <a:srgbClr val="383838"/>
-                </a:solidFill>
-                <a:latin typeface="PT Serif" pitchFamily="34" charset="0"/>
-                <a:ea typeface="PT Serif" pitchFamily="34" charset="-122"/>
-                <a:cs typeface="PT Serif" pitchFamily="34" charset="-120"/>
-              </a:rPr>
-              <a:t>Ovládanie myšou</a:t>
-            </a:r>
-            <a:endParaRPr lang="en-US" sz="1700" dirty="0"/>
-          </a:p>
-        </p:txBody>
-      </p:sp>
-      <p:sp>
-        <p:nvSpPr>
-          <p:cNvPr id="11" name="Text 8"/>
-          <p:cNvSpPr/>
-          <p:nvPr/>
-        </p:nvSpPr>
-        <p:spPr>
-          <a:xfrm>
-            <a:off x="9302353" y="3948351"/>
-            <a:ext cx="3742492" cy="459343"/>
+              <a:rPr lang="en-US" sz="1200" dirty="0">
+                <a:solidFill>
+                  <a:srgbClr val="DCFF50"/>
+                </a:solidFill>
+                <a:latin typeface="Roboto Mono Medium" pitchFamily="34" charset="0"/>
+                <a:ea typeface="Roboto Mono Medium" pitchFamily="34" charset="-122"/>
+                <a:cs typeface="Roboto Mono Medium" pitchFamily="34" charset="-120"/>
+              </a:rPr>
+              <a:t>engine.py</a:t>
+            </a:r>
+            <a:endParaRPr lang="en-US" sz="1200" dirty="0"/>
+          </a:p>
+        </p:txBody>
+      </p:sp>
+      <p:sp>
+        <p:nvSpPr>
+          <p:cNvPr id="13" name="Text 7"/>
+          <p:cNvSpPr/>
+          <p:nvPr/>
+        </p:nvSpPr>
+        <p:spPr>
+          <a:xfrm>
+            <a:off x="6309361" y="5195491"/>
+            <a:ext cx="2348151" cy="162123"/>
           </a:xfrm>
           <a:prstGeom prst="rect">
             <a:avLst/>
@@ -3188,40 +3616,70 @@
           <a:ln/>
         </p:spPr>
         <p:txBody>
-          <a:bodyPr wrap="square" lIns="0" tIns="0" rIns="0" bIns="0" rtlCol="0" anchor="t"/>
+          <a:bodyPr wrap="none" lIns="0" tIns="0" rIns="0" bIns="0" rtlCol="0" anchor="t"/>
           <a:lstStyle/>
           <a:p>
             <a:pPr marL="0" indent="0" algn="l">
               <a:lnSpc>
-                <a:spcPts val="1800"/>
+                <a:spcPct val="110000"/>
               </a:lnSpc>
               <a:buNone/>
             </a:pPr>
             <a:r>
-              <a:rPr lang="en-US" sz="1300" dirty="0">
-                <a:solidFill>
-                  <a:srgbClr val="383838"/>
-                </a:solidFill>
-                <a:latin typeface="DM Sans" pitchFamily="34" charset="0"/>
-                <a:ea typeface="DM Sans" pitchFamily="34" charset="-122"/>
-                <a:cs typeface="DM Sans" pitchFamily="34" charset="-120"/>
-              </a:rPr>
-              <a:t>Plná podpora ľavého, pravého a stredného tlačidla</a:t>
-            </a:r>
-            <a:endParaRPr lang="en-US" sz="1300" dirty="0"/>
-          </a:p>
-        </p:txBody>
-      </p:sp>
-      <p:sp>
-        <p:nvSpPr>
-          <p:cNvPr id="12" name="Text 9"/>
-          <p:cNvSpPr/>
-          <p:nvPr/>
-        </p:nvSpPr>
-        <p:spPr>
-          <a:xfrm>
-            <a:off x="9302353" y="4653201"/>
-            <a:ext cx="165854" cy="207288"/>
+              <a:rPr lang="en-US" sz="950" dirty="0">
+                <a:solidFill>
+                  <a:srgbClr val="E5E0DF"/>
+                </a:solidFill>
+                <a:latin typeface="Roboto" pitchFamily="34" charset="0"/>
+                <a:ea typeface="Roboto" pitchFamily="34" charset="-122"/>
+                <a:cs typeface="Roboto" pitchFamily="34" charset="-120"/>
+              </a:rPr>
+              <a:t>Herná logika</a:t>
+            </a:r>
+            <a:endParaRPr lang="en-US" sz="950" dirty="0"/>
+          </a:p>
+        </p:txBody>
+      </p:sp>
+      <p:pic>
+        <p:nvPicPr>
+          <p:cNvPr id="14" name="Image 4" descr="preencoded.png"/>
+          <p:cNvPicPr>
+            <a:picLocks noChangeAspect="1"/>
+          </p:cNvPicPr>
+          <p:nvPr/>
+        </p:nvPicPr>
+        <p:blipFill>
+          <a:blip r:embed="rId3">
+            <a:extLst>
+              <a:ext uri="{96DAC541-7B7A-43D3-8B79-37D633B846F1}">
+                <asvg:svgBlip xmlns:asvg="http://schemas.microsoft.com/office/drawing/2016/SVG/main" r:embed="rId4"/>
+              </a:ext>
+            </a:extLst>
+          </a:blip>
+          <a:stretch>
+            <a:fillRect/>
+          </a:stretch>
+        </p:blipFill>
+        <p:spPr>
+          <a:xfrm>
+            <a:off x="8860112" y="4820146"/>
+            <a:ext cx="2670108" cy="673001"/>
+          </a:xfrm>
+          <a:prstGeom prst="rect">
+            <a:avLst/>
+          </a:prstGeom>
+        </p:spPr>
+      </p:pic>
+      <p:sp>
+        <p:nvSpPr>
+          <p:cNvPr id="15" name="Text 8"/>
+          <p:cNvSpPr/>
+          <p:nvPr/>
+        </p:nvSpPr>
+        <p:spPr>
+          <a:xfrm>
+            <a:off x="9046440" y="4955679"/>
+            <a:ext cx="1535769" cy="191988"/>
           </a:xfrm>
           <a:prstGeom prst="rect">
             <a:avLst/>
@@ -3235,62 +3693,35 @@
           <a:p>
             <a:pPr marL="0" indent="0" algn="l">
               <a:lnSpc>
-                <a:spcPts val="1800"/>
+                <a:spcPct val="104000"/>
               </a:lnSpc>
               <a:buNone/>
             </a:pPr>
             <a:r>
-              <a:rPr lang="en-US" sz="1300" dirty="0">
-                <a:solidFill>
-                  <a:srgbClr val="383838"/>
-                </a:solidFill>
-                <a:latin typeface="PT Serif Light" pitchFamily="34" charset="0"/>
-                <a:ea typeface="PT Serif Light" pitchFamily="34" charset="-122"/>
-                <a:cs typeface="PT Serif Light" pitchFamily="34" charset="-120"/>
-              </a:rPr>
-              <a:t>03</a:t>
-            </a:r>
-            <a:endParaRPr lang="en-US" sz="1300" dirty="0"/>
-          </a:p>
-        </p:txBody>
-      </p:sp>
-      <p:sp>
-        <p:nvSpPr>
-          <p:cNvPr id="13" name="Shape 10"/>
-          <p:cNvSpPr/>
-          <p:nvPr/>
-        </p:nvSpPr>
-        <p:spPr>
-          <a:xfrm>
-            <a:off x="9302353" y="4912162"/>
-            <a:ext cx="3742492" cy="22860"/>
-          </a:xfrm>
-          <a:prstGeom prst="rect">
-            <a:avLst/>
-          </a:prstGeom>
-          <a:solidFill>
-            <a:srgbClr val="E04F00"/>
-          </a:solidFill>
-          <a:ln/>
-        </p:spPr>
-        <p:txBody>
-          <a:bodyPr/>
-          <a:lstStyle/>
-          <a:p>
-            <a:endParaRPr lang="sk-SK"/>
-          </a:p>
-        </p:txBody>
-      </p:sp>
-      <p:sp>
-        <p:nvSpPr>
-          <p:cNvPr id="14" name="Text 11"/>
-          <p:cNvSpPr/>
-          <p:nvPr/>
-        </p:nvSpPr>
-        <p:spPr>
-          <a:xfrm>
-            <a:off x="9302353" y="5040749"/>
-            <a:ext cx="2176820" cy="272058"/>
+              <a:rPr lang="en-US" sz="1200" dirty="0">
+                <a:solidFill>
+                  <a:srgbClr val="DCFF50"/>
+                </a:solidFill>
+                <a:latin typeface="Roboto Mono Medium" pitchFamily="34" charset="0"/>
+                <a:ea typeface="Roboto Mono Medium" pitchFamily="34" charset="-122"/>
+                <a:cs typeface="Roboto Mono Medium" pitchFamily="34" charset="-120"/>
+              </a:rPr>
+              <a:t>network.py</a:t>
+            </a:r>
+            <a:endParaRPr lang="en-US" sz="1200" dirty="0"/>
+          </a:p>
+        </p:txBody>
+      </p:sp>
+      <p:sp>
+        <p:nvSpPr>
+          <p:cNvPr id="16" name="Text 9"/>
+          <p:cNvSpPr/>
+          <p:nvPr/>
+        </p:nvSpPr>
+        <p:spPr>
+          <a:xfrm>
+            <a:off x="9046440" y="5195491"/>
+            <a:ext cx="2348251" cy="162123"/>
           </a:xfrm>
           <a:prstGeom prst="rect">
             <a:avLst/>
@@ -3304,35 +3735,65 @@
           <a:p>
             <a:pPr marL="0" indent="0" algn="l">
               <a:lnSpc>
-                <a:spcPts val="2100"/>
+                <a:spcPct val="110000"/>
               </a:lnSpc>
               <a:buNone/>
             </a:pPr>
             <a:r>
-              <a:rPr lang="en-US" sz="1700" dirty="0">
-                <a:solidFill>
-                  <a:srgbClr val="383838"/>
-                </a:solidFill>
-                <a:latin typeface="PT Serif" pitchFamily="34" charset="0"/>
-                <a:ea typeface="PT Serif" pitchFamily="34" charset="-122"/>
-                <a:cs typeface="PT Serif" pitchFamily="34" charset="-120"/>
-              </a:rPr>
-              <a:t>Farebné rozhranie</a:t>
-            </a:r>
-            <a:endParaRPr lang="en-US" sz="1700" dirty="0"/>
-          </a:p>
-        </p:txBody>
-      </p:sp>
-      <p:sp>
-        <p:nvSpPr>
-          <p:cNvPr id="15" name="Text 12"/>
-          <p:cNvSpPr/>
-          <p:nvPr/>
-        </p:nvSpPr>
-        <p:spPr>
-          <a:xfrm>
-            <a:off x="9302353" y="5434013"/>
-            <a:ext cx="3742492" cy="229672"/>
+              <a:rPr lang="en-US" sz="950" dirty="0">
+                <a:solidFill>
+                  <a:srgbClr val="E5E0DF"/>
+                </a:solidFill>
+                <a:latin typeface="Roboto" pitchFamily="34" charset="0"/>
+                <a:ea typeface="Roboto" pitchFamily="34" charset="-122"/>
+                <a:cs typeface="Roboto" pitchFamily="34" charset="-120"/>
+              </a:rPr>
+              <a:t>Sieťová komunikácia</a:t>
+            </a:r>
+            <a:endParaRPr lang="en-US" sz="950" dirty="0"/>
+          </a:p>
+        </p:txBody>
+      </p:sp>
+      <p:pic>
+        <p:nvPicPr>
+          <p:cNvPr id="17" name="Image 5" descr="preencoded.png"/>
+          <p:cNvPicPr>
+            <a:picLocks noChangeAspect="1"/>
+          </p:cNvPicPr>
+          <p:nvPr/>
+        </p:nvPicPr>
+        <p:blipFill>
+          <a:blip r:embed="rId3">
+            <a:extLst>
+              <a:ext uri="{96DAC541-7B7A-43D3-8B79-37D633B846F1}">
+                <asvg:svgBlip xmlns:asvg="http://schemas.microsoft.com/office/drawing/2016/SVG/main" r:embed="rId4"/>
+              </a:ext>
+            </a:extLst>
+          </a:blip>
+          <a:stretch>
+            <a:fillRect/>
+          </a:stretch>
+        </p:blipFill>
+        <p:spPr>
+          <a:xfrm>
+            <a:off x="648775" y="5572919"/>
+            <a:ext cx="2670009" cy="673001"/>
+          </a:xfrm>
+          <a:prstGeom prst="rect">
+            <a:avLst/>
+          </a:prstGeom>
+        </p:spPr>
+      </p:pic>
+      <p:sp>
+        <p:nvSpPr>
+          <p:cNvPr id="18" name="Text 10"/>
+          <p:cNvSpPr/>
+          <p:nvPr/>
+        </p:nvSpPr>
+        <p:spPr>
+          <a:xfrm>
+            <a:off x="835103" y="5708452"/>
+            <a:ext cx="1535769" cy="191988"/>
           </a:xfrm>
           <a:prstGeom prst="rect">
             <a:avLst/>
@@ -3346,35 +3807,35 @@
           <a:p>
             <a:pPr marL="0" indent="0" algn="l">
               <a:lnSpc>
-                <a:spcPts val="1800"/>
+                <a:spcPct val="104000"/>
               </a:lnSpc>
               <a:buNone/>
             </a:pPr>
             <a:r>
-              <a:rPr lang="en-US" sz="1300" dirty="0">
-                <a:solidFill>
-                  <a:srgbClr val="383838"/>
-                </a:solidFill>
-                <a:latin typeface="DM Sans" pitchFamily="34" charset="0"/>
-                <a:ea typeface="DM Sans" pitchFamily="34" charset="-122"/>
-                <a:cs typeface="DM Sans" pitchFamily="34" charset="-120"/>
-              </a:rPr>
-              <a:t>Použitie farieb a textu pre lepšiu prehľadnosť</a:t>
-            </a:r>
-            <a:endParaRPr lang="en-US" sz="1300" dirty="0"/>
-          </a:p>
-        </p:txBody>
-      </p:sp>
-      <p:sp>
-        <p:nvSpPr>
-          <p:cNvPr id="16" name="Text 13"/>
-          <p:cNvSpPr/>
-          <p:nvPr/>
-        </p:nvSpPr>
-        <p:spPr>
-          <a:xfrm>
-            <a:off x="9302353" y="5909191"/>
-            <a:ext cx="165854" cy="207288"/>
+              <a:rPr lang="en-US" sz="1200" dirty="0">
+                <a:solidFill>
+                  <a:srgbClr val="DCFF50"/>
+                </a:solidFill>
+                <a:latin typeface="Roboto Mono Medium" pitchFamily="34" charset="0"/>
+                <a:ea typeface="Roboto Mono Medium" pitchFamily="34" charset="-122"/>
+                <a:cs typeface="Roboto Mono Medium" pitchFamily="34" charset="-120"/>
+              </a:rPr>
+              <a:t>server.py</a:t>
+            </a:r>
+            <a:endParaRPr lang="en-US" sz="1200" dirty="0"/>
+          </a:p>
+        </p:txBody>
+      </p:sp>
+      <p:sp>
+        <p:nvSpPr>
+          <p:cNvPr id="19" name="Text 11"/>
+          <p:cNvSpPr/>
+          <p:nvPr/>
+        </p:nvSpPr>
+        <p:spPr>
+          <a:xfrm>
+            <a:off x="835103" y="5948263"/>
+            <a:ext cx="2348151" cy="162123"/>
           </a:xfrm>
           <a:prstGeom prst="rect">
             <a:avLst/>
@@ -3388,142 +3849,31 @@
           <a:p>
             <a:pPr marL="0" indent="0" algn="l">
               <a:lnSpc>
-                <a:spcPts val="1800"/>
+                <a:spcPct val="110000"/>
               </a:lnSpc>
               <a:buNone/>
             </a:pPr>
             <a:r>
-              <a:rPr lang="en-US" sz="1300" dirty="0">
-                <a:solidFill>
-                  <a:srgbClr val="383838"/>
-                </a:solidFill>
-                <a:latin typeface="PT Serif Light" pitchFamily="34" charset="0"/>
-                <a:ea typeface="PT Serif Light" pitchFamily="34" charset="-122"/>
-                <a:cs typeface="PT Serif Light" pitchFamily="34" charset="-120"/>
-              </a:rPr>
-              <a:t>04</a:t>
-            </a:r>
-            <a:endParaRPr lang="en-US" sz="1300" dirty="0"/>
-          </a:p>
-        </p:txBody>
-      </p:sp>
-      <p:sp>
-        <p:nvSpPr>
-          <p:cNvPr id="17" name="Shape 14"/>
-          <p:cNvSpPr/>
-          <p:nvPr/>
-        </p:nvSpPr>
-        <p:spPr>
-          <a:xfrm>
-            <a:off x="9302353" y="6168152"/>
-            <a:ext cx="3742492" cy="22860"/>
-          </a:xfrm>
-          <a:prstGeom prst="rect">
-            <a:avLst/>
-          </a:prstGeom>
-          <a:solidFill>
-            <a:srgbClr val="E04F00"/>
-          </a:solidFill>
-          <a:ln/>
-        </p:spPr>
-        <p:txBody>
-          <a:bodyPr/>
-          <a:lstStyle/>
-          <a:p>
-            <a:endParaRPr lang="sk-SK"/>
-          </a:p>
-        </p:txBody>
-      </p:sp>
-      <p:sp>
-        <p:nvSpPr>
-          <p:cNvPr id="18" name="Text 15"/>
-          <p:cNvSpPr/>
-          <p:nvPr/>
-        </p:nvSpPr>
-        <p:spPr>
-          <a:xfrm>
-            <a:off x="9302353" y="6296739"/>
-            <a:ext cx="2176820" cy="272058"/>
-          </a:xfrm>
-          <a:prstGeom prst="rect">
-            <a:avLst/>
-          </a:prstGeom>
-          <a:noFill/>
-          <a:ln/>
-        </p:spPr>
-        <p:txBody>
-          <a:bodyPr wrap="none" lIns="0" tIns="0" rIns="0" bIns="0" rtlCol="0" anchor="t"/>
-          <a:lstStyle/>
-          <a:p>
-            <a:pPr marL="0" indent="0" algn="l">
-              <a:lnSpc>
-                <a:spcPts val="2100"/>
-              </a:lnSpc>
-              <a:buNone/>
-            </a:pPr>
-            <a:r>
-              <a:rPr lang="en-US" sz="1700" dirty="0">
-                <a:solidFill>
-                  <a:srgbClr val="383838"/>
-                </a:solidFill>
-                <a:latin typeface="PT Serif" pitchFamily="34" charset="0"/>
-                <a:ea typeface="PT Serif" pitchFamily="34" charset="-122"/>
-                <a:cs typeface="PT Serif" pitchFamily="34" charset="-120"/>
-              </a:rPr>
-              <a:t>Systém nových hier</a:t>
-            </a:r>
-            <a:endParaRPr lang="en-US" sz="1700" dirty="0"/>
-          </a:p>
-        </p:txBody>
-      </p:sp>
-      <p:sp>
-        <p:nvSpPr>
-          <p:cNvPr id="19" name="Text 16"/>
-          <p:cNvSpPr/>
-          <p:nvPr/>
-        </p:nvSpPr>
-        <p:spPr>
-          <a:xfrm>
-            <a:off x="9302353" y="6690003"/>
-            <a:ext cx="3742492" cy="229672"/>
-          </a:xfrm>
-          <a:prstGeom prst="rect">
-            <a:avLst/>
-          </a:prstGeom>
-          <a:noFill/>
-          <a:ln/>
-        </p:spPr>
-        <p:txBody>
-          <a:bodyPr wrap="none" lIns="0" tIns="0" rIns="0" bIns="0" rtlCol="0" anchor="t"/>
-          <a:lstStyle/>
-          <a:p>
-            <a:pPr marL="0" indent="0" algn="l">
-              <a:lnSpc>
-                <a:spcPts val="1800"/>
-              </a:lnSpc>
-              <a:buNone/>
-            </a:pPr>
-            <a:r>
-              <a:rPr lang="en-US" sz="1300" dirty="0">
-                <a:solidFill>
-                  <a:srgbClr val="383838"/>
-                </a:solidFill>
-                <a:latin typeface="DM Sans" pitchFamily="34" charset="0"/>
-                <a:ea typeface="DM Sans" pitchFamily="34" charset="-122"/>
-                <a:cs typeface="DM Sans" pitchFamily="34" charset="-120"/>
-              </a:rPr>
-              <a:t>Rýchle spustenie novej hry kedykoľvek</a:t>
-            </a:r>
-            <a:endParaRPr lang="en-US" sz="1300" dirty="0"/>
+              <a:rPr lang="en-US" sz="950" dirty="0">
+                <a:solidFill>
+                  <a:srgbClr val="E5E0DF"/>
+                </a:solidFill>
+                <a:latin typeface="Roboto" pitchFamily="34" charset="0"/>
+                <a:ea typeface="Roboto" pitchFamily="34" charset="-122"/>
+                <a:cs typeface="Roboto" pitchFamily="34" charset="-120"/>
+              </a:rPr>
+              <a:t>Multiplayer server</a:t>
+            </a:r>
+            <a:endParaRPr lang="en-US" sz="950" dirty="0"/>
           </a:p>
         </p:txBody>
       </p:sp>
       <p:pic>
         <p:nvPicPr>
-          <p:cNvPr id="20" name="Obrázok 19">
+          <p:cNvPr id="21" name="Obrázok 20">
             <a:extLst>
               <a:ext uri="{FF2B5EF4-FFF2-40B4-BE49-F238E27FC236}">
-                <a16:creationId xmlns:a16="http://schemas.microsoft.com/office/drawing/2014/main" id="{3E3CD505-9EE3-3E6A-E755-C7A54F0FF530}"/>
+                <a16:creationId xmlns:a16="http://schemas.microsoft.com/office/drawing/2014/main" id="{2251B270-18AC-880A-F4DE-7CEB08601578}"/>
               </a:ext>
             </a:extLst>
           </p:cNvPr>
@@ -3533,15 +3883,45 @@
           <p:nvPr/>
         </p:nvPicPr>
         <p:blipFill>
-          <a:blip r:embed="rId4"/>
+          <a:blip r:embed="rId5"/>
           <a:stretch>
             <a:fillRect/>
           </a:stretch>
         </p:blipFill>
         <p:spPr>
           <a:xfrm>
-            <a:off x="12857356" y="7728464"/>
-            <a:ext cx="1703256" cy="400106"/>
+            <a:off x="6123033" y="1098583"/>
+            <a:ext cx="5572166" cy="2819421"/>
+          </a:xfrm>
+          <a:prstGeom prst="rect">
+            <a:avLst/>
+          </a:prstGeom>
+        </p:spPr>
+      </p:pic>
+      <p:pic>
+        <p:nvPicPr>
+          <p:cNvPr id="22" name="Obrázok 21">
+            <a:extLst>
+              <a:ext uri="{FF2B5EF4-FFF2-40B4-BE49-F238E27FC236}">
+                <a16:creationId xmlns:a16="http://schemas.microsoft.com/office/drawing/2014/main" id="{2CC458F5-4B12-B1E3-9DB9-361597A487EB}"/>
+              </a:ext>
+            </a:extLst>
+          </p:cNvPr>
+          <p:cNvPicPr>
+            <a:picLocks noChangeAspect="1"/>
+          </p:cNvPicPr>
+          <p:nvPr/>
+        </p:nvPicPr>
+        <p:blipFill>
+          <a:blip r:embed="rId6"/>
+          <a:stretch>
+            <a:fillRect/>
+          </a:stretch>
+        </p:blipFill>
+        <p:spPr>
+          <a:xfrm>
+            <a:off x="11048475" y="6512742"/>
+            <a:ext cx="1143526" cy="279799"/>
           </a:xfrm>
           <a:prstGeom prst="rect">
             <a:avLst/>
@@ -3573,9 +3953,874 @@
           <a:chExt cx="0" cy="0"/>
         </a:xfrm>
       </p:grpSpPr>
+      <p:sp>
+        <p:nvSpPr>
+          <p:cNvPr id="2" name="Text 0"/>
+          <p:cNvSpPr/>
+          <p:nvPr/>
+        </p:nvSpPr>
+        <p:spPr>
+          <a:xfrm>
+            <a:off x="661475" y="603151"/>
+            <a:ext cx="4153590" cy="443012"/>
+          </a:xfrm>
+          <a:prstGeom prst="rect">
+            <a:avLst/>
+          </a:prstGeom>
+          <a:noFill/>
+          <a:ln/>
+        </p:spPr>
+        <p:txBody>
+          <a:bodyPr wrap="none" lIns="0" tIns="0" rIns="0" bIns="0" rtlCol="0" anchor="t"/>
+          <a:lstStyle/>
+          <a:p>
+            <a:pPr marL="0" indent="0" algn="l">
+              <a:lnSpc>
+                <a:spcPct val="104000"/>
+              </a:lnSpc>
+              <a:buNone/>
+            </a:pPr>
+            <a:r>
+              <a:rPr lang="en-US" sz="2750" dirty="0">
+                <a:solidFill>
+                  <a:srgbClr val="FFFFFF"/>
+                </a:solidFill>
+                <a:latin typeface="Roboto Mono Medium" pitchFamily="34" charset="0"/>
+                <a:ea typeface="Roboto Mono Medium" pitchFamily="34" charset="-122"/>
+                <a:cs typeface="Roboto Mono Medium" pitchFamily="34" charset="-120"/>
+              </a:rPr>
+              <a:t>Herný engine</a:t>
+            </a:r>
+            <a:endParaRPr lang="en-US" sz="2750" dirty="0"/>
+          </a:p>
+        </p:txBody>
+      </p:sp>
+      <p:sp>
+        <p:nvSpPr>
+          <p:cNvPr id="3" name="Text 1"/>
+          <p:cNvSpPr/>
+          <p:nvPr/>
+        </p:nvSpPr>
+        <p:spPr>
+          <a:xfrm>
+            <a:off x="661475" y="1258788"/>
+            <a:ext cx="11478330" cy="198438"/>
+          </a:xfrm>
+          <a:prstGeom prst="rect">
+            <a:avLst/>
+          </a:prstGeom>
+          <a:noFill/>
+          <a:ln/>
+        </p:spPr>
+        <p:txBody>
+          <a:bodyPr wrap="none" lIns="0" tIns="0" rIns="0" bIns="0" rtlCol="0" anchor="t"/>
+          <a:lstStyle/>
+          <a:p>
+            <a:pPr marL="0" indent="0" algn="l">
+              <a:lnSpc>
+                <a:spcPct val="117000"/>
+              </a:lnSpc>
+              <a:buNone/>
+            </a:pPr>
+            <a:r>
+              <a:rPr lang="en-US" sz="1100" dirty="0">
+                <a:solidFill>
+                  <a:srgbClr val="E5E0DF"/>
+                </a:solidFill>
+                <a:latin typeface="Roboto" pitchFamily="34" charset="0"/>
+                <a:ea typeface="Roboto" pitchFamily="34" charset="-122"/>
+                <a:cs typeface="Roboto" pitchFamily="34" charset="-120"/>
+              </a:rPr>
+              <a:t>Engine obsahuje všetky pravidlá hry a spracováva akcie hráča.</a:t>
+            </a:r>
+            <a:endParaRPr lang="en-US" sz="1100" dirty="0"/>
+          </a:p>
+        </p:txBody>
+      </p:sp>
+      <p:sp>
+        <p:nvSpPr>
+          <p:cNvPr id="4" name="Shape 2"/>
+          <p:cNvSpPr/>
+          <p:nvPr/>
+        </p:nvSpPr>
+        <p:spPr>
+          <a:xfrm>
+            <a:off x="661475" y="1576784"/>
+            <a:ext cx="567021" cy="850602"/>
+          </a:xfrm>
+          <a:prstGeom prst="roundRect">
+            <a:avLst>
+              <a:gd name="adj" fmla="val 360022"/>
+            </a:avLst>
+          </a:prstGeom>
+          <a:solidFill>
+            <a:srgbClr val="404040"/>
+          </a:solidFill>
+          <a:ln/>
+        </p:spPr>
+        <p:txBody>
+          <a:bodyPr/>
+          <a:lstStyle/>
+          <a:p>
+            <a:endParaRPr lang="sk-SK"/>
+          </a:p>
+        </p:txBody>
+      </p:sp>
+      <p:sp>
+        <p:nvSpPr>
+          <p:cNvPr id="5" name="Text 3"/>
+          <p:cNvSpPr/>
+          <p:nvPr/>
+        </p:nvSpPr>
+        <p:spPr>
+          <a:xfrm>
+            <a:off x="838675" y="1869182"/>
+            <a:ext cx="212620" cy="265807"/>
+          </a:xfrm>
+          <a:prstGeom prst="rect">
+            <a:avLst/>
+          </a:prstGeom>
+          <a:noFill/>
+          <a:ln/>
+        </p:spPr>
+        <p:txBody>
+          <a:bodyPr wrap="none" lIns="0" tIns="0" rIns="0" bIns="0" rtlCol="0" anchor="ctr"/>
+          <a:lstStyle/>
+          <a:p>
+            <a:pPr marL="0" indent="0" algn="ctr">
+              <a:lnSpc>
+                <a:spcPct val="100000"/>
+              </a:lnSpc>
+              <a:buNone/>
+            </a:pPr>
+            <a:r>
+              <a:rPr lang="en-US" sz="1650" dirty="0">
+                <a:solidFill>
+                  <a:srgbClr val="E5E0DF"/>
+                </a:solidFill>
+                <a:latin typeface="Roboto Mono Medium" pitchFamily="34" charset="0"/>
+                <a:ea typeface="Roboto Mono Medium" pitchFamily="34" charset="-122"/>
+                <a:cs typeface="Roboto Mono Medium" pitchFamily="34" charset="-120"/>
+              </a:rPr>
+              <a:t>1</a:t>
+            </a:r>
+            <a:endParaRPr lang="en-US" sz="1650" dirty="0"/>
+          </a:p>
+        </p:txBody>
+      </p:sp>
+      <p:sp>
+        <p:nvSpPr>
+          <p:cNvPr id="6" name="Text 4"/>
+          <p:cNvSpPr/>
+          <p:nvPr/>
+        </p:nvSpPr>
+        <p:spPr>
+          <a:xfrm>
+            <a:off x="1334756" y="1718469"/>
+            <a:ext cx="1772003" cy="221456"/>
+          </a:xfrm>
+          <a:prstGeom prst="rect">
+            <a:avLst/>
+          </a:prstGeom>
+          <a:noFill/>
+          <a:ln/>
+        </p:spPr>
+        <p:txBody>
+          <a:bodyPr wrap="none" lIns="0" tIns="0" rIns="0" bIns="0" rtlCol="0" anchor="t"/>
+          <a:lstStyle/>
+          <a:p>
+            <a:pPr marL="0" indent="0" algn="l">
+              <a:lnSpc>
+                <a:spcPct val="104000"/>
+              </a:lnSpc>
+              <a:buNone/>
+            </a:pPr>
+            <a:r>
+              <a:rPr lang="en-US" sz="1350" dirty="0">
+                <a:solidFill>
+                  <a:srgbClr val="E5E0DF"/>
+                </a:solidFill>
+                <a:latin typeface="Roboto Mono Medium" pitchFamily="34" charset="0"/>
+                <a:ea typeface="Roboto Mono Medium" pitchFamily="34" charset="-122"/>
+                <a:cs typeface="Roboto Mono Medium" pitchFamily="34" charset="-120"/>
+              </a:rPr>
+              <a:t>Generovanie mín</a:t>
+            </a:r>
+            <a:endParaRPr lang="en-US" sz="1350" dirty="0"/>
+          </a:p>
+        </p:txBody>
+      </p:sp>
+      <p:sp>
+        <p:nvSpPr>
+          <p:cNvPr id="7" name="Text 5"/>
+          <p:cNvSpPr/>
+          <p:nvPr/>
+        </p:nvSpPr>
+        <p:spPr>
+          <a:xfrm>
+            <a:off x="1334756" y="2003623"/>
+            <a:ext cx="10195464" cy="198438"/>
+          </a:xfrm>
+          <a:prstGeom prst="rect">
+            <a:avLst/>
+          </a:prstGeom>
+          <a:noFill/>
+          <a:ln/>
+        </p:spPr>
+        <p:txBody>
+          <a:bodyPr wrap="none" lIns="0" tIns="0" rIns="0" bIns="0" rtlCol="0" anchor="t"/>
+          <a:lstStyle/>
+          <a:p>
+            <a:pPr marL="0" indent="0" algn="l">
+              <a:lnSpc>
+                <a:spcPct val="117000"/>
+              </a:lnSpc>
+              <a:buNone/>
+            </a:pPr>
+            <a:r>
+              <a:rPr lang="en-US" sz="1100" dirty="0">
+                <a:solidFill>
+                  <a:srgbClr val="E5E0DF"/>
+                </a:solidFill>
+                <a:latin typeface="Roboto" pitchFamily="34" charset="0"/>
+                <a:ea typeface="Roboto" pitchFamily="34" charset="-122"/>
+                <a:cs typeface="Roboto" pitchFamily="34" charset="-120"/>
+              </a:rPr>
+              <a:t>Náhodné rozmiestnenie podľa obtiažnosti</a:t>
+            </a:r>
+            <a:endParaRPr lang="en-US" sz="1100" dirty="0"/>
+          </a:p>
+        </p:txBody>
+      </p:sp>
+      <p:sp>
+        <p:nvSpPr>
+          <p:cNvPr id="8" name="Shape 6"/>
+          <p:cNvSpPr/>
+          <p:nvPr/>
+        </p:nvSpPr>
+        <p:spPr>
+          <a:xfrm>
+            <a:off x="661475" y="2533650"/>
+            <a:ext cx="567021" cy="850602"/>
+          </a:xfrm>
+          <a:prstGeom prst="roundRect">
+            <a:avLst>
+              <a:gd name="adj" fmla="val 360022"/>
+            </a:avLst>
+          </a:prstGeom>
+          <a:solidFill>
+            <a:srgbClr val="404040"/>
+          </a:solidFill>
+          <a:ln/>
+        </p:spPr>
+        <p:txBody>
+          <a:bodyPr/>
+          <a:lstStyle/>
+          <a:p>
+            <a:endParaRPr lang="sk-SK"/>
+          </a:p>
+        </p:txBody>
+      </p:sp>
+      <p:sp>
+        <p:nvSpPr>
+          <p:cNvPr id="9" name="Text 7"/>
+          <p:cNvSpPr/>
+          <p:nvPr/>
+        </p:nvSpPr>
+        <p:spPr>
+          <a:xfrm>
+            <a:off x="838675" y="2826048"/>
+            <a:ext cx="212620" cy="265807"/>
+          </a:xfrm>
+          <a:prstGeom prst="rect">
+            <a:avLst/>
+          </a:prstGeom>
+          <a:noFill/>
+          <a:ln/>
+        </p:spPr>
+        <p:txBody>
+          <a:bodyPr wrap="none" lIns="0" tIns="0" rIns="0" bIns="0" rtlCol="0" anchor="ctr"/>
+          <a:lstStyle/>
+          <a:p>
+            <a:pPr marL="0" indent="0" algn="ctr">
+              <a:lnSpc>
+                <a:spcPct val="100000"/>
+              </a:lnSpc>
+              <a:buNone/>
+            </a:pPr>
+            <a:r>
+              <a:rPr lang="en-US" sz="1650" dirty="0">
+                <a:solidFill>
+                  <a:srgbClr val="E5E0DF"/>
+                </a:solidFill>
+                <a:latin typeface="Roboto Mono Medium" pitchFamily="34" charset="0"/>
+                <a:ea typeface="Roboto Mono Medium" pitchFamily="34" charset="-122"/>
+                <a:cs typeface="Roboto Mono Medium" pitchFamily="34" charset="-120"/>
+              </a:rPr>
+              <a:t>2</a:t>
+            </a:r>
+            <a:endParaRPr lang="en-US" sz="1650" dirty="0"/>
+          </a:p>
+        </p:txBody>
+      </p:sp>
+      <p:sp>
+        <p:nvSpPr>
+          <p:cNvPr id="10" name="Text 8"/>
+          <p:cNvSpPr/>
+          <p:nvPr/>
+        </p:nvSpPr>
+        <p:spPr>
+          <a:xfrm>
+            <a:off x="1334756" y="2675334"/>
+            <a:ext cx="1913088" cy="221456"/>
+          </a:xfrm>
+          <a:prstGeom prst="rect">
+            <a:avLst/>
+          </a:prstGeom>
+          <a:noFill/>
+          <a:ln/>
+        </p:spPr>
+        <p:txBody>
+          <a:bodyPr wrap="none" lIns="0" tIns="0" rIns="0" bIns="0" rtlCol="0" anchor="t"/>
+          <a:lstStyle/>
+          <a:p>
+            <a:pPr marL="0" indent="0" algn="l">
+              <a:lnSpc>
+                <a:spcPct val="104000"/>
+              </a:lnSpc>
+              <a:buNone/>
+            </a:pPr>
+            <a:r>
+              <a:rPr lang="en-US" sz="1350" dirty="0">
+                <a:solidFill>
+                  <a:srgbClr val="E5E0DF"/>
+                </a:solidFill>
+                <a:latin typeface="Roboto Mono Medium" pitchFamily="34" charset="0"/>
+                <a:ea typeface="Roboto Mono Medium" pitchFamily="34" charset="-122"/>
+                <a:cs typeface="Roboto Mono Medium" pitchFamily="34" charset="-120"/>
+              </a:rPr>
+              <a:t>Bezpečný prvý klik</a:t>
+            </a:r>
+            <a:endParaRPr lang="en-US" sz="1350" dirty="0"/>
+          </a:p>
+        </p:txBody>
+      </p:sp>
+      <p:sp>
+        <p:nvSpPr>
+          <p:cNvPr id="11" name="Text 9"/>
+          <p:cNvSpPr/>
+          <p:nvPr/>
+        </p:nvSpPr>
+        <p:spPr>
+          <a:xfrm>
+            <a:off x="1334756" y="2960489"/>
+            <a:ext cx="10195464" cy="198438"/>
+          </a:xfrm>
+          <a:prstGeom prst="rect">
+            <a:avLst/>
+          </a:prstGeom>
+          <a:noFill/>
+          <a:ln/>
+        </p:spPr>
+        <p:txBody>
+          <a:bodyPr wrap="none" lIns="0" tIns="0" rIns="0" bIns="0" rtlCol="0" anchor="t"/>
+          <a:lstStyle/>
+          <a:p>
+            <a:pPr marL="0" indent="0" algn="l">
+              <a:lnSpc>
+                <a:spcPct val="117000"/>
+              </a:lnSpc>
+              <a:buNone/>
+            </a:pPr>
+            <a:r>
+              <a:rPr lang="en-US" sz="1100" dirty="0">
+                <a:solidFill>
+                  <a:srgbClr val="E5E0DF"/>
+                </a:solidFill>
+                <a:latin typeface="Roboto" pitchFamily="34" charset="0"/>
+                <a:ea typeface="Roboto" pitchFamily="34" charset="-122"/>
+                <a:cs typeface="Roboto" pitchFamily="34" charset="-120"/>
+              </a:rPr>
+              <a:t>Prvé políčko nikdy neobsahuje mínu</a:t>
+            </a:r>
+            <a:endParaRPr lang="en-US" sz="1100" dirty="0"/>
+          </a:p>
+        </p:txBody>
+      </p:sp>
+      <p:sp>
+        <p:nvSpPr>
+          <p:cNvPr id="12" name="Shape 10"/>
+          <p:cNvSpPr/>
+          <p:nvPr/>
+        </p:nvSpPr>
+        <p:spPr>
+          <a:xfrm>
+            <a:off x="661475" y="3490516"/>
+            <a:ext cx="567021" cy="850602"/>
+          </a:xfrm>
+          <a:prstGeom prst="roundRect">
+            <a:avLst>
+              <a:gd name="adj" fmla="val 360022"/>
+            </a:avLst>
+          </a:prstGeom>
+          <a:solidFill>
+            <a:srgbClr val="404040"/>
+          </a:solidFill>
+          <a:ln/>
+        </p:spPr>
+        <p:txBody>
+          <a:bodyPr/>
+          <a:lstStyle/>
+          <a:p>
+            <a:endParaRPr lang="sk-SK"/>
+          </a:p>
+        </p:txBody>
+      </p:sp>
+      <p:sp>
+        <p:nvSpPr>
+          <p:cNvPr id="13" name="Text 11"/>
+          <p:cNvSpPr/>
+          <p:nvPr/>
+        </p:nvSpPr>
+        <p:spPr>
+          <a:xfrm>
+            <a:off x="838675" y="3782913"/>
+            <a:ext cx="212620" cy="265807"/>
+          </a:xfrm>
+          <a:prstGeom prst="rect">
+            <a:avLst/>
+          </a:prstGeom>
+          <a:noFill/>
+          <a:ln/>
+        </p:spPr>
+        <p:txBody>
+          <a:bodyPr wrap="none" lIns="0" tIns="0" rIns="0" bIns="0" rtlCol="0" anchor="ctr"/>
+          <a:lstStyle/>
+          <a:p>
+            <a:pPr marL="0" indent="0" algn="ctr">
+              <a:lnSpc>
+                <a:spcPct val="100000"/>
+              </a:lnSpc>
+              <a:buNone/>
+            </a:pPr>
+            <a:r>
+              <a:rPr lang="en-US" sz="1650" dirty="0">
+                <a:solidFill>
+                  <a:srgbClr val="E5E0DF"/>
+                </a:solidFill>
+                <a:latin typeface="Roboto Mono Medium" pitchFamily="34" charset="0"/>
+                <a:ea typeface="Roboto Mono Medium" pitchFamily="34" charset="-122"/>
+                <a:cs typeface="Roboto Mono Medium" pitchFamily="34" charset="-120"/>
+              </a:rPr>
+              <a:t>3</a:t>
+            </a:r>
+            <a:endParaRPr lang="en-US" sz="1650" dirty="0"/>
+          </a:p>
+        </p:txBody>
+      </p:sp>
+      <p:sp>
+        <p:nvSpPr>
+          <p:cNvPr id="14" name="Text 12"/>
+          <p:cNvSpPr/>
+          <p:nvPr/>
+        </p:nvSpPr>
+        <p:spPr>
+          <a:xfrm>
+            <a:off x="1334756" y="3632200"/>
+            <a:ext cx="1772003" cy="221456"/>
+          </a:xfrm>
+          <a:prstGeom prst="rect">
+            <a:avLst/>
+          </a:prstGeom>
+          <a:noFill/>
+          <a:ln/>
+        </p:spPr>
+        <p:txBody>
+          <a:bodyPr wrap="none" lIns="0" tIns="0" rIns="0" bIns="0" rtlCol="0" anchor="t"/>
+          <a:lstStyle/>
+          <a:p>
+            <a:pPr marL="0" indent="0" algn="l">
+              <a:lnSpc>
+                <a:spcPct val="104000"/>
+              </a:lnSpc>
+              <a:buNone/>
+            </a:pPr>
+            <a:r>
+              <a:rPr lang="en-US" sz="1350" dirty="0">
+                <a:solidFill>
+                  <a:srgbClr val="E5E0DF"/>
+                </a:solidFill>
+                <a:latin typeface="Roboto Mono Medium" pitchFamily="34" charset="0"/>
+                <a:ea typeface="Roboto Mono Medium" pitchFamily="34" charset="-122"/>
+                <a:cs typeface="Roboto Mono Medium" pitchFamily="34" charset="-120"/>
+              </a:rPr>
+              <a:t>Odkrývanie polí</a:t>
+            </a:r>
+            <a:endParaRPr lang="en-US" sz="1350" dirty="0"/>
+          </a:p>
+        </p:txBody>
+      </p:sp>
+      <p:sp>
+        <p:nvSpPr>
+          <p:cNvPr id="15" name="Text 13"/>
+          <p:cNvSpPr/>
+          <p:nvPr/>
+        </p:nvSpPr>
+        <p:spPr>
+          <a:xfrm>
+            <a:off x="1334756" y="3917355"/>
+            <a:ext cx="10195464" cy="198438"/>
+          </a:xfrm>
+          <a:prstGeom prst="rect">
+            <a:avLst/>
+          </a:prstGeom>
+          <a:noFill/>
+          <a:ln/>
+        </p:spPr>
+        <p:txBody>
+          <a:bodyPr wrap="none" lIns="0" tIns="0" rIns="0" bIns="0" rtlCol="0" anchor="t"/>
+          <a:lstStyle/>
+          <a:p>
+            <a:pPr marL="0" indent="0" algn="l">
+              <a:lnSpc>
+                <a:spcPct val="117000"/>
+              </a:lnSpc>
+              <a:buNone/>
+            </a:pPr>
+            <a:r>
+              <a:rPr lang="en-US" sz="1100" dirty="0">
+                <a:solidFill>
+                  <a:srgbClr val="E5E0DF"/>
+                </a:solidFill>
+                <a:latin typeface="Roboto" pitchFamily="34" charset="0"/>
+                <a:ea typeface="Roboto" pitchFamily="34" charset="-122"/>
+                <a:cs typeface="Roboto" pitchFamily="34" charset="-120"/>
+              </a:rPr>
+              <a:t>Rekurzívne odhaľovanie prázdnych oblastí</a:t>
+            </a:r>
+            <a:endParaRPr lang="en-US" sz="1100" dirty="0"/>
+          </a:p>
+        </p:txBody>
+      </p:sp>
+      <p:sp>
+        <p:nvSpPr>
+          <p:cNvPr id="16" name="Shape 14"/>
+          <p:cNvSpPr/>
+          <p:nvPr/>
+        </p:nvSpPr>
+        <p:spPr>
+          <a:xfrm>
+            <a:off x="661475" y="4447381"/>
+            <a:ext cx="567021" cy="850602"/>
+          </a:xfrm>
+          <a:prstGeom prst="roundRect">
+            <a:avLst>
+              <a:gd name="adj" fmla="val 360022"/>
+            </a:avLst>
+          </a:prstGeom>
+          <a:solidFill>
+            <a:srgbClr val="404040"/>
+          </a:solidFill>
+          <a:ln/>
+        </p:spPr>
+        <p:txBody>
+          <a:bodyPr/>
+          <a:lstStyle/>
+          <a:p>
+            <a:endParaRPr lang="sk-SK"/>
+          </a:p>
+        </p:txBody>
+      </p:sp>
+      <p:sp>
+        <p:nvSpPr>
+          <p:cNvPr id="17" name="Text 15"/>
+          <p:cNvSpPr/>
+          <p:nvPr/>
+        </p:nvSpPr>
+        <p:spPr>
+          <a:xfrm>
+            <a:off x="838675" y="4739779"/>
+            <a:ext cx="212620" cy="265807"/>
+          </a:xfrm>
+          <a:prstGeom prst="rect">
+            <a:avLst/>
+          </a:prstGeom>
+          <a:noFill/>
+          <a:ln/>
+        </p:spPr>
+        <p:txBody>
+          <a:bodyPr wrap="none" lIns="0" tIns="0" rIns="0" bIns="0" rtlCol="0" anchor="ctr"/>
+          <a:lstStyle/>
+          <a:p>
+            <a:pPr marL="0" indent="0" algn="ctr">
+              <a:lnSpc>
+                <a:spcPct val="100000"/>
+              </a:lnSpc>
+              <a:buNone/>
+            </a:pPr>
+            <a:r>
+              <a:rPr lang="en-US" sz="1650" dirty="0">
+                <a:solidFill>
+                  <a:srgbClr val="E5E0DF"/>
+                </a:solidFill>
+                <a:latin typeface="Roboto Mono Medium" pitchFamily="34" charset="0"/>
+                <a:ea typeface="Roboto Mono Medium" pitchFamily="34" charset="-122"/>
+                <a:cs typeface="Roboto Mono Medium" pitchFamily="34" charset="-120"/>
+              </a:rPr>
+              <a:t>4</a:t>
+            </a:r>
+            <a:endParaRPr lang="en-US" sz="1650" dirty="0"/>
+          </a:p>
+        </p:txBody>
+      </p:sp>
+      <p:sp>
+        <p:nvSpPr>
+          <p:cNvPr id="18" name="Text 16"/>
+          <p:cNvSpPr/>
+          <p:nvPr/>
+        </p:nvSpPr>
+        <p:spPr>
+          <a:xfrm>
+            <a:off x="1334756" y="4589066"/>
+            <a:ext cx="2125609" cy="221456"/>
+          </a:xfrm>
+          <a:prstGeom prst="rect">
+            <a:avLst/>
+          </a:prstGeom>
+          <a:noFill/>
+          <a:ln/>
+        </p:spPr>
+        <p:txBody>
+          <a:bodyPr wrap="none" lIns="0" tIns="0" rIns="0" bIns="0" rtlCol="0" anchor="t"/>
+          <a:lstStyle/>
+          <a:p>
+            <a:pPr marL="0" indent="0" algn="l">
+              <a:lnSpc>
+                <a:spcPct val="104000"/>
+              </a:lnSpc>
+              <a:buNone/>
+            </a:pPr>
+            <a:r>
+              <a:rPr lang="en-US" sz="1350" dirty="0">
+                <a:solidFill>
+                  <a:srgbClr val="E5E0DF"/>
+                </a:solidFill>
+                <a:latin typeface="Roboto Mono Medium" pitchFamily="34" charset="0"/>
+                <a:ea typeface="Roboto Mono Medium" pitchFamily="34" charset="-122"/>
+                <a:cs typeface="Roboto Mono Medium" pitchFamily="34" charset="-120"/>
+              </a:rPr>
+              <a:t>Označovanie vlajkami</a:t>
+            </a:r>
+            <a:endParaRPr lang="en-US" sz="1350" dirty="0"/>
+          </a:p>
+        </p:txBody>
+      </p:sp>
+      <p:sp>
+        <p:nvSpPr>
+          <p:cNvPr id="19" name="Text 17"/>
+          <p:cNvSpPr/>
+          <p:nvPr/>
+        </p:nvSpPr>
+        <p:spPr>
+          <a:xfrm>
+            <a:off x="1334756" y="4874220"/>
+            <a:ext cx="10195464" cy="198438"/>
+          </a:xfrm>
+          <a:prstGeom prst="rect">
+            <a:avLst/>
+          </a:prstGeom>
+          <a:noFill/>
+          <a:ln/>
+        </p:spPr>
+        <p:txBody>
+          <a:bodyPr wrap="none" lIns="0" tIns="0" rIns="0" bIns="0" rtlCol="0" anchor="t"/>
+          <a:lstStyle/>
+          <a:p>
+            <a:pPr marL="0" indent="0" algn="l">
+              <a:lnSpc>
+                <a:spcPct val="117000"/>
+              </a:lnSpc>
+              <a:buNone/>
+            </a:pPr>
+            <a:r>
+              <a:rPr lang="en-US" sz="1100" dirty="0">
+                <a:solidFill>
+                  <a:srgbClr val="E5E0DF"/>
+                </a:solidFill>
+                <a:latin typeface="Roboto" pitchFamily="34" charset="0"/>
+                <a:ea typeface="Roboto" pitchFamily="34" charset="-122"/>
+                <a:cs typeface="Roboto" pitchFamily="34" charset="-120"/>
+              </a:rPr>
+              <a:t>Pravý klik pre označenie míny</a:t>
+            </a:r>
+            <a:endParaRPr lang="en-US" sz="1100" dirty="0"/>
+          </a:p>
+        </p:txBody>
+      </p:sp>
+      <p:sp>
+        <p:nvSpPr>
+          <p:cNvPr id="20" name="Shape 18"/>
+          <p:cNvSpPr/>
+          <p:nvPr/>
+        </p:nvSpPr>
+        <p:spPr>
+          <a:xfrm>
+            <a:off x="661475" y="5404247"/>
+            <a:ext cx="567021" cy="850602"/>
+          </a:xfrm>
+          <a:prstGeom prst="roundRect">
+            <a:avLst>
+              <a:gd name="adj" fmla="val 360022"/>
+            </a:avLst>
+          </a:prstGeom>
+          <a:solidFill>
+            <a:srgbClr val="404040"/>
+          </a:solidFill>
+          <a:ln/>
+        </p:spPr>
+        <p:txBody>
+          <a:bodyPr/>
+          <a:lstStyle/>
+          <a:p>
+            <a:endParaRPr lang="sk-SK"/>
+          </a:p>
+        </p:txBody>
+      </p:sp>
+      <p:sp>
+        <p:nvSpPr>
+          <p:cNvPr id="21" name="Text 19"/>
+          <p:cNvSpPr/>
+          <p:nvPr/>
+        </p:nvSpPr>
+        <p:spPr>
+          <a:xfrm>
+            <a:off x="838675" y="5696645"/>
+            <a:ext cx="212620" cy="265807"/>
+          </a:xfrm>
+          <a:prstGeom prst="rect">
+            <a:avLst/>
+          </a:prstGeom>
+          <a:noFill/>
+          <a:ln/>
+        </p:spPr>
+        <p:txBody>
+          <a:bodyPr wrap="none" lIns="0" tIns="0" rIns="0" bIns="0" rtlCol="0" anchor="ctr"/>
+          <a:lstStyle/>
+          <a:p>
+            <a:pPr marL="0" indent="0" algn="ctr">
+              <a:lnSpc>
+                <a:spcPct val="100000"/>
+              </a:lnSpc>
+              <a:buNone/>
+            </a:pPr>
+            <a:r>
+              <a:rPr lang="en-US" sz="1650" dirty="0">
+                <a:solidFill>
+                  <a:srgbClr val="E5E0DF"/>
+                </a:solidFill>
+                <a:latin typeface="Roboto Mono Medium" pitchFamily="34" charset="0"/>
+                <a:ea typeface="Roboto Mono Medium" pitchFamily="34" charset="-122"/>
+                <a:cs typeface="Roboto Mono Medium" pitchFamily="34" charset="-120"/>
+              </a:rPr>
+              <a:t>5</a:t>
+            </a:r>
+            <a:endParaRPr lang="en-US" sz="1650" dirty="0"/>
+          </a:p>
+        </p:txBody>
+      </p:sp>
+      <p:sp>
+        <p:nvSpPr>
+          <p:cNvPr id="22" name="Text 20"/>
+          <p:cNvSpPr/>
+          <p:nvPr/>
+        </p:nvSpPr>
+        <p:spPr>
+          <a:xfrm>
+            <a:off x="1334756" y="5545931"/>
+            <a:ext cx="2444490" cy="221456"/>
+          </a:xfrm>
+          <a:prstGeom prst="rect">
+            <a:avLst/>
+          </a:prstGeom>
+          <a:noFill/>
+          <a:ln/>
+        </p:spPr>
+        <p:txBody>
+          <a:bodyPr wrap="none" lIns="0" tIns="0" rIns="0" bIns="0" rtlCol="0" anchor="t"/>
+          <a:lstStyle/>
+          <a:p>
+            <a:pPr marL="0" indent="0" algn="l">
+              <a:lnSpc>
+                <a:spcPct val="104000"/>
+              </a:lnSpc>
+              <a:buNone/>
+            </a:pPr>
+            <a:r>
+              <a:rPr lang="en-US" sz="1350" dirty="0">
+                <a:solidFill>
+                  <a:srgbClr val="E5E0DF"/>
+                </a:solidFill>
+                <a:latin typeface="Roboto Mono Medium" pitchFamily="34" charset="0"/>
+                <a:ea typeface="Roboto Mono Medium" pitchFamily="34" charset="-122"/>
+                <a:cs typeface="Roboto Mono Medium" pitchFamily="34" charset="-120"/>
+              </a:rPr>
+              <a:t>Kontrola výhry / prehry</a:t>
+            </a:r>
+            <a:endParaRPr lang="en-US" sz="1350" dirty="0"/>
+          </a:p>
+        </p:txBody>
+      </p:sp>
+      <p:sp>
+        <p:nvSpPr>
+          <p:cNvPr id="23" name="Text 21"/>
+          <p:cNvSpPr/>
+          <p:nvPr/>
+        </p:nvSpPr>
+        <p:spPr>
+          <a:xfrm>
+            <a:off x="1334756" y="5831086"/>
+            <a:ext cx="10195464" cy="198438"/>
+          </a:xfrm>
+          <a:prstGeom prst="rect">
+            <a:avLst/>
+          </a:prstGeom>
+          <a:noFill/>
+          <a:ln/>
+        </p:spPr>
+        <p:txBody>
+          <a:bodyPr wrap="none" lIns="0" tIns="0" rIns="0" bIns="0" rtlCol="0" anchor="t"/>
+          <a:lstStyle/>
+          <a:p>
+            <a:pPr marL="0" indent="0" algn="l">
+              <a:lnSpc>
+                <a:spcPct val="117000"/>
+              </a:lnSpc>
+              <a:buNone/>
+            </a:pPr>
+            <a:r>
+              <a:rPr lang="en-US" sz="1100" dirty="0">
+                <a:solidFill>
+                  <a:srgbClr val="E5E0DF"/>
+                </a:solidFill>
+                <a:latin typeface="Roboto" pitchFamily="34" charset="0"/>
+                <a:ea typeface="Roboto" pitchFamily="34" charset="-122"/>
+                <a:cs typeface="Roboto" pitchFamily="34" charset="-120"/>
+              </a:rPr>
+              <a:t>Detekcia konca hry a vyhodnotenie</a:t>
+            </a:r>
+            <a:endParaRPr lang="en-US" sz="1100" dirty="0"/>
+          </a:p>
+        </p:txBody>
+      </p:sp>
       <p:pic>
         <p:nvPicPr>
-          <p:cNvPr id="2" name="Image 0" descr="preencoded.png"/>
+          <p:cNvPr id="24" name="Obrázok 23">
+            <a:extLst>
+              <a:ext uri="{FF2B5EF4-FFF2-40B4-BE49-F238E27FC236}">
+                <a16:creationId xmlns:a16="http://schemas.microsoft.com/office/drawing/2014/main" id="{3820DF7E-60A5-AAF7-F8A3-4C863DDD5CC4}"/>
+              </a:ext>
+            </a:extLst>
+          </p:cNvPr>
           <p:cNvPicPr>
             <a:picLocks noChangeAspect="1"/>
           </p:cNvPicPr>
@@ -3589,762 +4834,20 @@
         </p:blipFill>
         <p:spPr>
           <a:xfrm>
-            <a:off x="0" y="0"/>
-            <a:ext cx="14630400" cy="2276594"/>
+            <a:off x="11048475" y="6512742"/>
+            <a:ext cx="1143526" cy="279799"/>
           </a:xfrm>
           <a:prstGeom prst="rect">
             <a:avLst/>
           </a:prstGeom>
         </p:spPr>
       </p:pic>
-      <p:sp>
-        <p:nvSpPr>
-          <p:cNvPr id="3" name="Text 0"/>
-          <p:cNvSpPr/>
-          <p:nvPr/>
-        </p:nvSpPr>
-        <p:spPr>
-          <a:xfrm>
-            <a:off x="1031438" y="3201829"/>
-            <a:ext cx="4781074" cy="597694"/>
-          </a:xfrm>
-          <a:prstGeom prst="rect">
-            <a:avLst/>
-          </a:prstGeom>
-          <a:noFill/>
-          <a:ln/>
-        </p:spPr>
-        <p:txBody>
-          <a:bodyPr wrap="none" lIns="0" tIns="0" rIns="0" bIns="0" rtlCol="0" anchor="t"/>
-          <a:lstStyle/>
-          <a:p>
-            <a:pPr marL="0" indent="0" algn="l">
-              <a:lnSpc>
-                <a:spcPts val="4700"/>
-              </a:lnSpc>
-              <a:buNone/>
-            </a:pPr>
-            <a:r>
-              <a:rPr lang="en-US" sz="3750" dirty="0">
-                <a:solidFill>
-                  <a:srgbClr val="020202"/>
-                </a:solidFill>
-                <a:latin typeface="PT Serif" pitchFamily="34" charset="0"/>
-                <a:ea typeface="PT Serif" pitchFamily="34" charset="-122"/>
-                <a:cs typeface="PT Serif" pitchFamily="34" charset="-120"/>
-              </a:rPr>
-              <a:t>Ovládanie hry</a:t>
-            </a:r>
-            <a:endParaRPr lang="en-US" sz="3750" dirty="0"/>
-          </a:p>
-        </p:txBody>
-      </p:sp>
-      <p:sp>
-        <p:nvSpPr>
-          <p:cNvPr id="4" name="Shape 1"/>
-          <p:cNvSpPr/>
-          <p:nvPr/>
-        </p:nvSpPr>
-        <p:spPr>
-          <a:xfrm>
-            <a:off x="1031438" y="4018836"/>
-            <a:ext cx="6210538" cy="1569601"/>
-          </a:xfrm>
-          <a:prstGeom prst="roundRect">
-            <a:avLst>
-              <a:gd name="adj" fmla="val 1741"/>
-            </a:avLst>
-          </a:prstGeom>
-          <a:solidFill>
-            <a:srgbClr val="FFFFFF"/>
-          </a:solidFill>
-          <a:ln w="22860">
-            <a:solidFill>
-              <a:srgbClr val="D8D4D4"/>
-            </a:solidFill>
-            <a:prstDash val="solid"/>
-          </a:ln>
-        </p:spPr>
-        <p:txBody>
-          <a:bodyPr/>
-          <a:lstStyle/>
-          <a:p>
-            <a:endParaRPr lang="sk-SK"/>
-          </a:p>
-        </p:txBody>
-      </p:sp>
-      <p:sp>
-        <p:nvSpPr>
-          <p:cNvPr id="5" name="Shape 2"/>
-          <p:cNvSpPr/>
-          <p:nvPr/>
-        </p:nvSpPr>
-        <p:spPr>
-          <a:xfrm>
-            <a:off x="1054298" y="4041696"/>
-            <a:ext cx="6164818" cy="546378"/>
-          </a:xfrm>
-          <a:prstGeom prst="rect">
-            <a:avLst/>
-          </a:prstGeom>
-          <a:solidFill>
-            <a:srgbClr val="F2EEEE"/>
-          </a:solidFill>
-          <a:ln/>
-        </p:spPr>
-        <p:txBody>
-          <a:bodyPr/>
-          <a:lstStyle/>
-          <a:p>
-            <a:endParaRPr lang="sk-SK"/>
-          </a:p>
-        </p:txBody>
-      </p:sp>
       <p:pic>
         <p:nvPicPr>
-          <p:cNvPr id="6" name="Image 1" descr="preencoded.png"/>
-          <p:cNvPicPr>
-            <a:picLocks noChangeAspect="1"/>
-          </p:cNvPicPr>
-          <p:nvPr/>
-        </p:nvPicPr>
-        <p:blipFill>
-          <a:blip r:embed="rId4">
-            <a:extLst>
-              <a:ext uri="{96DAC541-7B7A-43D3-8B79-37D633B846F1}">
-                <asvg:svgBlip xmlns:asvg="http://schemas.microsoft.com/office/drawing/2016/SVG/main" r:embed="rId5"/>
-              </a:ext>
-            </a:extLst>
-          </a:blip>
-          <a:stretch>
-            <a:fillRect/>
-          </a:stretch>
-        </p:blipFill>
-        <p:spPr>
-          <a:xfrm>
-            <a:off x="4000143" y="4178260"/>
-            <a:ext cx="273129" cy="273129"/>
-          </a:xfrm>
-          <a:prstGeom prst="rect">
-            <a:avLst/>
-          </a:prstGeom>
-        </p:spPr>
-      </p:pic>
-      <p:sp>
-        <p:nvSpPr>
-          <p:cNvPr id="7" name="Text 3"/>
-          <p:cNvSpPr/>
-          <p:nvPr/>
-        </p:nvSpPr>
-        <p:spPr>
-          <a:xfrm>
-            <a:off x="1236345" y="4734282"/>
-            <a:ext cx="2390537" cy="298847"/>
-          </a:xfrm>
-          <a:prstGeom prst="rect">
-            <a:avLst/>
-          </a:prstGeom>
-          <a:noFill/>
-          <a:ln/>
-        </p:spPr>
-        <p:txBody>
-          <a:bodyPr wrap="none" lIns="0" tIns="0" rIns="0" bIns="0" rtlCol="0" anchor="t"/>
-          <a:lstStyle/>
-          <a:p>
-            <a:pPr marL="0" indent="0" algn="l">
-              <a:lnSpc>
-                <a:spcPts val="2350"/>
-              </a:lnSpc>
-              <a:buNone/>
-            </a:pPr>
-            <a:r>
-              <a:rPr lang="en-US" sz="1850" dirty="0">
-                <a:solidFill>
-                  <a:srgbClr val="383838"/>
-                </a:solidFill>
-                <a:latin typeface="PT Serif" pitchFamily="34" charset="0"/>
-                <a:ea typeface="PT Serif" pitchFamily="34" charset="-122"/>
-                <a:cs typeface="PT Serif" pitchFamily="34" charset="-120"/>
-              </a:rPr>
-              <a:t>Ľavé tlačidlo</a:t>
-            </a:r>
-            <a:endParaRPr lang="en-US" sz="1850" dirty="0"/>
-          </a:p>
-        </p:txBody>
-      </p:sp>
-      <p:sp>
-        <p:nvSpPr>
-          <p:cNvPr id="8" name="Text 4"/>
-          <p:cNvSpPr/>
-          <p:nvPr/>
-        </p:nvSpPr>
-        <p:spPr>
-          <a:xfrm>
-            <a:off x="1236345" y="5120878"/>
-            <a:ext cx="5800725" cy="262652"/>
-          </a:xfrm>
-          <a:prstGeom prst="rect">
-            <a:avLst/>
-          </a:prstGeom>
-          <a:noFill/>
-          <a:ln/>
-        </p:spPr>
-        <p:txBody>
-          <a:bodyPr wrap="none" lIns="0" tIns="0" rIns="0" bIns="0" rtlCol="0" anchor="t"/>
-          <a:lstStyle/>
-          <a:p>
-            <a:pPr marL="0" indent="0" algn="l">
-              <a:lnSpc>
-                <a:spcPts val="2050"/>
-              </a:lnSpc>
-              <a:buNone/>
-            </a:pPr>
-            <a:r>
-              <a:rPr lang="en-US" sz="1400" dirty="0">
-                <a:solidFill>
-                  <a:srgbClr val="383838"/>
-                </a:solidFill>
-                <a:latin typeface="DM Sans" pitchFamily="34" charset="0"/>
-                <a:ea typeface="DM Sans" pitchFamily="34" charset="-122"/>
-                <a:cs typeface="DM Sans" pitchFamily="34" charset="-120"/>
-              </a:rPr>
-              <a:t>Odkrytie vybraného políčka a zobrazenie čísla alebo míny</a:t>
-            </a:r>
-            <a:endParaRPr lang="en-US" sz="1400" dirty="0"/>
-          </a:p>
-        </p:txBody>
-      </p:sp>
-      <p:sp>
-        <p:nvSpPr>
-          <p:cNvPr id="9" name="Shape 5"/>
-          <p:cNvSpPr/>
-          <p:nvPr/>
-        </p:nvSpPr>
-        <p:spPr>
-          <a:xfrm>
-            <a:off x="7388185" y="4018836"/>
-            <a:ext cx="6210657" cy="1569601"/>
-          </a:xfrm>
-          <a:prstGeom prst="roundRect">
-            <a:avLst>
-              <a:gd name="adj" fmla="val 1741"/>
-            </a:avLst>
-          </a:prstGeom>
-          <a:solidFill>
-            <a:srgbClr val="FFFFFF"/>
-          </a:solidFill>
-          <a:ln w="22860">
-            <a:solidFill>
-              <a:srgbClr val="D8D4D4"/>
-            </a:solidFill>
-            <a:prstDash val="solid"/>
-          </a:ln>
-        </p:spPr>
-        <p:txBody>
-          <a:bodyPr/>
-          <a:lstStyle/>
-          <a:p>
-            <a:endParaRPr lang="sk-SK"/>
-          </a:p>
-        </p:txBody>
-      </p:sp>
-      <p:sp>
-        <p:nvSpPr>
-          <p:cNvPr id="10" name="Shape 6"/>
-          <p:cNvSpPr/>
-          <p:nvPr/>
-        </p:nvSpPr>
-        <p:spPr>
-          <a:xfrm>
-            <a:off x="7411045" y="4041696"/>
-            <a:ext cx="6164937" cy="546378"/>
-          </a:xfrm>
-          <a:prstGeom prst="rect">
-            <a:avLst/>
-          </a:prstGeom>
-          <a:solidFill>
-            <a:srgbClr val="F2EEEE"/>
-          </a:solidFill>
-          <a:ln/>
-        </p:spPr>
-        <p:txBody>
-          <a:bodyPr/>
-          <a:lstStyle/>
-          <a:p>
-            <a:endParaRPr lang="sk-SK"/>
-          </a:p>
-        </p:txBody>
-      </p:sp>
-      <p:pic>
-        <p:nvPicPr>
-          <p:cNvPr id="11" name="Image 2" descr="preencoded.png"/>
-          <p:cNvPicPr>
-            <a:picLocks noChangeAspect="1"/>
-          </p:cNvPicPr>
-          <p:nvPr/>
-        </p:nvPicPr>
-        <p:blipFill>
-          <a:blip r:embed="rId6">
-            <a:extLst>
-              <a:ext uri="{96DAC541-7B7A-43D3-8B79-37D633B846F1}">
-                <asvg:svgBlip xmlns:asvg="http://schemas.microsoft.com/office/drawing/2016/SVG/main" r:embed="rId7"/>
-              </a:ext>
-            </a:extLst>
-          </a:blip>
-          <a:stretch>
-            <a:fillRect/>
-          </a:stretch>
-        </p:blipFill>
-        <p:spPr>
-          <a:xfrm>
-            <a:off x="10356890" y="4178260"/>
-            <a:ext cx="273129" cy="273129"/>
-          </a:xfrm>
-          <a:prstGeom prst="rect">
-            <a:avLst/>
-          </a:prstGeom>
-        </p:spPr>
-      </p:pic>
-      <p:sp>
-        <p:nvSpPr>
-          <p:cNvPr id="12" name="Text 7"/>
-          <p:cNvSpPr/>
-          <p:nvPr/>
-        </p:nvSpPr>
-        <p:spPr>
-          <a:xfrm>
-            <a:off x="7593092" y="4734282"/>
-            <a:ext cx="2390537" cy="298847"/>
-          </a:xfrm>
-          <a:prstGeom prst="rect">
-            <a:avLst/>
-          </a:prstGeom>
-          <a:noFill/>
-          <a:ln/>
-        </p:spPr>
-        <p:txBody>
-          <a:bodyPr wrap="none" lIns="0" tIns="0" rIns="0" bIns="0" rtlCol="0" anchor="t"/>
-          <a:lstStyle/>
-          <a:p>
-            <a:pPr marL="0" indent="0" algn="l">
-              <a:lnSpc>
-                <a:spcPts val="2350"/>
-              </a:lnSpc>
-              <a:buNone/>
-            </a:pPr>
-            <a:r>
-              <a:rPr lang="en-US" sz="1850" dirty="0">
-                <a:solidFill>
-                  <a:srgbClr val="383838"/>
-                </a:solidFill>
-                <a:latin typeface="PT Serif" pitchFamily="34" charset="0"/>
-                <a:ea typeface="PT Serif" pitchFamily="34" charset="-122"/>
-                <a:cs typeface="PT Serif" pitchFamily="34" charset="-120"/>
-              </a:rPr>
-              <a:t>Pravé tlačidlo</a:t>
-            </a:r>
-            <a:endParaRPr lang="en-US" sz="1850" dirty="0"/>
-          </a:p>
-        </p:txBody>
-      </p:sp>
-      <p:sp>
-        <p:nvSpPr>
-          <p:cNvPr id="13" name="Text 8"/>
-          <p:cNvSpPr/>
-          <p:nvPr/>
-        </p:nvSpPr>
-        <p:spPr>
-          <a:xfrm>
-            <a:off x="7593092" y="5120878"/>
-            <a:ext cx="5800844" cy="262652"/>
-          </a:xfrm>
-          <a:prstGeom prst="rect">
-            <a:avLst/>
-          </a:prstGeom>
-          <a:noFill/>
-          <a:ln/>
-        </p:spPr>
-        <p:txBody>
-          <a:bodyPr wrap="none" lIns="0" tIns="0" rIns="0" bIns="0" rtlCol="0" anchor="t"/>
-          <a:lstStyle/>
-          <a:p>
-            <a:pPr marL="0" indent="0" algn="l">
-              <a:lnSpc>
-                <a:spcPts val="2050"/>
-              </a:lnSpc>
-              <a:buNone/>
-            </a:pPr>
-            <a:r>
-              <a:rPr lang="en-US" sz="1400" dirty="0">
-                <a:solidFill>
-                  <a:srgbClr val="383838"/>
-                </a:solidFill>
-                <a:latin typeface="DM Sans" pitchFamily="34" charset="0"/>
-                <a:ea typeface="DM Sans" pitchFamily="34" charset="-122"/>
-                <a:cs typeface="DM Sans" pitchFamily="34" charset="-120"/>
-              </a:rPr>
-              <a:t>Označenie políčka vlajkou – užitočné pre označenie mín</a:t>
-            </a:r>
-            <a:endParaRPr lang="en-US" sz="1400" dirty="0"/>
-          </a:p>
-        </p:txBody>
-      </p:sp>
-      <p:sp>
-        <p:nvSpPr>
-          <p:cNvPr id="14" name="Shape 9"/>
-          <p:cNvSpPr/>
-          <p:nvPr/>
-        </p:nvSpPr>
-        <p:spPr>
-          <a:xfrm>
-            <a:off x="1031438" y="5734645"/>
-            <a:ext cx="6210538" cy="1569601"/>
-          </a:xfrm>
-          <a:prstGeom prst="roundRect">
-            <a:avLst>
-              <a:gd name="adj" fmla="val 1741"/>
-            </a:avLst>
-          </a:prstGeom>
-          <a:solidFill>
-            <a:srgbClr val="FFFFFF"/>
-          </a:solidFill>
-          <a:ln w="22860">
-            <a:solidFill>
-              <a:srgbClr val="D8D4D4"/>
-            </a:solidFill>
-            <a:prstDash val="solid"/>
-          </a:ln>
-        </p:spPr>
-        <p:txBody>
-          <a:bodyPr/>
-          <a:lstStyle/>
-          <a:p>
-            <a:endParaRPr lang="sk-SK"/>
-          </a:p>
-        </p:txBody>
-      </p:sp>
-      <p:sp>
-        <p:nvSpPr>
-          <p:cNvPr id="15" name="Shape 10"/>
-          <p:cNvSpPr/>
-          <p:nvPr/>
-        </p:nvSpPr>
-        <p:spPr>
-          <a:xfrm>
-            <a:off x="1054298" y="5757505"/>
-            <a:ext cx="6164818" cy="546378"/>
-          </a:xfrm>
-          <a:prstGeom prst="rect">
-            <a:avLst/>
-          </a:prstGeom>
-          <a:solidFill>
-            <a:srgbClr val="F2EEEE"/>
-          </a:solidFill>
-          <a:ln/>
-        </p:spPr>
-        <p:txBody>
-          <a:bodyPr/>
-          <a:lstStyle/>
-          <a:p>
-            <a:endParaRPr lang="sk-SK"/>
-          </a:p>
-        </p:txBody>
-      </p:sp>
-      <p:pic>
-        <p:nvPicPr>
-          <p:cNvPr id="16" name="Image 3" descr="preencoded.png"/>
-          <p:cNvPicPr>
-            <a:picLocks noChangeAspect="1"/>
-          </p:cNvPicPr>
-          <p:nvPr/>
-        </p:nvPicPr>
-        <p:blipFill>
-          <a:blip r:embed="rId8">
-            <a:extLst>
-              <a:ext uri="{96DAC541-7B7A-43D3-8B79-37D633B846F1}">
-                <asvg:svgBlip xmlns:asvg="http://schemas.microsoft.com/office/drawing/2016/SVG/main" r:embed="rId9"/>
-              </a:ext>
-            </a:extLst>
-          </a:blip>
-          <a:stretch>
-            <a:fillRect/>
-          </a:stretch>
-        </p:blipFill>
-        <p:spPr>
-          <a:xfrm>
-            <a:off x="4000143" y="5894070"/>
-            <a:ext cx="273129" cy="273129"/>
-          </a:xfrm>
-          <a:prstGeom prst="rect">
-            <a:avLst/>
-          </a:prstGeom>
-        </p:spPr>
-      </p:pic>
-      <p:sp>
-        <p:nvSpPr>
-          <p:cNvPr id="17" name="Text 11"/>
-          <p:cNvSpPr/>
-          <p:nvPr/>
-        </p:nvSpPr>
-        <p:spPr>
-          <a:xfrm>
-            <a:off x="1236345" y="6450092"/>
-            <a:ext cx="2456497" cy="298847"/>
-          </a:xfrm>
-          <a:prstGeom prst="rect">
-            <a:avLst/>
-          </a:prstGeom>
-          <a:noFill/>
-          <a:ln/>
-        </p:spPr>
-        <p:txBody>
-          <a:bodyPr wrap="none" lIns="0" tIns="0" rIns="0" bIns="0" rtlCol="0" anchor="t"/>
-          <a:lstStyle/>
-          <a:p>
-            <a:pPr marL="0" indent="0" algn="l">
-              <a:lnSpc>
-                <a:spcPts val="2350"/>
-              </a:lnSpc>
-              <a:buNone/>
-            </a:pPr>
-            <a:r>
-              <a:rPr lang="en-US" sz="1850" dirty="0">
-                <a:solidFill>
-                  <a:srgbClr val="383838"/>
-                </a:solidFill>
-                <a:latin typeface="PT Serif" pitchFamily="34" charset="0"/>
-                <a:ea typeface="PT Serif" pitchFamily="34" charset="-122"/>
-                <a:cs typeface="PT Serif" pitchFamily="34" charset="-120"/>
-              </a:rPr>
-              <a:t>Stredné / kombinované</a:t>
-            </a:r>
-            <a:endParaRPr lang="en-US" sz="1850" dirty="0"/>
-          </a:p>
-        </p:txBody>
-      </p:sp>
-      <p:sp>
-        <p:nvSpPr>
-          <p:cNvPr id="18" name="Text 12"/>
-          <p:cNvSpPr/>
-          <p:nvPr/>
-        </p:nvSpPr>
-        <p:spPr>
-          <a:xfrm>
-            <a:off x="1236345" y="6836688"/>
-            <a:ext cx="5800725" cy="262652"/>
-          </a:xfrm>
-          <a:prstGeom prst="rect">
-            <a:avLst/>
-          </a:prstGeom>
-          <a:noFill/>
-          <a:ln/>
-        </p:spPr>
-        <p:txBody>
-          <a:bodyPr wrap="none" lIns="0" tIns="0" rIns="0" bIns="0" rtlCol="0" anchor="t"/>
-          <a:lstStyle/>
-          <a:p>
-            <a:pPr marL="0" indent="0" algn="l">
-              <a:lnSpc>
-                <a:spcPts val="2050"/>
-              </a:lnSpc>
-              <a:buNone/>
-            </a:pPr>
-            <a:r>
-              <a:rPr lang="en-US" sz="1400" dirty="0">
-                <a:solidFill>
-                  <a:srgbClr val="383838"/>
-                </a:solidFill>
-                <a:latin typeface="DM Sans" pitchFamily="34" charset="0"/>
-                <a:ea typeface="DM Sans" pitchFamily="34" charset="-122"/>
-                <a:cs typeface="DM Sans" pitchFamily="34" charset="-120"/>
-              </a:rPr>
-              <a:t>Rýchle odkrytie – ak označíte všetky mín okolo, odkryje sa ostatné</a:t>
-            </a:r>
-            <a:endParaRPr lang="en-US" sz="1400" dirty="0"/>
-          </a:p>
-        </p:txBody>
-      </p:sp>
-      <p:sp>
-        <p:nvSpPr>
-          <p:cNvPr id="19" name="Shape 13"/>
-          <p:cNvSpPr/>
-          <p:nvPr/>
-        </p:nvSpPr>
-        <p:spPr>
-          <a:xfrm>
-            <a:off x="7388185" y="5734645"/>
-            <a:ext cx="6210657" cy="1569601"/>
-          </a:xfrm>
-          <a:prstGeom prst="roundRect">
-            <a:avLst>
-              <a:gd name="adj" fmla="val 1741"/>
-            </a:avLst>
-          </a:prstGeom>
-          <a:solidFill>
-            <a:srgbClr val="FFFFFF"/>
-          </a:solidFill>
-          <a:ln w="22860">
-            <a:solidFill>
-              <a:srgbClr val="D8D4D4"/>
-            </a:solidFill>
-            <a:prstDash val="solid"/>
-          </a:ln>
-        </p:spPr>
-        <p:txBody>
-          <a:bodyPr/>
-          <a:lstStyle/>
-          <a:p>
-            <a:endParaRPr lang="sk-SK"/>
-          </a:p>
-        </p:txBody>
-      </p:sp>
-      <p:sp>
-        <p:nvSpPr>
-          <p:cNvPr id="20" name="Shape 14"/>
-          <p:cNvSpPr/>
-          <p:nvPr/>
-        </p:nvSpPr>
-        <p:spPr>
-          <a:xfrm>
-            <a:off x="7411045" y="5757505"/>
-            <a:ext cx="6164937" cy="546378"/>
-          </a:xfrm>
-          <a:prstGeom prst="rect">
-            <a:avLst/>
-          </a:prstGeom>
-          <a:solidFill>
-            <a:srgbClr val="F2EEEE"/>
-          </a:solidFill>
-          <a:ln/>
-        </p:spPr>
-        <p:txBody>
-          <a:bodyPr/>
-          <a:lstStyle/>
-          <a:p>
-            <a:endParaRPr lang="sk-SK"/>
-          </a:p>
-        </p:txBody>
-      </p:sp>
-      <p:pic>
-        <p:nvPicPr>
-          <p:cNvPr id="21" name="Image 4" descr="preencoded.png"/>
-          <p:cNvPicPr>
-            <a:picLocks noChangeAspect="1"/>
-          </p:cNvPicPr>
-          <p:nvPr/>
-        </p:nvPicPr>
-        <p:blipFill>
-          <a:blip r:embed="rId10">
-            <a:extLst>
-              <a:ext uri="{96DAC541-7B7A-43D3-8B79-37D633B846F1}">
-                <asvg:svgBlip xmlns:asvg="http://schemas.microsoft.com/office/drawing/2016/SVG/main" r:embed="rId11"/>
-              </a:ext>
-            </a:extLst>
-          </a:blip>
-          <a:stretch>
-            <a:fillRect/>
-          </a:stretch>
-        </p:blipFill>
-        <p:spPr>
-          <a:xfrm>
-            <a:off x="10356890" y="5894070"/>
-            <a:ext cx="273129" cy="273129"/>
-          </a:xfrm>
-          <a:prstGeom prst="rect">
-            <a:avLst/>
-          </a:prstGeom>
-        </p:spPr>
-      </p:pic>
-      <p:sp>
-        <p:nvSpPr>
-          <p:cNvPr id="22" name="Text 15"/>
-          <p:cNvSpPr/>
-          <p:nvPr/>
-        </p:nvSpPr>
-        <p:spPr>
-          <a:xfrm>
-            <a:off x="7593092" y="6450092"/>
-            <a:ext cx="2390537" cy="298847"/>
-          </a:xfrm>
-          <a:prstGeom prst="rect">
-            <a:avLst/>
-          </a:prstGeom>
-          <a:noFill/>
-          <a:ln/>
-        </p:spPr>
-        <p:txBody>
-          <a:bodyPr wrap="none" lIns="0" tIns="0" rIns="0" bIns="0" rtlCol="0" anchor="t"/>
-          <a:lstStyle/>
-          <a:p>
-            <a:pPr marL="0" indent="0" algn="l">
-              <a:lnSpc>
-                <a:spcPts val="2350"/>
-              </a:lnSpc>
-              <a:buNone/>
-            </a:pPr>
-            <a:r>
-              <a:rPr lang="en-US" sz="1850" dirty="0">
-                <a:solidFill>
-                  <a:srgbClr val="383838"/>
-                </a:solidFill>
-                <a:latin typeface="PT Serif" pitchFamily="34" charset="0"/>
-                <a:ea typeface="PT Serif" pitchFamily="34" charset="-122"/>
-                <a:cs typeface="PT Serif" pitchFamily="34" charset="-120"/>
-              </a:rPr>
-              <a:t>F2 / ESC / Smajlík</a:t>
-            </a:r>
-            <a:endParaRPr lang="en-US" sz="1850" dirty="0"/>
-          </a:p>
-        </p:txBody>
-      </p:sp>
-      <p:sp>
-        <p:nvSpPr>
-          <p:cNvPr id="23" name="Text 16"/>
-          <p:cNvSpPr/>
-          <p:nvPr/>
-        </p:nvSpPr>
-        <p:spPr>
-          <a:xfrm>
-            <a:off x="7593092" y="6836688"/>
-            <a:ext cx="5800844" cy="262652"/>
-          </a:xfrm>
-          <a:prstGeom prst="rect">
-            <a:avLst/>
-          </a:prstGeom>
-          <a:noFill/>
-          <a:ln/>
-        </p:spPr>
-        <p:txBody>
-          <a:bodyPr wrap="none" lIns="0" tIns="0" rIns="0" bIns="0" rtlCol="0" anchor="t"/>
-          <a:lstStyle/>
-          <a:p>
-            <a:pPr marL="0" indent="0" algn="l">
-              <a:lnSpc>
-                <a:spcPts val="2050"/>
-              </a:lnSpc>
-              <a:buNone/>
-            </a:pPr>
-            <a:r>
-              <a:rPr lang="en-US" sz="1400" dirty="0">
-                <a:solidFill>
-                  <a:srgbClr val="383838"/>
-                </a:solidFill>
-                <a:latin typeface="DM Sans" pitchFamily="34" charset="0"/>
-                <a:ea typeface="DM Sans" pitchFamily="34" charset="-122"/>
-                <a:cs typeface="DM Sans" pitchFamily="34" charset="-120"/>
-              </a:rPr>
-              <a:t>Spustenie novej hry v ľubovoľnom okamihu</a:t>
-            </a:r>
-            <a:endParaRPr lang="en-US" sz="1400" dirty="0"/>
-          </a:p>
-        </p:txBody>
-      </p:sp>
-      <p:pic>
-        <p:nvPicPr>
-          <p:cNvPr id="24" name="Obrázok 23">
+          <p:cNvPr id="26" name="Obrázok 25">
             <a:extLst>
               <a:ext uri="{FF2B5EF4-FFF2-40B4-BE49-F238E27FC236}">
-                <a16:creationId xmlns:a16="http://schemas.microsoft.com/office/drawing/2014/main" id="{5585CC76-F727-0DDC-C459-473095AB202D}"/>
+                <a16:creationId xmlns:a16="http://schemas.microsoft.com/office/drawing/2014/main" id="{C0D61C8A-CA21-AC35-32E0-9898B2AB7F2C}"/>
               </a:ext>
             </a:extLst>
           </p:cNvPr>
@@ -4354,15 +4857,15 @@
           <p:nvPr/>
         </p:nvPicPr>
         <p:blipFill>
-          <a:blip r:embed="rId12"/>
+          <a:blip r:embed="rId4"/>
           <a:stretch>
             <a:fillRect/>
           </a:stretch>
         </p:blipFill>
         <p:spPr>
           <a:xfrm>
-            <a:off x="12857356" y="7728464"/>
-            <a:ext cx="1703256" cy="400106"/>
+            <a:off x="5184187" y="1161643"/>
+            <a:ext cx="6169138" cy="4941113"/>
           </a:xfrm>
           <a:prstGeom prst="rect">
             <a:avLst/>
@@ -4402,8 +4905,8 @@
         </p:nvSpPr>
         <p:spPr>
           <a:xfrm>
-            <a:off x="823913" y="683181"/>
-            <a:ext cx="4938951" cy="617339"/>
+            <a:off x="661475" y="734715"/>
+            <a:ext cx="5203000" cy="531614"/>
           </a:xfrm>
           <a:prstGeom prst="rect">
             <a:avLst/>
@@ -4417,43 +4920,115 @@
           <a:p>
             <a:pPr marL="0" indent="0" algn="l">
               <a:lnSpc>
-                <a:spcPts val="4850"/>
+                <a:spcPct val="104000"/>
               </a:lnSpc>
               <a:buNone/>
             </a:pPr>
             <a:r>
-              <a:rPr lang="en-US" sz="3850" dirty="0">
-                <a:solidFill>
-                  <a:srgbClr val="020202"/>
-                </a:solidFill>
-                <a:latin typeface="PT Serif" pitchFamily="34" charset="0"/>
-                <a:ea typeface="PT Serif" pitchFamily="34" charset="-122"/>
-                <a:cs typeface="PT Serif" pitchFamily="34" charset="-120"/>
-              </a:rPr>
-              <a:t>Štruktúra projektu</a:t>
-            </a:r>
-            <a:endParaRPr lang="en-US" sz="3850" dirty="0"/>
+              <a:rPr lang="en-US" sz="3300" dirty="0">
+                <a:solidFill>
+                  <a:srgbClr val="FFFFFF"/>
+                </a:solidFill>
+                <a:latin typeface="Roboto Mono Medium" pitchFamily="34" charset="0"/>
+                <a:ea typeface="Roboto Mono Medium" pitchFamily="34" charset="-122"/>
+                <a:cs typeface="Roboto Mono Medium" pitchFamily="34" charset="-120"/>
+              </a:rPr>
+              <a:t>Multiplayer systém</a:t>
+            </a:r>
+            <a:endParaRPr lang="en-US" sz="3300" dirty="0"/>
+          </a:p>
+        </p:txBody>
+      </p:sp>
+      <p:sp>
+        <p:nvSpPr>
+          <p:cNvPr id="4" name="Text 1"/>
+          <p:cNvSpPr/>
+          <p:nvPr/>
+        </p:nvSpPr>
+        <p:spPr>
+          <a:xfrm>
+            <a:off x="8002189" y="1633637"/>
+            <a:ext cx="3534282" cy="517128"/>
+          </a:xfrm>
+          <a:prstGeom prst="rect">
+            <a:avLst/>
+          </a:prstGeom>
+          <a:noFill/>
+          <a:ln/>
+        </p:spPr>
+        <p:txBody>
+          <a:bodyPr wrap="square" lIns="0" tIns="0" rIns="0" bIns="0" rtlCol="0" anchor="t">
+            <a:normAutofit/>
+          </a:bodyPr>
+          <a:lstStyle/>
+          <a:p>
+            <a:pPr marL="0" indent="0" algn="l">
+              <a:lnSpc>
+                <a:spcPct val="127000"/>
+              </a:lnSpc>
+              <a:buNone/>
+            </a:pPr>
+            <a:r>
+              <a:rPr lang="en-US" sz="1300" dirty="0">
+                <a:solidFill>
+                  <a:srgbClr val="E5E0DF"/>
+                </a:solidFill>
+                <a:latin typeface="Roboto" pitchFamily="34" charset="0"/>
+                <a:ea typeface="Roboto" pitchFamily="34" charset="-122"/>
+                <a:cs typeface="Roboto" pitchFamily="34" charset="-120"/>
+              </a:rPr>
+              <a:t>Hráči môžu hrať spoločne v jednej sieti a vidia </a:t>
+            </a:r>
+            <a:r>
+              <a:rPr lang="en-US" sz="1300" b="1" dirty="0">
+                <a:solidFill>
+                  <a:srgbClr val="E5E0DF"/>
+                </a:solidFill>
+                <a:latin typeface="Roboto" pitchFamily="34" charset="0"/>
+                <a:ea typeface="Roboto" pitchFamily="34" charset="-122"/>
+                <a:cs typeface="Roboto" pitchFamily="34" charset="-120"/>
+              </a:rPr>
+              <a:t>rovnaký stav hry v reálnom čase</a:t>
+            </a:r>
+            <a:r>
+              <a:rPr lang="en-US" sz="1300" dirty="0">
+                <a:solidFill>
+                  <a:srgbClr val="E5E0DF"/>
+                </a:solidFill>
+                <a:latin typeface="Roboto" pitchFamily="34" charset="0"/>
+                <a:ea typeface="Roboto" pitchFamily="34" charset="-122"/>
+                <a:cs typeface="Roboto" pitchFamily="34" charset="-120"/>
+              </a:rPr>
+              <a:t>.</a:t>
+            </a:r>
+            <a:endParaRPr lang="en-US" sz="1300" dirty="0"/>
           </a:p>
         </p:txBody>
       </p:sp>
       <p:pic>
         <p:nvPicPr>
-          <p:cNvPr id="3" name="Image 0" descr="preencoded.png"/>
+          <p:cNvPr id="5" name="Image 1" descr="preencoded.png"/>
           <p:cNvPicPr>
             <a:picLocks noChangeAspect="1"/>
           </p:cNvPicPr>
           <p:nvPr/>
         </p:nvPicPr>
         <p:blipFill>
-          <a:blip r:embed="rId3"/>
+          <a:blip r:embed="rId3">
+            <a:extLst>
+              <a:ext uri="{96DAC541-7B7A-43D3-8B79-37D633B846F1}">
+                <asvg:svgBlip xmlns:asvg="http://schemas.microsoft.com/office/drawing/2016/SVG/main" r:embed="rId4"/>
+              </a:ext>
+            </a:extLst>
+          </a:blip>
           <a:stretch>
             <a:fillRect/>
           </a:stretch>
         </p:blipFill>
         <p:spPr>
           <a:xfrm>
-            <a:off x="823913" y="1718310"/>
-            <a:ext cx="940713" cy="1128832"/>
+            <a:off x="8065985" y="2328218"/>
+            <a:ext cx="255085" cy="255091"/>
           </a:xfrm>
           <a:prstGeom prst="rect">
             <a:avLst/>
@@ -4462,14 +5037,14 @@
       </p:pic>
       <p:sp>
         <p:nvSpPr>
-          <p:cNvPr id="4" name="Text 1"/>
-          <p:cNvSpPr/>
-          <p:nvPr/>
-        </p:nvSpPr>
-        <p:spPr>
-          <a:xfrm>
-            <a:off x="1920597" y="1906429"/>
-            <a:ext cx="2469475" cy="308610"/>
+          <p:cNvPr id="6" name="Text 2"/>
+          <p:cNvSpPr/>
+          <p:nvPr/>
+        </p:nvSpPr>
+        <p:spPr>
+          <a:xfrm>
+            <a:off x="8554923" y="2323009"/>
+            <a:ext cx="2126403" cy="265708"/>
           </a:xfrm>
           <a:prstGeom prst="rect">
             <a:avLst/>
@@ -4483,35 +5058,35 @@
           <a:p>
             <a:pPr marL="0" indent="0" algn="l">
               <a:lnSpc>
-                <a:spcPts val="2400"/>
+                <a:spcPct val="104000"/>
               </a:lnSpc>
               <a:buNone/>
             </a:pPr>
             <a:r>
-              <a:rPr lang="en-US" sz="1900" dirty="0">
-                <a:solidFill>
-                  <a:srgbClr val="383838"/>
-                </a:solidFill>
-                <a:latin typeface="PT Serif" pitchFamily="34" charset="0"/>
-                <a:ea typeface="PT Serif" pitchFamily="34" charset="-122"/>
-                <a:cs typeface="PT Serif" pitchFamily="34" charset="-120"/>
-              </a:rPr>
-              <a:t>main.py</a:t>
-            </a:r>
-            <a:endParaRPr lang="en-US" sz="1900" dirty="0"/>
-          </a:p>
-        </p:txBody>
-      </p:sp>
-      <p:sp>
-        <p:nvSpPr>
-          <p:cNvPr id="5" name="Text 2"/>
-          <p:cNvSpPr/>
-          <p:nvPr/>
-        </p:nvSpPr>
-        <p:spPr>
-          <a:xfrm>
-            <a:off x="1920597" y="2371011"/>
-            <a:ext cx="7181255" cy="275273"/>
+              <a:rPr lang="en-US" sz="1650" dirty="0">
+                <a:solidFill>
+                  <a:srgbClr val="E5E0DF"/>
+                </a:solidFill>
+                <a:latin typeface="Roboto Mono Medium" pitchFamily="34" charset="0"/>
+                <a:ea typeface="Roboto Mono Medium" pitchFamily="34" charset="-122"/>
+                <a:cs typeface="Roboto Mono Medium" pitchFamily="34" charset="-120"/>
+              </a:rPr>
+              <a:t>TCP komunikácia</a:t>
+            </a:r>
+            <a:endParaRPr lang="en-US" sz="1650" dirty="0"/>
+          </a:p>
+        </p:txBody>
+      </p:sp>
+      <p:sp>
+        <p:nvSpPr>
+          <p:cNvPr id="7" name="Text 3"/>
+          <p:cNvSpPr/>
+          <p:nvPr/>
+        </p:nvSpPr>
+        <p:spPr>
+          <a:xfrm>
+            <a:off x="8554923" y="2741811"/>
+            <a:ext cx="2981548" cy="258564"/>
           </a:xfrm>
           <a:prstGeom prst="rect">
             <a:avLst/>
@@ -4525,43 +5100,49 @@
           <a:p>
             <a:pPr marL="0" indent="0" algn="l">
               <a:lnSpc>
-                <a:spcPts val="2150"/>
+                <a:spcPct val="127000"/>
               </a:lnSpc>
               <a:buNone/>
             </a:pPr>
             <a:r>
-              <a:rPr lang="en-US" sz="1450" dirty="0">
-                <a:solidFill>
-                  <a:srgbClr val="383838"/>
-                </a:solidFill>
-                <a:latin typeface="DM Sans" pitchFamily="34" charset="0"/>
-                <a:ea typeface="DM Sans" pitchFamily="34" charset="-122"/>
-                <a:cs typeface="DM Sans" pitchFamily="34" charset="-120"/>
-              </a:rPr>
-              <a:t>Spustenie hry a hlavný vstupný bod aplikácie</a:t>
-            </a:r>
-            <a:endParaRPr lang="en-US" sz="1450" dirty="0"/>
+              <a:rPr lang="en-US" sz="1300" dirty="0">
+                <a:solidFill>
+                  <a:srgbClr val="E5E0DF"/>
+                </a:solidFill>
+                <a:latin typeface="Roboto" pitchFamily="34" charset="0"/>
+                <a:ea typeface="Roboto" pitchFamily="34" charset="-122"/>
+                <a:cs typeface="Roboto" pitchFamily="34" charset="-120"/>
+              </a:rPr>
+              <a:t>Spoliehavý prenos herných dát</a:t>
+            </a:r>
+            <a:endParaRPr lang="en-US" sz="1300" dirty="0"/>
           </a:p>
         </p:txBody>
       </p:sp>
       <p:pic>
         <p:nvPicPr>
-          <p:cNvPr id="6" name="Image 1" descr="preencoded.png"/>
+          <p:cNvPr id="8" name="Image 2" descr="preencoded.png"/>
           <p:cNvPicPr>
             <a:picLocks noChangeAspect="1"/>
           </p:cNvPicPr>
           <p:nvPr/>
         </p:nvPicPr>
         <p:blipFill>
-          <a:blip r:embed="rId4"/>
+          <a:blip r:embed="rId3">
+            <a:extLst>
+              <a:ext uri="{96DAC541-7B7A-43D3-8B79-37D633B846F1}">
+                <asvg:svgBlip xmlns:asvg="http://schemas.microsoft.com/office/drawing/2016/SVG/main" r:embed="rId4"/>
+              </a:ext>
+            </a:extLst>
+          </a:blip>
           <a:stretch>
             <a:fillRect/>
           </a:stretch>
         </p:blipFill>
         <p:spPr>
           <a:xfrm>
-            <a:off x="823913" y="2847142"/>
-            <a:ext cx="940713" cy="1128832"/>
+            <a:off x="8065985" y="3311773"/>
+            <a:ext cx="255085" cy="255091"/>
           </a:xfrm>
           <a:prstGeom prst="rect">
             <a:avLst/>
@@ -4570,14 +5151,14 @@
       </p:pic>
       <p:sp>
         <p:nvSpPr>
-          <p:cNvPr id="7" name="Text 3"/>
-          <p:cNvSpPr/>
-          <p:nvPr/>
-        </p:nvSpPr>
-        <p:spPr>
-          <a:xfrm>
-            <a:off x="1920597" y="3035260"/>
-            <a:ext cx="2469475" cy="308610"/>
+          <p:cNvPr id="9" name="Text 4"/>
+          <p:cNvSpPr/>
+          <p:nvPr/>
+        </p:nvSpPr>
+        <p:spPr>
+          <a:xfrm>
+            <a:off x="8554923" y="3306564"/>
+            <a:ext cx="2126403" cy="265708"/>
           </a:xfrm>
           <a:prstGeom prst="rect">
             <a:avLst/>
@@ -4591,35 +5172,35 @@
           <a:p>
             <a:pPr marL="0" indent="0" algn="l">
               <a:lnSpc>
-                <a:spcPts val="2400"/>
+                <a:spcPct val="104000"/>
               </a:lnSpc>
               <a:buNone/>
             </a:pPr>
             <a:r>
-              <a:rPr lang="en-US" sz="1900" dirty="0">
-                <a:solidFill>
-                  <a:srgbClr val="383838"/>
-                </a:solidFill>
-                <a:latin typeface="PT Serif" pitchFamily="34" charset="0"/>
-                <a:ea typeface="PT Serif" pitchFamily="34" charset="-122"/>
-                <a:cs typeface="PT Serif" pitchFamily="34" charset="-120"/>
-              </a:rPr>
-              <a:t>engine.py</a:t>
-            </a:r>
-            <a:endParaRPr lang="en-US" sz="1900" dirty="0"/>
-          </a:p>
-        </p:txBody>
-      </p:sp>
-      <p:sp>
-        <p:nvSpPr>
-          <p:cNvPr id="8" name="Text 4"/>
-          <p:cNvSpPr/>
-          <p:nvPr/>
-        </p:nvSpPr>
-        <p:spPr>
-          <a:xfrm>
-            <a:off x="1920597" y="3499842"/>
-            <a:ext cx="7181255" cy="275273"/>
+              <a:rPr lang="en-US" sz="1650" dirty="0">
+                <a:solidFill>
+                  <a:srgbClr val="E5E0DF"/>
+                </a:solidFill>
+                <a:latin typeface="Roboto Mono Medium" pitchFamily="34" charset="0"/>
+                <a:ea typeface="Roboto Mono Medium" pitchFamily="34" charset="-122"/>
+                <a:cs typeface="Roboto Mono Medium" pitchFamily="34" charset="-120"/>
+              </a:rPr>
+              <a:t>UDP vyhľadávanie</a:t>
+            </a:r>
+            <a:endParaRPr lang="en-US" sz="1650" dirty="0"/>
+          </a:p>
+        </p:txBody>
+      </p:sp>
+      <p:sp>
+        <p:nvSpPr>
+          <p:cNvPr id="10" name="Text 5"/>
+          <p:cNvSpPr/>
+          <p:nvPr/>
+        </p:nvSpPr>
+        <p:spPr>
+          <a:xfrm>
+            <a:off x="8554923" y="3725366"/>
+            <a:ext cx="2981548" cy="258564"/>
           </a:xfrm>
           <a:prstGeom prst="rect">
             <a:avLst/>
@@ -4633,28 +5214,262 @@
           <a:p>
             <a:pPr marL="0" indent="0" algn="l">
               <a:lnSpc>
-                <a:spcPts val="2150"/>
+                <a:spcPct val="127000"/>
               </a:lnSpc>
               <a:buNone/>
             </a:pPr>
             <a:r>
-              <a:rPr lang="en-US" sz="1450" dirty="0">
-                <a:solidFill>
-                  <a:srgbClr val="383838"/>
-                </a:solidFill>
-                <a:latin typeface="DM Sans" pitchFamily="34" charset="0"/>
-                <a:ea typeface="DM Sans" pitchFamily="34" charset="-122"/>
-                <a:cs typeface="DM Sans" pitchFamily="34" charset="-120"/>
-              </a:rPr>
-              <a:t>Herná logika a správa stavu hry</a:t>
-            </a:r>
-            <a:endParaRPr lang="en-US" sz="1450" dirty="0"/>
+              <a:rPr lang="en-US" sz="1300" dirty="0">
+                <a:solidFill>
+                  <a:srgbClr val="E5E0DF"/>
+                </a:solidFill>
+                <a:latin typeface="Roboto" pitchFamily="34" charset="0"/>
+                <a:ea typeface="Roboto" pitchFamily="34" charset="-122"/>
+                <a:cs typeface="Roboto" pitchFamily="34" charset="-120"/>
+              </a:rPr>
+              <a:t>Automatické nájdenie serverov v sieti</a:t>
+            </a:r>
+            <a:endParaRPr lang="en-US" sz="1300" dirty="0"/>
           </a:p>
         </p:txBody>
       </p:sp>
       <p:pic>
         <p:nvPicPr>
-          <p:cNvPr id="9" name="Image 2" descr="preencoded.png"/>
+          <p:cNvPr id="11" name="Image 3" descr="preencoded.png"/>
+          <p:cNvPicPr>
+            <a:picLocks noChangeAspect="1"/>
+          </p:cNvPicPr>
+          <p:nvPr/>
+        </p:nvPicPr>
+        <p:blipFill>
+          <a:blip r:embed="rId3">
+            <a:extLst>
+              <a:ext uri="{96DAC541-7B7A-43D3-8B79-37D633B846F1}">
+                <asvg:svgBlip xmlns:asvg="http://schemas.microsoft.com/office/drawing/2016/SVG/main" r:embed="rId4"/>
+              </a:ext>
+            </a:extLst>
+          </a:blip>
+          <a:stretch>
+            <a:fillRect/>
+          </a:stretch>
+        </p:blipFill>
+        <p:spPr>
+          <a:xfrm>
+            <a:off x="8065985" y="4295329"/>
+            <a:ext cx="255085" cy="255091"/>
+          </a:xfrm>
+          <a:prstGeom prst="rect">
+            <a:avLst/>
+          </a:prstGeom>
+        </p:spPr>
+      </p:pic>
+      <p:sp>
+        <p:nvSpPr>
+          <p:cNvPr id="12" name="Text 6"/>
+          <p:cNvSpPr/>
+          <p:nvPr/>
+        </p:nvSpPr>
+        <p:spPr>
+          <a:xfrm>
+            <a:off x="8554923" y="4290120"/>
+            <a:ext cx="2805836" cy="265708"/>
+          </a:xfrm>
+          <a:prstGeom prst="rect">
+            <a:avLst/>
+          </a:prstGeom>
+          <a:noFill/>
+          <a:ln/>
+        </p:spPr>
+        <p:txBody>
+          <a:bodyPr wrap="none" lIns="0" tIns="0" rIns="0" bIns="0" rtlCol="0" anchor="t"/>
+          <a:lstStyle/>
+          <a:p>
+            <a:pPr marL="0" indent="0" algn="l">
+              <a:lnSpc>
+                <a:spcPct val="104000"/>
+              </a:lnSpc>
+              <a:buNone/>
+            </a:pPr>
+            <a:r>
+              <a:rPr lang="en-US" sz="1650" dirty="0">
+                <a:solidFill>
+                  <a:srgbClr val="E5E0DF"/>
+                </a:solidFill>
+                <a:latin typeface="Roboto Mono Medium" pitchFamily="34" charset="0"/>
+                <a:ea typeface="Roboto Mono Medium" pitchFamily="34" charset="-122"/>
+                <a:cs typeface="Roboto Mono Medium" pitchFamily="34" charset="-120"/>
+              </a:rPr>
+              <a:t>Lobby &amp; synchronizácia</a:t>
+            </a:r>
+            <a:endParaRPr lang="en-US" sz="1650" dirty="0"/>
+          </a:p>
+        </p:txBody>
+      </p:sp>
+      <p:sp>
+        <p:nvSpPr>
+          <p:cNvPr id="13" name="Text 7"/>
+          <p:cNvSpPr/>
+          <p:nvPr/>
+        </p:nvSpPr>
+        <p:spPr>
+          <a:xfrm>
+            <a:off x="8554923" y="4708922"/>
+            <a:ext cx="2981548" cy="258564"/>
+          </a:xfrm>
+          <a:prstGeom prst="rect">
+            <a:avLst/>
+          </a:prstGeom>
+          <a:noFill/>
+          <a:ln/>
+        </p:spPr>
+        <p:txBody>
+          <a:bodyPr wrap="none" lIns="0" tIns="0" rIns="0" bIns="0" rtlCol="0" anchor="t"/>
+          <a:lstStyle/>
+          <a:p>
+            <a:pPr marL="0" indent="0" algn="l">
+              <a:lnSpc>
+                <a:spcPct val="127000"/>
+              </a:lnSpc>
+              <a:buNone/>
+            </a:pPr>
+            <a:r>
+              <a:rPr lang="en-US" sz="1300" dirty="0">
+                <a:solidFill>
+                  <a:srgbClr val="E5E0DF"/>
+                </a:solidFill>
+                <a:latin typeface="Roboto" pitchFamily="34" charset="0"/>
+                <a:ea typeface="Roboto" pitchFamily="34" charset="-122"/>
+                <a:cs typeface="Roboto" pitchFamily="34" charset="-120"/>
+              </a:rPr>
+              <a:t>Zdieľaný stav hry pre všetkých hráčov</a:t>
+            </a:r>
+            <a:endParaRPr lang="en-US" sz="1300" dirty="0"/>
+          </a:p>
+        </p:txBody>
+      </p:sp>
+      <p:pic>
+        <p:nvPicPr>
+          <p:cNvPr id="14" name="Image 4" descr="preencoded.png"/>
+          <p:cNvPicPr>
+            <a:picLocks noChangeAspect="1"/>
+          </p:cNvPicPr>
+          <p:nvPr/>
+        </p:nvPicPr>
+        <p:blipFill>
+          <a:blip r:embed="rId3">
+            <a:extLst>
+              <a:ext uri="{96DAC541-7B7A-43D3-8B79-37D633B846F1}">
+                <asvg:svgBlip xmlns:asvg="http://schemas.microsoft.com/office/drawing/2016/SVG/main" r:embed="rId4"/>
+              </a:ext>
+            </a:extLst>
+          </a:blip>
+          <a:stretch>
+            <a:fillRect/>
+          </a:stretch>
+        </p:blipFill>
+        <p:spPr>
+          <a:xfrm>
+            <a:off x="8065985" y="5278884"/>
+            <a:ext cx="255085" cy="255091"/>
+          </a:xfrm>
+          <a:prstGeom prst="rect">
+            <a:avLst/>
+          </a:prstGeom>
+        </p:spPr>
+      </p:pic>
+      <p:sp>
+        <p:nvSpPr>
+          <p:cNvPr id="15" name="Text 8"/>
+          <p:cNvSpPr/>
+          <p:nvPr/>
+        </p:nvSpPr>
+        <p:spPr>
+          <a:xfrm>
+            <a:off x="8554923" y="5273675"/>
+            <a:ext cx="2168074" cy="265708"/>
+          </a:xfrm>
+          <a:prstGeom prst="rect">
+            <a:avLst/>
+          </a:prstGeom>
+          <a:noFill/>
+          <a:ln/>
+        </p:spPr>
+        <p:txBody>
+          <a:bodyPr wrap="none" lIns="0" tIns="0" rIns="0" bIns="0" rtlCol="0" anchor="t"/>
+          <a:lstStyle/>
+          <a:p>
+            <a:pPr marL="0" indent="0" algn="l">
+              <a:lnSpc>
+                <a:spcPct val="104000"/>
+              </a:lnSpc>
+              <a:buNone/>
+            </a:pPr>
+            <a:r>
+              <a:rPr lang="en-US" sz="1650" dirty="0">
+                <a:solidFill>
+                  <a:srgbClr val="E5E0DF"/>
+                </a:solidFill>
+                <a:latin typeface="Roboto Mono Medium" pitchFamily="34" charset="0"/>
+                <a:ea typeface="Roboto Mono Medium" pitchFamily="34" charset="-122"/>
+                <a:cs typeface="Roboto Mono Medium" pitchFamily="34" charset="-120"/>
+              </a:rPr>
+              <a:t>Chat medzi hráčmi</a:t>
+            </a:r>
+            <a:endParaRPr lang="en-US" sz="1650" dirty="0"/>
+          </a:p>
+        </p:txBody>
+      </p:sp>
+      <p:sp>
+        <p:nvSpPr>
+          <p:cNvPr id="16" name="Text 9"/>
+          <p:cNvSpPr/>
+          <p:nvPr/>
+        </p:nvSpPr>
+        <p:spPr>
+          <a:xfrm>
+            <a:off x="8554923" y="5692477"/>
+            <a:ext cx="2981548" cy="258564"/>
+          </a:xfrm>
+          <a:prstGeom prst="rect">
+            <a:avLst/>
+          </a:prstGeom>
+          <a:noFill/>
+          <a:ln/>
+        </p:spPr>
+        <p:txBody>
+          <a:bodyPr wrap="none" lIns="0" tIns="0" rIns="0" bIns="0" rtlCol="0" anchor="t"/>
+          <a:lstStyle/>
+          <a:p>
+            <a:pPr marL="0" indent="0" algn="l">
+              <a:lnSpc>
+                <a:spcPct val="127000"/>
+              </a:lnSpc>
+              <a:buNone/>
+            </a:pPr>
+            <a:r>
+              <a:rPr lang="en-US" sz="1300" dirty="0">
+                <a:solidFill>
+                  <a:srgbClr val="E5E0DF"/>
+                </a:solidFill>
+                <a:latin typeface="Roboto" pitchFamily="34" charset="0"/>
+                <a:ea typeface="Roboto" pitchFamily="34" charset="-122"/>
+                <a:cs typeface="Roboto" pitchFamily="34" charset="-120"/>
+              </a:rPr>
+              <a:t>Textová komunikácia počas hry</a:t>
+            </a:r>
+            <a:endParaRPr lang="en-US" sz="1300" dirty="0"/>
+          </a:p>
+        </p:txBody>
+      </p:sp>
+      <p:pic>
+        <p:nvPicPr>
+          <p:cNvPr id="18" name="Obrázok 17">
+            <a:extLst>
+              <a:ext uri="{FF2B5EF4-FFF2-40B4-BE49-F238E27FC236}">
+                <a16:creationId xmlns:a16="http://schemas.microsoft.com/office/drawing/2014/main" id="{7880A54A-5B12-E393-2552-629B9BBDC057}"/>
+              </a:ext>
+            </a:extLst>
+          </p:cNvPr>
           <p:cNvPicPr>
             <a:picLocks noChangeAspect="1"/>
           </p:cNvPicPr>
@@ -4668,101 +5483,23 @@
         </p:blipFill>
         <p:spPr>
           <a:xfrm>
-            <a:off x="823913" y="3975973"/>
-            <a:ext cx="940713" cy="1128832"/>
+            <a:off x="484071" y="1616660"/>
+            <a:ext cx="6848327" cy="4734539"/>
           </a:xfrm>
           <a:prstGeom prst="rect">
             <a:avLst/>
           </a:prstGeom>
         </p:spPr>
       </p:pic>
-      <p:sp>
-        <p:nvSpPr>
-          <p:cNvPr id="10" name="Text 5"/>
-          <p:cNvSpPr/>
-          <p:nvPr/>
-        </p:nvSpPr>
-        <p:spPr>
-          <a:xfrm>
-            <a:off x="1920597" y="4164092"/>
-            <a:ext cx="2469475" cy="308610"/>
-          </a:xfrm>
-          <a:prstGeom prst="rect">
-            <a:avLst/>
-          </a:prstGeom>
-          <a:noFill/>
-          <a:ln/>
-        </p:spPr>
-        <p:txBody>
-          <a:bodyPr wrap="none" lIns="0" tIns="0" rIns="0" bIns="0" rtlCol="0" anchor="t"/>
-          <a:lstStyle/>
-          <a:p>
-            <a:pPr marL="0" indent="0" algn="l">
-              <a:lnSpc>
-                <a:spcPts val="2400"/>
-              </a:lnSpc>
-              <a:buNone/>
-            </a:pPr>
-            <a:r>
-              <a:rPr lang="en-US" sz="1900" dirty="0">
-                <a:solidFill>
-                  <a:srgbClr val="383838"/>
-                </a:solidFill>
-                <a:latin typeface="PT Serif" pitchFamily="34" charset="0"/>
-                <a:ea typeface="PT Serif" pitchFamily="34" charset="-122"/>
-                <a:cs typeface="PT Serif" pitchFamily="34" charset="-120"/>
-              </a:rPr>
-              <a:t>ui.py</a:t>
-            </a:r>
-            <a:endParaRPr lang="en-US" sz="1900" dirty="0"/>
-          </a:p>
-        </p:txBody>
-      </p:sp>
-      <p:sp>
-        <p:nvSpPr>
-          <p:cNvPr id="11" name="Text 6"/>
-          <p:cNvSpPr/>
-          <p:nvPr/>
-        </p:nvSpPr>
-        <p:spPr>
-          <a:xfrm>
-            <a:off x="1920597" y="4628674"/>
-            <a:ext cx="7181255" cy="275273"/>
-          </a:xfrm>
-          <a:prstGeom prst="rect">
-            <a:avLst/>
-          </a:prstGeom>
-          <a:noFill/>
-          <a:ln/>
-        </p:spPr>
-        <p:txBody>
-          <a:bodyPr wrap="none" lIns="0" tIns="0" rIns="0" bIns="0" rtlCol="0" anchor="t"/>
-          <a:lstStyle/>
-          <a:p>
-            <a:pPr marL="0" indent="0" algn="l">
-              <a:lnSpc>
-                <a:spcPts val="2150"/>
-              </a:lnSpc>
-              <a:buNone/>
-            </a:pPr>
-            <a:r>
-              <a:rPr lang="en-US" sz="1450" dirty="0">
-                <a:solidFill>
-                  <a:srgbClr val="383838"/>
-                </a:solidFill>
-                <a:latin typeface="DM Sans" pitchFamily="34" charset="0"/>
-                <a:ea typeface="DM Sans" pitchFamily="34" charset="-122"/>
-                <a:cs typeface="DM Sans" pitchFamily="34" charset="-120"/>
-              </a:rPr>
-              <a:t>Grafické rozhranie a ovládanie</a:t>
-            </a:r>
-            <a:endParaRPr lang="en-US" sz="1450" dirty="0"/>
-          </a:p>
-        </p:txBody>
-      </p:sp>
       <p:pic>
         <p:nvPicPr>
-          <p:cNvPr id="12" name="Image 3" descr="preencoded.png"/>
+          <p:cNvPr id="19" name="Obrázok 18">
+            <a:extLst>
+              <a:ext uri="{FF2B5EF4-FFF2-40B4-BE49-F238E27FC236}">
+                <a16:creationId xmlns:a16="http://schemas.microsoft.com/office/drawing/2014/main" id="{1430AB2E-E450-BC0F-45E3-E47CBAE93EED}"/>
+              </a:ext>
+            </a:extLst>
+          </p:cNvPr>
           <p:cNvPicPr>
             <a:picLocks noChangeAspect="1"/>
           </p:cNvPicPr>
@@ -4776,223 +5513,8 @@
         </p:blipFill>
         <p:spPr>
           <a:xfrm>
-            <a:off x="823913" y="5104805"/>
-            <a:ext cx="940713" cy="1128832"/>
-          </a:xfrm>
-          <a:prstGeom prst="rect">
-            <a:avLst/>
-          </a:prstGeom>
-        </p:spPr>
-      </p:pic>
-      <p:sp>
-        <p:nvSpPr>
-          <p:cNvPr id="13" name="Text 7"/>
-          <p:cNvSpPr/>
-          <p:nvPr/>
-        </p:nvSpPr>
-        <p:spPr>
-          <a:xfrm>
-            <a:off x="1920597" y="5292923"/>
-            <a:ext cx="2469475" cy="308610"/>
-          </a:xfrm>
-          <a:prstGeom prst="rect">
-            <a:avLst/>
-          </a:prstGeom>
-          <a:noFill/>
-          <a:ln/>
-        </p:spPr>
-        <p:txBody>
-          <a:bodyPr wrap="none" lIns="0" tIns="0" rIns="0" bIns="0" rtlCol="0" anchor="t"/>
-          <a:lstStyle/>
-          <a:p>
-            <a:pPr marL="0" indent="0" algn="l">
-              <a:lnSpc>
-                <a:spcPts val="2400"/>
-              </a:lnSpc>
-              <a:buNone/>
-            </a:pPr>
-            <a:r>
-              <a:rPr lang="en-US" sz="1900" dirty="0">
-                <a:solidFill>
-                  <a:srgbClr val="383838"/>
-                </a:solidFill>
-                <a:latin typeface="PT Serif" pitchFamily="34" charset="0"/>
-                <a:ea typeface="PT Serif" pitchFamily="34" charset="-122"/>
-                <a:cs typeface="PT Serif" pitchFamily="34" charset="-120"/>
-              </a:rPr>
-              <a:t>scores.json</a:t>
-            </a:r>
-            <a:endParaRPr lang="en-US" sz="1900" dirty="0"/>
-          </a:p>
-        </p:txBody>
-      </p:sp>
-      <p:sp>
-        <p:nvSpPr>
-          <p:cNvPr id="14" name="Text 8"/>
-          <p:cNvSpPr/>
-          <p:nvPr/>
-        </p:nvSpPr>
-        <p:spPr>
-          <a:xfrm>
-            <a:off x="1920597" y="5757505"/>
-            <a:ext cx="7181255" cy="275273"/>
-          </a:xfrm>
-          <a:prstGeom prst="rect">
-            <a:avLst/>
-          </a:prstGeom>
-          <a:noFill/>
-          <a:ln/>
-        </p:spPr>
-        <p:txBody>
-          <a:bodyPr wrap="none" lIns="0" tIns="0" rIns="0" bIns="0" rtlCol="0" anchor="t"/>
-          <a:lstStyle/>
-          <a:p>
-            <a:pPr marL="0" indent="0" algn="l">
-              <a:lnSpc>
-                <a:spcPts val="2150"/>
-              </a:lnSpc>
-              <a:buNone/>
-            </a:pPr>
-            <a:r>
-              <a:rPr lang="en-US" sz="1450" dirty="0">
-                <a:solidFill>
-                  <a:srgbClr val="383838"/>
-                </a:solidFill>
-                <a:latin typeface="DM Sans" pitchFamily="34" charset="0"/>
-                <a:ea typeface="DM Sans" pitchFamily="34" charset="-122"/>
-                <a:cs typeface="DM Sans" pitchFamily="34" charset="-120"/>
-              </a:rPr>
-              <a:t>Uložené skóre a rebríček najlepších časov</a:t>
-            </a:r>
-            <a:endParaRPr lang="en-US" sz="1450" dirty="0"/>
-          </a:p>
-        </p:txBody>
-      </p:sp>
-      <p:pic>
-        <p:nvPicPr>
-          <p:cNvPr id="15" name="Image 4" descr="preencoded.png"/>
-          <p:cNvPicPr>
-            <a:picLocks noChangeAspect="1"/>
-          </p:cNvPicPr>
-          <p:nvPr/>
-        </p:nvPicPr>
-        <p:blipFill>
-          <a:blip r:embed="rId7"/>
-          <a:stretch>
-            <a:fillRect/>
-          </a:stretch>
-        </p:blipFill>
-        <p:spPr>
-          <a:xfrm>
-            <a:off x="823913" y="6233636"/>
-            <a:ext cx="940713" cy="1128832"/>
-          </a:xfrm>
-          <a:prstGeom prst="rect">
-            <a:avLst/>
-          </a:prstGeom>
-        </p:spPr>
-      </p:pic>
-      <p:sp>
-        <p:nvSpPr>
-          <p:cNvPr id="16" name="Text 9"/>
-          <p:cNvSpPr/>
-          <p:nvPr/>
-        </p:nvSpPr>
-        <p:spPr>
-          <a:xfrm>
-            <a:off x="1920597" y="6421755"/>
-            <a:ext cx="2469475" cy="308610"/>
-          </a:xfrm>
-          <a:prstGeom prst="rect">
-            <a:avLst/>
-          </a:prstGeom>
-          <a:noFill/>
-          <a:ln/>
-        </p:spPr>
-        <p:txBody>
-          <a:bodyPr wrap="none" lIns="0" tIns="0" rIns="0" bIns="0" rtlCol="0" anchor="t"/>
-          <a:lstStyle/>
-          <a:p>
-            <a:pPr marL="0" indent="0" algn="l">
-              <a:lnSpc>
-                <a:spcPts val="2400"/>
-              </a:lnSpc>
-              <a:buNone/>
-            </a:pPr>
-            <a:r>
-              <a:rPr lang="en-US" sz="1900" dirty="0">
-                <a:solidFill>
-                  <a:srgbClr val="383838"/>
-                </a:solidFill>
-                <a:latin typeface="PT Serif" pitchFamily="34" charset="0"/>
-                <a:ea typeface="PT Serif" pitchFamily="34" charset="-122"/>
-                <a:cs typeface="PT Serif" pitchFamily="34" charset="-120"/>
-              </a:rPr>
-              <a:t>README.md</a:t>
-            </a:r>
-            <a:endParaRPr lang="en-US" sz="1900" dirty="0"/>
-          </a:p>
-        </p:txBody>
-      </p:sp>
-      <p:sp>
-        <p:nvSpPr>
-          <p:cNvPr id="17" name="Text 10"/>
-          <p:cNvSpPr/>
-          <p:nvPr/>
-        </p:nvSpPr>
-        <p:spPr>
-          <a:xfrm>
-            <a:off x="1920597" y="6886337"/>
-            <a:ext cx="7181255" cy="275273"/>
-          </a:xfrm>
-          <a:prstGeom prst="rect">
-            <a:avLst/>
-          </a:prstGeom>
-          <a:noFill/>
-          <a:ln/>
-        </p:spPr>
-        <p:txBody>
-          <a:bodyPr wrap="none" lIns="0" tIns="0" rIns="0" bIns="0" rtlCol="0" anchor="t"/>
-          <a:lstStyle/>
-          <a:p>
-            <a:pPr marL="0" indent="0" algn="l">
-              <a:lnSpc>
-                <a:spcPts val="2150"/>
-              </a:lnSpc>
-              <a:buNone/>
-            </a:pPr>
-            <a:r>
-              <a:rPr lang="en-US" sz="1450" dirty="0">
-                <a:solidFill>
-                  <a:srgbClr val="383838"/>
-                </a:solidFill>
-                <a:latin typeface="DM Sans" pitchFamily="34" charset="0"/>
-                <a:ea typeface="DM Sans" pitchFamily="34" charset="-122"/>
-                <a:cs typeface="DM Sans" pitchFamily="34" charset="-120"/>
-              </a:rPr>
-              <a:t>Dokumentácia a inštrukcie na spustenie</a:t>
-            </a:r>
-            <a:endParaRPr lang="en-US" sz="1450" dirty="0"/>
-          </a:p>
-        </p:txBody>
-      </p:sp>
-      <p:pic>
-        <p:nvPicPr>
-          <p:cNvPr id="18" name="Image 5"/>
-          <p:cNvPicPr>
-            <a:picLocks noChangeAspect="1"/>
-          </p:cNvPicPr>
-          <p:nvPr/>
-        </p:nvPicPr>
-        <p:blipFill>
-          <a:blip r:embed="rId8"/>
-          <a:srcRect/>
-          <a:stretch/>
-        </p:blipFill>
-        <p:spPr>
-          <a:xfrm>
-            <a:off x="7315200" y="1906429"/>
-            <a:ext cx="6364855" cy="4240585"/>
+            <a:off x="11048475" y="6512742"/>
+            <a:ext cx="1143526" cy="279799"/>
           </a:xfrm>
           <a:prstGeom prst="rect">
             <a:avLst/>
@@ -5001,10 +5523,10 @@
       </p:pic>
       <p:pic>
         <p:nvPicPr>
-          <p:cNvPr id="19" name="Obrázok 18">
+          <p:cNvPr id="20" name="Obrázok 19">
             <a:extLst>
               <a:ext uri="{FF2B5EF4-FFF2-40B4-BE49-F238E27FC236}">
-                <a16:creationId xmlns:a16="http://schemas.microsoft.com/office/drawing/2014/main" id="{F3A7ED80-0078-5FC7-F2B9-9700519F54F8}"/>
+                <a16:creationId xmlns:a16="http://schemas.microsoft.com/office/drawing/2014/main" id="{F5394D1B-6001-E885-BD13-A0D830BC49EB}"/>
               </a:ext>
             </a:extLst>
           </p:cNvPr>
@@ -5014,15 +5536,15 @@
           <p:nvPr/>
         </p:nvPicPr>
         <p:blipFill>
-          <a:blip r:embed="rId9"/>
+          <a:blip r:embed="rId6"/>
           <a:stretch>
             <a:fillRect/>
           </a:stretch>
         </p:blipFill>
         <p:spPr>
           <a:xfrm>
-            <a:off x="12857356" y="7728464"/>
-            <a:ext cx="1703256" cy="400106"/>
+            <a:off x="11200875" y="6665142"/>
+            <a:ext cx="1143526" cy="279799"/>
           </a:xfrm>
           <a:prstGeom prst="rect">
             <a:avLst/>
@@ -5039,7 +5561,7 @@
 
 <file path=ppt/slides/slide6.xml><?xml version="1.0" encoding="utf-8"?>
 <p:sld xmlns:a="http://schemas.openxmlformats.org/drawingml/2006/main" xmlns:r="http://schemas.openxmlformats.org/officeDocument/2006/relationships" xmlns:p="http://schemas.openxmlformats.org/presentationml/2006/main">
-  <p:cSld name="Slide 6">
+  <p:cSld name="Slide 7">
     <p:spTree>
       <p:nvGrpSpPr>
         <p:cNvPr id="1" name=""/>
@@ -5056,14 +5578,14 @@
       </p:grpSpPr>
       <p:sp>
         <p:nvSpPr>
-          <p:cNvPr id="2" name="Text 0"/>
-          <p:cNvSpPr/>
-          <p:nvPr/>
-        </p:nvSpPr>
-        <p:spPr>
-          <a:xfrm>
-            <a:off x="793790" y="962739"/>
-            <a:ext cx="7205663" cy="744260"/>
+          <p:cNvPr id="3" name="Text 0"/>
+          <p:cNvSpPr/>
+          <p:nvPr/>
+        </p:nvSpPr>
+        <p:spPr>
+          <a:xfrm>
+            <a:off x="5233360" y="520105"/>
+            <a:ext cx="4626157" cy="502047"/>
           </a:xfrm>
           <a:prstGeom prst="rect">
             <a:avLst/>
@@ -5077,43 +5599,43 @@
           <a:p>
             <a:pPr marL="0" indent="0" algn="l">
               <a:lnSpc>
-                <a:spcPts val="5850"/>
+                <a:spcPct val="104000"/>
               </a:lnSpc>
               <a:buNone/>
             </a:pPr>
             <a:r>
-              <a:rPr lang="en-US" sz="4650" dirty="0">
-                <a:solidFill>
-                  <a:srgbClr val="020202"/>
-                </a:solidFill>
-                <a:latin typeface="PT Serif" pitchFamily="34" charset="0"/>
-                <a:ea typeface="PT Serif" pitchFamily="34" charset="-122"/>
-                <a:cs typeface="PT Serif" pitchFamily="34" charset="-120"/>
-              </a:rPr>
-              <a:t>Triedy a spustenie projektu</a:t>
-            </a:r>
-            <a:endParaRPr lang="en-US" sz="4650" dirty="0"/>
-          </a:p>
-        </p:txBody>
-      </p:sp>
-      <p:sp>
-        <p:nvSpPr>
-          <p:cNvPr id="3" name="Shape 1"/>
-          <p:cNvSpPr/>
-          <p:nvPr/>
-        </p:nvSpPr>
-        <p:spPr>
-          <a:xfrm>
-            <a:off x="793790" y="2160627"/>
-            <a:ext cx="6407944" cy="1324689"/>
+              <a:rPr lang="en-US" sz="3150" dirty="0">
+                <a:solidFill>
+                  <a:srgbClr val="FFFFFF"/>
+                </a:solidFill>
+                <a:latin typeface="Roboto Mono Medium" pitchFamily="34" charset="0"/>
+                <a:ea typeface="Roboto Mono Medium" pitchFamily="34" charset="-122"/>
+                <a:cs typeface="Roboto Mono Medium" pitchFamily="34" charset="-120"/>
+              </a:rPr>
+              <a:t>Zhrnutie</a:t>
+            </a:r>
+            <a:endParaRPr lang="en-US" sz="3150" dirty="0"/>
+          </a:p>
+        </p:txBody>
+      </p:sp>
+      <p:sp>
+        <p:nvSpPr>
+          <p:cNvPr id="4" name="Shape 1"/>
+          <p:cNvSpPr/>
+          <p:nvPr/>
+        </p:nvSpPr>
+        <p:spPr>
+          <a:xfrm>
+            <a:off x="5297214" y="1226939"/>
+            <a:ext cx="6233006" cy="898227"/>
           </a:xfrm>
           <a:prstGeom prst="roundRect">
             <a:avLst>
-              <a:gd name="adj" fmla="val 2568"/>
+              <a:gd name="adj" fmla="val 2683"/>
             </a:avLst>
           </a:prstGeom>
           <a:solidFill>
-            <a:srgbClr val="F2EEEE"/>
+            <a:srgbClr val="404040"/>
           </a:solidFill>
           <a:ln/>
         </p:spPr>
@@ -5127,14 +5649,14 @@
       </p:sp>
       <p:sp>
         <p:nvSpPr>
-          <p:cNvPr id="4" name="Text 2"/>
-          <p:cNvSpPr/>
-          <p:nvPr/>
-        </p:nvSpPr>
-        <p:spPr>
-          <a:xfrm>
-            <a:off x="1020604" y="2387441"/>
-            <a:ext cx="2977039" cy="372070"/>
+          <p:cNvPr id="5" name="Text 2"/>
+          <p:cNvSpPr/>
+          <p:nvPr/>
+        </p:nvSpPr>
+        <p:spPr>
+          <a:xfrm>
+            <a:off x="5393992" y="1387574"/>
+            <a:ext cx="2008236" cy="257373"/>
           </a:xfrm>
           <a:prstGeom prst="rect">
             <a:avLst/>
@@ -5148,35 +5670,46 @@
           <a:p>
             <a:pPr marL="0" indent="0" algn="l">
               <a:lnSpc>
-                <a:spcPts val="2900"/>
+                <a:spcPct val="104000"/>
               </a:lnSpc>
               <a:buNone/>
             </a:pPr>
             <a:r>
-              <a:rPr lang="en-US" sz="2300" dirty="0">
-                <a:solidFill>
-                  <a:srgbClr val="383838"/>
-                </a:solidFill>
-                <a:latin typeface="PT Serif" pitchFamily="34" charset="0"/>
-                <a:ea typeface="PT Serif" pitchFamily="34" charset="-122"/>
-                <a:cs typeface="PT Serif" pitchFamily="34" charset="-120"/>
-              </a:rPr>
-              <a:t>MinesweeperEngine</a:t>
-            </a:r>
-            <a:endParaRPr lang="en-US" sz="2300" dirty="0"/>
-          </a:p>
-        </p:txBody>
-      </p:sp>
-      <p:sp>
-        <p:nvSpPr>
-          <p:cNvPr id="5" name="Text 3"/>
-          <p:cNvSpPr/>
-          <p:nvPr/>
-        </p:nvSpPr>
-        <p:spPr>
-          <a:xfrm>
-            <a:off x="1020604" y="2895600"/>
-            <a:ext cx="5954316" cy="362903"/>
+              <a:rPr lang="en-US" sz="1550" dirty="0">
+                <a:solidFill>
+                  <a:srgbClr val="000000"/>
+                </a:solidFill>
+                <a:latin typeface="Roboto Mono Medium" pitchFamily="34" charset="0"/>
+                <a:ea typeface="Roboto Mono Medium" pitchFamily="34" charset="-122"/>
+                <a:cs typeface="Roboto Mono Medium" pitchFamily="34" charset="-120"/>
+              </a:rPr>
+              <a:t>🎮</a:t>
+            </a:r>
+            <a:r>
+              <a:rPr lang="en-US" sz="1550" dirty="0">
+                <a:solidFill>
+                  <a:srgbClr val="E5E0DF"/>
+                </a:solidFill>
+                <a:latin typeface="Roboto Mono Medium" pitchFamily="34" charset="0"/>
+                <a:ea typeface="Roboto Mono Medium" pitchFamily="34" charset="-122"/>
+                <a:cs typeface="Roboto Mono Medium" pitchFamily="34" charset="-120"/>
+              </a:rPr>
+              <a:t> Funkčná hra</a:t>
+            </a:r>
+            <a:endParaRPr lang="en-US" sz="1550" dirty="0"/>
+          </a:p>
+        </p:txBody>
+      </p:sp>
+      <p:sp>
+        <p:nvSpPr>
+          <p:cNvPr id="6" name="Text 3"/>
+          <p:cNvSpPr/>
+          <p:nvPr/>
+        </p:nvSpPr>
+        <p:spPr>
+          <a:xfrm>
+            <a:off x="5393992" y="1726803"/>
+            <a:ext cx="5975597" cy="237728"/>
           </a:xfrm>
           <a:prstGeom prst="rect">
             <a:avLst/>
@@ -5190,43 +5723,43 @@
           <a:p>
             <a:pPr marL="0" indent="0" algn="l">
               <a:lnSpc>
-                <a:spcPts val="2850"/>
+                <a:spcPct val="123000"/>
               </a:lnSpc>
               <a:buNone/>
             </a:pPr>
             <a:r>
-              <a:rPr lang="en-US" sz="1750" dirty="0">
-                <a:solidFill>
-                  <a:srgbClr val="383838"/>
-                </a:solidFill>
-                <a:latin typeface="DM Sans" pitchFamily="34" charset="0"/>
-                <a:ea typeface="DM Sans" pitchFamily="34" charset="-122"/>
-                <a:cs typeface="DM Sans" pitchFamily="34" charset="-120"/>
-              </a:rPr>
-              <a:t>Logika hry a správa herného stavu</a:t>
-            </a:r>
-            <a:endParaRPr lang="en-US" sz="1750" dirty="0"/>
-          </a:p>
-        </p:txBody>
-      </p:sp>
-      <p:sp>
-        <p:nvSpPr>
-          <p:cNvPr id="6" name="Shape 4"/>
-          <p:cNvSpPr/>
-          <p:nvPr/>
-        </p:nvSpPr>
-        <p:spPr>
-          <a:xfrm>
-            <a:off x="7428548" y="2160627"/>
-            <a:ext cx="6408063" cy="1324689"/>
+              <a:rPr lang="en-US" sz="1250" dirty="0">
+                <a:solidFill>
+                  <a:srgbClr val="E5E0DF"/>
+                </a:solidFill>
+                <a:latin typeface="Roboto" pitchFamily="34" charset="0"/>
+                <a:ea typeface="Roboto" pitchFamily="34" charset="-122"/>
+                <a:cs typeface="Roboto" pitchFamily="34" charset="-120"/>
+              </a:rPr>
+              <a:t>Kompletná implementácia Minesweeper s pravidlami a logikou</a:t>
+            </a:r>
+            <a:endParaRPr lang="en-US" sz="1250" dirty="0"/>
+          </a:p>
+        </p:txBody>
+      </p:sp>
+      <p:sp>
+        <p:nvSpPr>
+          <p:cNvPr id="7" name="Shape 4"/>
+          <p:cNvSpPr/>
+          <p:nvPr/>
+        </p:nvSpPr>
+        <p:spPr>
+          <a:xfrm>
+            <a:off x="5297214" y="2261691"/>
+            <a:ext cx="6233006" cy="898227"/>
           </a:xfrm>
           <a:prstGeom prst="roundRect">
             <a:avLst>
-              <a:gd name="adj" fmla="val 2568"/>
+              <a:gd name="adj" fmla="val 2683"/>
             </a:avLst>
           </a:prstGeom>
           <a:solidFill>
-            <a:srgbClr val="F2EEEE"/>
+            <a:srgbClr val="404040"/>
           </a:solidFill>
           <a:ln/>
         </p:spPr>
@@ -5240,14 +5773,14 @@
       </p:sp>
       <p:sp>
         <p:nvSpPr>
-          <p:cNvPr id="7" name="Text 5"/>
-          <p:cNvSpPr/>
-          <p:nvPr/>
-        </p:nvSpPr>
-        <p:spPr>
-          <a:xfrm>
-            <a:off x="7655362" y="2387441"/>
-            <a:ext cx="2977039" cy="372070"/>
+          <p:cNvPr id="8" name="Text 5"/>
+          <p:cNvSpPr/>
+          <p:nvPr/>
+        </p:nvSpPr>
+        <p:spPr>
+          <a:xfrm>
+            <a:off x="5393992" y="2422327"/>
+            <a:ext cx="2779345" cy="257373"/>
           </a:xfrm>
           <a:prstGeom prst="rect">
             <a:avLst/>
@@ -5261,35 +5794,46 @@
           <a:p>
             <a:pPr marL="0" indent="0" algn="l">
               <a:lnSpc>
-                <a:spcPts val="2900"/>
+                <a:spcPct val="104000"/>
               </a:lnSpc>
               <a:buNone/>
             </a:pPr>
             <a:r>
-              <a:rPr lang="en-US" sz="2300" dirty="0">
-                <a:solidFill>
-                  <a:srgbClr val="383838"/>
-                </a:solidFill>
-                <a:latin typeface="PT Serif" pitchFamily="34" charset="0"/>
-                <a:ea typeface="PT Serif" pitchFamily="34" charset="-122"/>
-                <a:cs typeface="PT Serif" pitchFamily="34" charset="-120"/>
-              </a:rPr>
-              <a:t>Difficulty</a:t>
-            </a:r>
-            <a:endParaRPr lang="en-US" sz="2300" dirty="0"/>
-          </a:p>
-        </p:txBody>
-      </p:sp>
-      <p:sp>
-        <p:nvSpPr>
-          <p:cNvPr id="8" name="Text 6"/>
-          <p:cNvSpPr/>
-          <p:nvPr/>
-        </p:nvSpPr>
-        <p:spPr>
-          <a:xfrm>
-            <a:off x="7655362" y="2895600"/>
-            <a:ext cx="5954435" cy="362903"/>
+              <a:rPr lang="en-US" sz="1550" dirty="0">
+                <a:solidFill>
+                  <a:srgbClr val="000000"/>
+                </a:solidFill>
+                <a:latin typeface="Roboto Mono Medium" pitchFamily="34" charset="0"/>
+                <a:ea typeface="Roboto Mono Medium" pitchFamily="34" charset="-122"/>
+                <a:cs typeface="Roboto Mono Medium" pitchFamily="34" charset="-120"/>
+              </a:rPr>
+              <a:t>🌐</a:t>
+            </a:r>
+            <a:r>
+              <a:rPr lang="en-US" sz="1550" dirty="0">
+                <a:solidFill>
+                  <a:srgbClr val="E5E0DF"/>
+                </a:solidFill>
+                <a:latin typeface="Roboto Mono Medium" pitchFamily="34" charset="0"/>
+                <a:ea typeface="Roboto Mono Medium" pitchFamily="34" charset="-122"/>
+                <a:cs typeface="Roboto Mono Medium" pitchFamily="34" charset="-120"/>
+              </a:rPr>
+              <a:t> Single + Multiplayer</a:t>
+            </a:r>
+            <a:endParaRPr lang="en-US" sz="1550" dirty="0"/>
+          </a:p>
+        </p:txBody>
+      </p:sp>
+      <p:sp>
+        <p:nvSpPr>
+          <p:cNvPr id="9" name="Text 6"/>
+          <p:cNvSpPr/>
+          <p:nvPr/>
+        </p:nvSpPr>
+        <p:spPr>
+          <a:xfrm>
+            <a:off x="5393992" y="2761555"/>
+            <a:ext cx="5975597" cy="237728"/>
           </a:xfrm>
           <a:prstGeom prst="rect">
             <a:avLst/>
@@ -5303,43 +5847,43 @@
           <a:p>
             <a:pPr marL="0" indent="0" algn="l">
               <a:lnSpc>
-                <a:spcPts val="2850"/>
+                <a:spcPct val="123000"/>
               </a:lnSpc>
               <a:buNone/>
             </a:pPr>
             <a:r>
-              <a:rPr lang="en-US" sz="1750" dirty="0">
-                <a:solidFill>
-                  <a:srgbClr val="383838"/>
-                </a:solidFill>
-                <a:latin typeface="DM Sans" pitchFamily="34" charset="0"/>
-                <a:ea typeface="DM Sans" pitchFamily="34" charset="-122"/>
-                <a:cs typeface="DM Sans" pitchFamily="34" charset="-120"/>
-              </a:rPr>
-              <a:t>Konfigurácia rôznych úrovní obtiažnosti</a:t>
-            </a:r>
-            <a:endParaRPr lang="en-US" sz="1750" dirty="0"/>
-          </a:p>
-        </p:txBody>
-      </p:sp>
-      <p:sp>
-        <p:nvSpPr>
-          <p:cNvPr id="9" name="Shape 7"/>
-          <p:cNvSpPr/>
-          <p:nvPr/>
-        </p:nvSpPr>
-        <p:spPr>
-          <a:xfrm>
-            <a:off x="793790" y="3712131"/>
-            <a:ext cx="6407944" cy="1324689"/>
+              <a:rPr lang="en-US" sz="1250" dirty="0">
+                <a:solidFill>
+                  <a:srgbClr val="E5E0DF"/>
+                </a:solidFill>
+                <a:latin typeface="Roboto" pitchFamily="34" charset="0"/>
+                <a:ea typeface="Roboto" pitchFamily="34" charset="-122"/>
+                <a:cs typeface="Roboto" pitchFamily="34" charset="-120"/>
+              </a:rPr>
+              <a:t>Podpora oboch režimov s LAN synchronizáciou</a:t>
+            </a:r>
+            <a:endParaRPr lang="en-US" sz="1250" dirty="0"/>
+          </a:p>
+        </p:txBody>
+      </p:sp>
+      <p:sp>
+        <p:nvSpPr>
+          <p:cNvPr id="10" name="Shape 7"/>
+          <p:cNvSpPr/>
+          <p:nvPr/>
+        </p:nvSpPr>
+        <p:spPr>
+          <a:xfrm>
+            <a:off x="5297214" y="3296444"/>
+            <a:ext cx="6233006" cy="898227"/>
           </a:xfrm>
           <a:prstGeom prst="roundRect">
             <a:avLst>
-              <a:gd name="adj" fmla="val 2568"/>
+              <a:gd name="adj" fmla="val 2683"/>
             </a:avLst>
           </a:prstGeom>
           <a:solidFill>
-            <a:srgbClr val="F2EEEE"/>
+            <a:srgbClr val="404040"/>
           </a:solidFill>
           <a:ln/>
         </p:spPr>
@@ -5353,14 +5897,14 @@
       </p:sp>
       <p:sp>
         <p:nvSpPr>
-          <p:cNvPr id="10" name="Text 8"/>
-          <p:cNvSpPr/>
-          <p:nvPr/>
-        </p:nvSpPr>
-        <p:spPr>
-          <a:xfrm>
-            <a:off x="1020604" y="3938945"/>
-            <a:ext cx="2977039" cy="372070"/>
+          <p:cNvPr id="11" name="Text 8"/>
+          <p:cNvSpPr/>
+          <p:nvPr/>
+        </p:nvSpPr>
+        <p:spPr>
+          <a:xfrm>
+            <a:off x="5393992" y="3457079"/>
+            <a:ext cx="3020242" cy="257373"/>
           </a:xfrm>
           <a:prstGeom prst="rect">
             <a:avLst/>
@@ -5374,35 +5918,46 @@
           <a:p>
             <a:pPr marL="0" indent="0" algn="l">
               <a:lnSpc>
-                <a:spcPts val="2900"/>
+                <a:spcPct val="104000"/>
               </a:lnSpc>
               <a:buNone/>
             </a:pPr>
             <a:r>
-              <a:rPr lang="en-US" sz="2300" dirty="0">
-                <a:solidFill>
-                  <a:srgbClr val="383838"/>
-                </a:solidFill>
-                <a:latin typeface="PT Serif" pitchFamily="34" charset="0"/>
-                <a:ea typeface="PT Serif" pitchFamily="34" charset="-122"/>
-                <a:cs typeface="PT Serif" pitchFamily="34" charset="-120"/>
-              </a:rPr>
-              <a:t>ScoreManager</a:t>
-            </a:r>
-            <a:endParaRPr lang="en-US" sz="2300" dirty="0"/>
-          </a:p>
-        </p:txBody>
-      </p:sp>
-      <p:sp>
-        <p:nvSpPr>
-          <p:cNvPr id="11" name="Text 9"/>
-          <p:cNvSpPr/>
-          <p:nvPr/>
-        </p:nvSpPr>
-        <p:spPr>
-          <a:xfrm>
-            <a:off x="1020604" y="4447103"/>
-            <a:ext cx="5954316" cy="362903"/>
+              <a:rPr lang="en-US" sz="1550" dirty="0">
+                <a:solidFill>
+                  <a:srgbClr val="000000"/>
+                </a:solidFill>
+                <a:latin typeface="Roboto Mono Medium" pitchFamily="34" charset="0"/>
+                <a:ea typeface="Roboto Mono Medium" pitchFamily="34" charset="-122"/>
+                <a:cs typeface="Roboto Mono Medium" pitchFamily="34" charset="-120"/>
+              </a:rPr>
+              <a:t>🏗️</a:t>
+            </a:r>
+            <a:r>
+              <a:rPr lang="en-US" sz="1550" dirty="0">
+                <a:solidFill>
+                  <a:srgbClr val="E5E0DF"/>
+                </a:solidFill>
+                <a:latin typeface="Roboto Mono Medium" pitchFamily="34" charset="0"/>
+                <a:ea typeface="Roboto Mono Medium" pitchFamily="34" charset="-122"/>
+                <a:cs typeface="Roboto Mono Medium" pitchFamily="34" charset="-120"/>
+              </a:rPr>
+              <a:t> Prehľadná architektúra</a:t>
+            </a:r>
+            <a:endParaRPr lang="en-US" sz="1550" dirty="0"/>
+          </a:p>
+        </p:txBody>
+      </p:sp>
+      <p:sp>
+        <p:nvSpPr>
+          <p:cNvPr id="12" name="Text 9"/>
+          <p:cNvSpPr/>
+          <p:nvPr/>
+        </p:nvSpPr>
+        <p:spPr>
+          <a:xfrm>
+            <a:off x="5393992" y="3796308"/>
+            <a:ext cx="5975597" cy="237728"/>
           </a:xfrm>
           <a:prstGeom prst="rect">
             <a:avLst/>
@@ -5416,43 +5971,43 @@
           <a:p>
             <a:pPr marL="0" indent="0" algn="l">
               <a:lnSpc>
-                <a:spcPts val="2850"/>
+                <a:spcPct val="123000"/>
               </a:lnSpc>
               <a:buNone/>
             </a:pPr>
             <a:r>
-              <a:rPr lang="en-US" sz="1750" dirty="0">
-                <a:solidFill>
-                  <a:srgbClr val="383838"/>
-                </a:solidFill>
-                <a:latin typeface="DM Sans" pitchFamily="34" charset="0"/>
-                <a:ea typeface="DM Sans" pitchFamily="34" charset="-122"/>
-                <a:cs typeface="DM Sans" pitchFamily="34" charset="-120"/>
-              </a:rPr>
-              <a:t>Správa a ukladanie skóre</a:t>
-            </a:r>
-            <a:endParaRPr lang="en-US" sz="1750" dirty="0"/>
-          </a:p>
-        </p:txBody>
-      </p:sp>
-      <p:sp>
-        <p:nvSpPr>
-          <p:cNvPr id="12" name="Shape 10"/>
-          <p:cNvSpPr/>
-          <p:nvPr/>
-        </p:nvSpPr>
-        <p:spPr>
-          <a:xfrm>
-            <a:off x="7428548" y="3712131"/>
-            <a:ext cx="6408063" cy="1324689"/>
+              <a:rPr lang="en-US" sz="1250" dirty="0">
+                <a:solidFill>
+                  <a:srgbClr val="E5E0DF"/>
+                </a:solidFill>
+                <a:latin typeface="Roboto" pitchFamily="34" charset="0"/>
+                <a:ea typeface="Roboto" pitchFamily="34" charset="-122"/>
+                <a:cs typeface="Roboto" pitchFamily="34" charset="-120"/>
+              </a:rPr>
+              <a:t>Modulárny dizajn s jasne oddelenými zodpovednosťami</a:t>
+            </a:r>
+            <a:endParaRPr lang="en-US" sz="1250" dirty="0"/>
+          </a:p>
+        </p:txBody>
+      </p:sp>
+      <p:sp>
+        <p:nvSpPr>
+          <p:cNvPr id="13" name="Shape 10"/>
+          <p:cNvSpPr/>
+          <p:nvPr/>
+        </p:nvSpPr>
+        <p:spPr>
+          <a:xfrm>
+            <a:off x="5297214" y="4331196"/>
+            <a:ext cx="6233006" cy="898227"/>
           </a:xfrm>
           <a:prstGeom prst="roundRect">
             <a:avLst>
-              <a:gd name="adj" fmla="val 2568"/>
+              <a:gd name="adj" fmla="val 2683"/>
             </a:avLst>
           </a:prstGeom>
           <a:solidFill>
-            <a:srgbClr val="F2EEEE"/>
+            <a:srgbClr val="404040"/>
           </a:solidFill>
           <a:ln/>
         </p:spPr>
@@ -5466,14 +6021,14 @@
       </p:sp>
       <p:sp>
         <p:nvSpPr>
-          <p:cNvPr id="13" name="Text 11"/>
-          <p:cNvSpPr/>
-          <p:nvPr/>
-        </p:nvSpPr>
-        <p:spPr>
-          <a:xfrm>
-            <a:off x="7655362" y="3938945"/>
-            <a:ext cx="3322915" cy="372070"/>
+          <p:cNvPr id="14" name="Text 11"/>
+          <p:cNvSpPr/>
+          <p:nvPr/>
+        </p:nvSpPr>
+        <p:spPr>
+          <a:xfrm>
+            <a:off x="5393992" y="4491831"/>
+            <a:ext cx="2658897" cy="257373"/>
           </a:xfrm>
           <a:prstGeom prst="rect">
             <a:avLst/>
@@ -5487,35 +6042,46 @@
           <a:p>
             <a:pPr marL="0" indent="0" algn="l">
               <a:lnSpc>
-                <a:spcPts val="2900"/>
+                <a:spcPct val="104000"/>
               </a:lnSpc>
               <a:buNone/>
             </a:pPr>
             <a:r>
-              <a:rPr lang="en-US" sz="2300" dirty="0">
-                <a:solidFill>
-                  <a:srgbClr val="383838"/>
-                </a:solidFill>
-                <a:latin typeface="PT Serif" pitchFamily="34" charset="0"/>
-                <a:ea typeface="PT Serif" pitchFamily="34" charset="-122"/>
-                <a:cs typeface="PT Serif" pitchFamily="34" charset="-120"/>
-              </a:rPr>
-              <a:t>MinesweeperPygameApp</a:t>
-            </a:r>
-            <a:endParaRPr lang="en-US" sz="2300" dirty="0"/>
-          </a:p>
-        </p:txBody>
-      </p:sp>
-      <p:sp>
-        <p:nvSpPr>
-          <p:cNvPr id="14" name="Text 12"/>
-          <p:cNvSpPr/>
-          <p:nvPr/>
-        </p:nvSpPr>
-        <p:spPr>
-          <a:xfrm>
-            <a:off x="7655362" y="4447103"/>
-            <a:ext cx="5954435" cy="362903"/>
+              <a:rPr lang="en-US" sz="1550" dirty="0">
+                <a:solidFill>
+                  <a:srgbClr val="000000"/>
+                </a:solidFill>
+                <a:latin typeface="Roboto Mono Medium" pitchFamily="34" charset="0"/>
+                <a:ea typeface="Roboto Mono Medium" pitchFamily="34" charset="-122"/>
+                <a:cs typeface="Roboto Mono Medium" pitchFamily="34" charset="-120"/>
+              </a:rPr>
+              <a:t>🚀</a:t>
+            </a:r>
+            <a:r>
+              <a:rPr lang="en-US" sz="1550" dirty="0">
+                <a:solidFill>
+                  <a:srgbClr val="E5E0DF"/>
+                </a:solidFill>
+                <a:latin typeface="Roboto Mono Medium" pitchFamily="34" charset="0"/>
+                <a:ea typeface="Roboto Mono Medium" pitchFamily="34" charset="-122"/>
+                <a:cs typeface="Roboto Mono Medium" pitchFamily="34" charset="-120"/>
+              </a:rPr>
+              <a:t> Moderné technológie</a:t>
+            </a:r>
+            <a:endParaRPr lang="en-US" sz="1550" dirty="0"/>
+          </a:p>
+        </p:txBody>
+      </p:sp>
+      <p:sp>
+        <p:nvSpPr>
+          <p:cNvPr id="15" name="Text 12"/>
+          <p:cNvSpPr/>
+          <p:nvPr/>
+        </p:nvSpPr>
+        <p:spPr>
+          <a:xfrm>
+            <a:off x="5393992" y="4831060"/>
+            <a:ext cx="5975597" cy="237728"/>
           </a:xfrm>
           <a:prstGeom prst="rect">
             <a:avLst/>
@@ -5529,72 +6095,43 @@
           <a:p>
             <a:pPr marL="0" indent="0" algn="l">
               <a:lnSpc>
-                <a:spcPts val="2850"/>
+                <a:spcPct val="123000"/>
               </a:lnSpc>
               <a:buNone/>
             </a:pPr>
             <a:r>
-              <a:rPr lang="en-US" sz="1750" dirty="0">
-                <a:solidFill>
-                  <a:srgbClr val="383838"/>
-                </a:solidFill>
-                <a:latin typeface="DM Sans" pitchFamily="34" charset="0"/>
-                <a:ea typeface="DM Sans" pitchFamily="34" charset="-122"/>
-                <a:cs typeface="DM Sans" pitchFamily="34" charset="-120"/>
-              </a:rPr>
-              <a:t>GUI aplikácia a grafické rozhranie</a:t>
-            </a:r>
-            <a:endParaRPr lang="en-US" sz="1750" dirty="0"/>
-          </a:p>
-        </p:txBody>
-      </p:sp>
-      <p:sp>
-        <p:nvSpPr>
-          <p:cNvPr id="15" name="Shape 13"/>
-          <p:cNvSpPr/>
-          <p:nvPr/>
-        </p:nvSpPr>
-        <p:spPr>
-          <a:xfrm>
-            <a:off x="793790" y="5405351"/>
-            <a:ext cx="13042821" cy="35957"/>
-          </a:xfrm>
-          <a:prstGeom prst="rect">
-            <a:avLst/>
-          </a:prstGeom>
-          <a:solidFill>
-            <a:srgbClr val="383838">
-              <a:alpha val="50000"/>
-            </a:srgbClr>
-          </a:solidFill>
-          <a:ln/>
-        </p:spPr>
-        <p:txBody>
-          <a:bodyPr/>
-          <a:lstStyle/>
-          <a:p>
-            <a:endParaRPr lang="sk-SK"/>
-          </a:p>
-        </p:txBody>
-      </p:sp>
-      <p:sp>
-        <p:nvSpPr>
-          <p:cNvPr id="16" name="Shape 14"/>
-          <p:cNvSpPr/>
-          <p:nvPr/>
-        </p:nvSpPr>
-        <p:spPr>
-          <a:xfrm>
-            <a:off x="793790" y="5696426"/>
-            <a:ext cx="13042821" cy="1570315"/>
+              <a:rPr lang="en-US" sz="1250" dirty="0">
+                <a:solidFill>
+                  <a:srgbClr val="E5E0DF"/>
+                </a:solidFill>
+                <a:latin typeface="Roboto" pitchFamily="34" charset="0"/>
+                <a:ea typeface="Roboto" pitchFamily="34" charset="-122"/>
+                <a:cs typeface="Roboto" pitchFamily="34" charset="-120"/>
+              </a:rPr>
+              <a:t>Python, Pygame, siete a OOP v praxi</a:t>
+            </a:r>
+            <a:endParaRPr lang="en-US" sz="1250" dirty="0"/>
+          </a:p>
+        </p:txBody>
+      </p:sp>
+      <p:sp>
+        <p:nvSpPr>
+          <p:cNvPr id="16" name="Shape 13"/>
+          <p:cNvSpPr/>
+          <p:nvPr/>
+        </p:nvSpPr>
+        <p:spPr>
+          <a:xfrm>
+            <a:off x="5297214" y="5383014"/>
+            <a:ext cx="6233006" cy="801291"/>
           </a:xfrm>
           <a:prstGeom prst="roundRect">
             <a:avLst>
-              <a:gd name="adj" fmla="val 2167"/>
+              <a:gd name="adj" fmla="val 3008"/>
             </a:avLst>
           </a:prstGeom>
           <a:solidFill>
-            <a:srgbClr val="FFCDB3"/>
+            <a:srgbClr val="183A13"/>
           </a:solidFill>
           <a:ln/>
         </p:spPr>
@@ -5608,7 +6145,7 @@
       </p:sp>
       <p:pic>
         <p:nvPicPr>
-          <p:cNvPr id="17" name="Image 0" descr="preencoded.png"/>
+          <p:cNvPr id="17" name="Image 1" descr="preencoded.png"/>
           <p:cNvPicPr>
             <a:picLocks noChangeAspect="1"/>
           </p:cNvPicPr>
@@ -5622,8 +6159,8 @@
         </p:blipFill>
         <p:spPr>
           <a:xfrm>
-            <a:off x="1020604" y="6016585"/>
-            <a:ext cx="372070" cy="297656"/>
+            <a:off x="5393992" y="5601891"/>
+            <a:ext cx="200814" cy="160635"/>
           </a:xfrm>
           <a:prstGeom prst="rect">
             <a:avLst/>
@@ -5632,14 +6169,14 @@
       </p:pic>
       <p:sp>
         <p:nvSpPr>
-          <p:cNvPr id="18" name="Text 15"/>
-          <p:cNvSpPr/>
-          <p:nvPr/>
-        </p:nvSpPr>
-        <p:spPr>
-          <a:xfrm>
-            <a:off x="1619488" y="5979914"/>
-            <a:ext cx="2977039" cy="372070"/>
+          <p:cNvPr id="18" name="Text 14"/>
+          <p:cNvSpPr/>
+          <p:nvPr/>
+        </p:nvSpPr>
+        <p:spPr>
+          <a:xfrm>
+            <a:off x="5755436" y="5545931"/>
+            <a:ext cx="5614153" cy="475456"/>
           </a:xfrm>
           <a:prstGeom prst="rect">
             <a:avLst/>
@@ -5648,128 +6185,38 @@
           <a:ln/>
         </p:spPr>
         <p:txBody>
-          <a:bodyPr wrap="none" lIns="0" tIns="0" rIns="0" bIns="0" rtlCol="0" anchor="t"/>
+          <a:bodyPr wrap="square" lIns="0" tIns="0" rIns="0" bIns="0" rtlCol="0" anchor="t">
+            <a:normAutofit/>
+          </a:bodyPr>
           <a:lstStyle/>
           <a:p>
             <a:pPr marL="0" indent="0" algn="l">
               <a:lnSpc>
-                <a:spcPts val="2900"/>
+                <a:spcPct val="123000"/>
               </a:lnSpc>
               <a:buNone/>
             </a:pPr>
             <a:r>
-              <a:rPr lang="en-US" sz="2300" dirty="0">
-                <a:solidFill>
-                  <a:srgbClr val="000000"/>
-                </a:solidFill>
-                <a:latin typeface="PT Serif" pitchFamily="34" charset="0"/>
-                <a:ea typeface="PT Serif" pitchFamily="34" charset="-122"/>
-                <a:cs typeface="PT Serif" pitchFamily="34" charset="-120"/>
-              </a:rPr>
-              <a:t>Spustenie projektu</a:t>
-            </a:r>
-            <a:endParaRPr lang="en-US" sz="2300" dirty="0"/>
-          </a:p>
-        </p:txBody>
-      </p:sp>
-      <p:sp>
-        <p:nvSpPr>
-          <p:cNvPr id="19" name="Text 16"/>
-          <p:cNvSpPr/>
-          <p:nvPr/>
-        </p:nvSpPr>
-        <p:spPr>
-          <a:xfrm>
-            <a:off x="1619488" y="6578798"/>
-            <a:ext cx="11990308" cy="370523"/>
-          </a:xfrm>
-          <a:prstGeom prst="rect">
-            <a:avLst/>
-          </a:prstGeom>
-          <a:noFill/>
-          <a:ln/>
-        </p:spPr>
-        <p:txBody>
-          <a:bodyPr wrap="none" lIns="0" tIns="0" rIns="0" bIns="0" rtlCol="0" anchor="t"/>
-          <a:lstStyle/>
-          <a:p>
-            <a:pPr marL="0" indent="0" algn="l">
-              <a:lnSpc>
-                <a:spcPts val="2850"/>
-              </a:lnSpc>
-              <a:buNone/>
-            </a:pPr>
-            <a:r>
-              <a:rPr lang="en-US" sz="1750" dirty="0">
-                <a:solidFill>
-                  <a:srgbClr val="000000"/>
-                </a:solidFill>
-                <a:latin typeface="DM Sans" pitchFamily="34" charset="0"/>
-                <a:ea typeface="DM Sans" pitchFamily="34" charset="-122"/>
-                <a:cs typeface="DM Sans" pitchFamily="34" charset="-120"/>
-              </a:rPr>
-              <a:t>Otvorte projekt v PyCharm → nainštalujte PyGame pomocou </a:t>
-            </a:r>
-            <a:r>
-              <a:rPr lang="en-US" sz="1750" dirty="0">
-                <a:solidFill>
-                  <a:srgbClr val="000000"/>
-                </a:solidFill>
-                <a:highlight>
-                  <a:srgbClr val="F2F2F2"/>
-                </a:highlight>
-                <a:latin typeface="Consolas" pitchFamily="34" charset="0"/>
-                <a:ea typeface="Consolas" pitchFamily="34" charset="-122"/>
-                <a:cs typeface="Consolas" pitchFamily="34" charset="-120"/>
-              </a:rPr>
-              <a:t>pip install pygame</a:t>
-            </a:r>
-            <a:r>
-              <a:rPr lang="en-US" sz="1750" dirty="0">
-                <a:solidFill>
-                  <a:srgbClr val="000000"/>
-                </a:solidFill>
-                <a:latin typeface="DM Sans" pitchFamily="34" charset="0"/>
-                <a:ea typeface="DM Sans" pitchFamily="34" charset="-122"/>
-                <a:cs typeface="DM Sans" pitchFamily="34" charset="-120"/>
-              </a:rPr>
-              <a:t> → spustite </a:t>
-            </a:r>
-            <a:r>
-              <a:rPr lang="en-US" sz="1750" dirty="0">
-                <a:solidFill>
-                  <a:srgbClr val="000000"/>
-                </a:solidFill>
-                <a:highlight>
-                  <a:srgbClr val="F2F2F2"/>
-                </a:highlight>
-                <a:latin typeface="Consolas" pitchFamily="34" charset="0"/>
-                <a:ea typeface="Consolas" pitchFamily="34" charset="-122"/>
-                <a:cs typeface="Consolas" pitchFamily="34" charset="-120"/>
-              </a:rPr>
-              <a:t>main.py</a:t>
-            </a:r>
-            <a:r>
-              <a:rPr lang="en-US" sz="1750" dirty="0">
-                <a:solidFill>
-                  <a:srgbClr val="000000"/>
-                </a:solidFill>
-                <a:latin typeface="DM Sans" pitchFamily="34" charset="0"/>
-                <a:ea typeface="DM Sans" pitchFamily="34" charset="-122"/>
-                <a:cs typeface="DM Sans" pitchFamily="34" charset="-120"/>
-              </a:rPr>
-              <a:t> a začnite hrať!</a:t>
-            </a:r>
-            <a:endParaRPr lang="en-US" sz="1750" dirty="0"/>
+              <a:rPr lang="en-US" sz="1250" dirty="0">
+                <a:solidFill>
+                  <a:srgbClr val="FFFFFF"/>
+                </a:solidFill>
+                <a:latin typeface="Roboto" pitchFamily="34" charset="0"/>
+                <a:ea typeface="Roboto" pitchFamily="34" charset="-122"/>
+                <a:cs typeface="Roboto" pitchFamily="34" charset="-120"/>
+              </a:rPr>
+              <a:t>Projekt demonštruje využitie programovania hier, práce so sieťami a objektovo orientovaného programovania v jazyku Python.</a:t>
+            </a:r>
+            <a:endParaRPr lang="en-US" sz="1250" dirty="0"/>
           </a:p>
         </p:txBody>
       </p:sp>
       <p:pic>
         <p:nvPicPr>
-          <p:cNvPr id="20" name="Obrázok 19">
+          <p:cNvPr id="19" name="Obrázok 18">
             <a:extLst>
               <a:ext uri="{FF2B5EF4-FFF2-40B4-BE49-F238E27FC236}">
-                <a16:creationId xmlns:a16="http://schemas.microsoft.com/office/drawing/2014/main" id="{F81310A3-E395-51DD-183C-FAF09CF7A228}"/>
+                <a16:creationId xmlns:a16="http://schemas.microsoft.com/office/drawing/2014/main" id="{C7F3E4C5-0C3D-0E43-40C4-899CC21A600F}"/>
               </a:ext>
             </a:extLst>
           </p:cNvPr>
@@ -5786,8 +6233,38 @@
         </p:blipFill>
         <p:spPr>
           <a:xfrm>
-            <a:off x="12857356" y="7728464"/>
-            <a:ext cx="1703256" cy="400106"/>
+            <a:off x="11048475" y="6512742"/>
+            <a:ext cx="1143526" cy="279799"/>
+          </a:xfrm>
+          <a:prstGeom prst="rect">
+            <a:avLst/>
+          </a:prstGeom>
+        </p:spPr>
+      </p:pic>
+      <p:pic>
+        <p:nvPicPr>
+          <p:cNvPr id="21" name="Obrázok 20" descr="Obrázok, na ktorom je ošatenie, chlap, osoba, text&#10;&#10;Automaticky generovaný popis">
+            <a:extLst>
+              <a:ext uri="{FF2B5EF4-FFF2-40B4-BE49-F238E27FC236}">
+                <a16:creationId xmlns:a16="http://schemas.microsoft.com/office/drawing/2014/main" id="{BBB38EF3-E846-201D-2453-4A1B464DD307}"/>
+              </a:ext>
+            </a:extLst>
+          </p:cNvPr>
+          <p:cNvPicPr>
+            <a:picLocks noChangeAspect="1"/>
+          </p:cNvPicPr>
+          <p:nvPr/>
+        </p:nvPicPr>
+        <p:blipFill>
+          <a:blip r:embed="rId5"/>
+          <a:stretch>
+            <a:fillRect/>
+          </a:stretch>
+        </p:blipFill>
+        <p:spPr>
+          <a:xfrm>
+            <a:off x="117051" y="1537542"/>
+            <a:ext cx="4880795" cy="4096445"/>
           </a:xfrm>
           <a:prstGeom prst="rect">
             <a:avLst/>

--- a/minesweeper_projekt.pptx
+++ b/minesweeper_projekt.pptx
@@ -5543,7 +5543,7 @@
         </p:blipFill>
         <p:spPr>
           <a:xfrm>
-            <a:off x="11200875" y="6665142"/>
+            <a:off x="11048475" y="6500886"/>
             <a:ext cx="1143526" cy="279799"/>
           </a:xfrm>
           <a:prstGeom prst="rect">
